--- a/docs/MASMC2026/Building the Synoptic Key of Life website_ an independent study.pptx
+++ b/docs/MASMC2026/Building the Synoptic Key of Life website_ an independent study.pptx
@@ -18,16 +18,24 @@
     <p:sldId id="263" r:id="rId12"/>
     <p:sldId id="264" r:id="rId13"/>
     <p:sldId id="265" r:id="rId14"/>
+    <p:sldId id="266" r:id="rId15"/>
+    <p:sldId id="267" r:id="rId16"/>
+    <p:sldId id="268" r:id="rId17"/>
+    <p:sldId id="269" r:id="rId18"/>
+    <p:sldId id="270" r:id="rId19"/>
+    <p:sldId id="271" r:id="rId20"/>
+    <p:sldId id="272" r:id="rId21"/>
+    <p:sldId id="273" r:id="rId22"/>
   </p:sldIdLst>
   <p:sldSz cy="6858000" cx="12192000"/>
   <p:notesSz cx="6858000" cy="9144000"/>
   <p:embeddedFontLst>
     <p:embeddedFont>
       <p:font typeface="Century Gothic"/>
-      <p:regular r:id="rId15"/>
-      <p:bold r:id="rId16"/>
-      <p:italic r:id="rId17"/>
-      <p:boldItalic r:id="rId18"/>
+      <p:regular r:id="rId23"/>
+      <p:bold r:id="rId24"/>
+      <p:italic r:id="rId25"/>
+      <p:boldItalic r:id="rId26"/>
     </p:embeddedFont>
   </p:embeddedFontLst>
   <p:defaultTextStyle>
@@ -261,7 +269,7 @@
   </p:defaultTextStyle>
   <p:extLst>
     <p:ext uri="GoogleSlidesCustomDataVersion2">
-      <go:slidesCustomData xmlns:go="http://customooxmlschemas.google.com/" r:id="rId19" roundtripDataSignature="AMtx7mhLaApqZnyqMaU68D5LNnWX1e/sUg=="/>
+      <go:slidesCustomData xmlns:go="http://customooxmlschemas.google.com/" r:id="rId27" roundtripDataSignature="AMtx7mj8lTPZWcS71jSLf4mtOoj4qlw+dQ=="/>
     </p:ext>
   </p:extLst>
 </p:presentation>
@@ -1799,7 +1807,84 @@
             </a:pPr>
             <a:r>
               <a:rPr lang="en-US"/>
-              <a:t>LeMonte</a:t>
+              <a:t>I’m La Monte Henry Piggy Yarroll, and I’m presenting a new tool to help mainly amateurs navigate the open and public domain taxonomic literature by creating detailed taxonomic descriptions. This work is part of my Master’s Degree in Applied Data Science at Syracuse University.</a:t>
+            </a:r>
+            <a:endParaRPr/>
+          </a:p>
+          <a:p>
+            <a:pPr indent="0" lvl="0" marL="0" rtl="0" algn="l">
+              <a:lnSpc>
+                <a:spcPct val="100000"/>
+              </a:lnSpc>
+              <a:spcBef>
+                <a:spcPts val="0"/>
+              </a:spcBef>
+              <a:spcAft>
+                <a:spcPts val="0"/>
+              </a:spcAft>
+              <a:buSzPts val="1400"/>
+              <a:buNone/>
+            </a:pPr>
+            <a:r>
+              <a:t/>
+            </a:r>
+            <a:endParaRPr/>
+          </a:p>
+          <a:p>
+            <a:pPr indent="0" lvl="0" marL="0" rtl="0" algn="l">
+              <a:lnSpc>
+                <a:spcPct val="100000"/>
+              </a:lnSpc>
+              <a:spcBef>
+                <a:spcPts val="0"/>
+              </a:spcBef>
+              <a:spcAft>
+                <a:spcPts val="0"/>
+              </a:spcAft>
+              <a:buSzPts val="1400"/>
+              <a:buNone/>
+            </a:pPr>
+            <a:r>
+              <a:rPr lang="en-US"/>
+              <a:t>I’ll discuss the construction of the system, and then I’ll walk through the user interface.</a:t>
+            </a:r>
+            <a:endParaRPr/>
+          </a:p>
+          <a:p>
+            <a:pPr indent="0" lvl="0" marL="0" rtl="0" algn="l">
+              <a:lnSpc>
+                <a:spcPct val="100000"/>
+              </a:lnSpc>
+              <a:spcBef>
+                <a:spcPts val="0"/>
+              </a:spcBef>
+              <a:spcAft>
+                <a:spcPts val="0"/>
+              </a:spcAft>
+              <a:buSzPts val="1400"/>
+              <a:buNone/>
+            </a:pPr>
+            <a:r>
+              <a:t/>
+            </a:r>
+            <a:endParaRPr/>
+          </a:p>
+          <a:p>
+            <a:pPr indent="0" lvl="0" marL="0" rtl="0" algn="l">
+              <a:lnSpc>
+                <a:spcPct val="100000"/>
+              </a:lnSpc>
+              <a:spcBef>
+                <a:spcPts val="0"/>
+              </a:spcBef>
+              <a:spcAft>
+                <a:spcPts val="0"/>
+              </a:spcAft>
+              <a:buSzPts val="1400"/>
+              <a:buNone/>
+            </a:pPr>
+            <a:r>
+              <a:t/>
             </a:r>
             <a:endParaRPr/>
           </a:p>
@@ -1886,7 +1971,7 @@
   <p:cSld>
     <p:spTree>
       <p:nvGrpSpPr>
-        <p:cNvPr id="222" name="Shape 222"/>
+        <p:cNvPr id="227" name="Shape 227"/>
         <p:cNvGrpSpPr/>
         <p:nvPr/>
       </p:nvGrpSpPr>
@@ -1900,7 +1985,7 @@
       </p:grpSpPr>
       <p:sp>
         <p:nvSpPr>
-          <p:cNvPr id="223" name="Google Shape;223;g3cd5945c579_0_79:notes"/>
+          <p:cNvPr id="228" name="Google Shape;228;g3cd5945c579_0_126:notes"/>
           <p:cNvSpPr/>
           <p:nvPr>
             <p:ph idx="2" type="sldImg"/>
@@ -1945,7 +2030,7 @@
       </p:sp>
       <p:sp>
         <p:nvSpPr>
-          <p:cNvPr id="224" name="Google Shape;224;g3cd5945c579_0_79:notes"/>
+          <p:cNvPr id="229" name="Google Shape;229;g3cd5945c579_0_126:notes"/>
           <p:cNvSpPr txBox="1"/>
           <p:nvPr>
             <p:ph idx="1" type="body"/>
@@ -1971,21 +2056,110 @@
           <a:lstStyle/>
           <a:p>
             <a:pPr indent="0" lvl="0" marL="0" rtl="0" algn="l">
-              <a:lnSpc>
-                <a:spcPct val="100000"/>
-              </a:lnSpc>
-              <a:spcBef>
-                <a:spcPts val="0"/>
-              </a:spcBef>
-              <a:spcAft>
-                <a:spcPts val="0"/>
-              </a:spcAft>
-              <a:buSzPts val="1400"/>
+              <a:spcBef>
+                <a:spcPts val="0"/>
+              </a:spcBef>
+              <a:spcAft>
+                <a:spcPts val="0"/>
+              </a:spcAft>
+              <a:buClr>
+                <a:schemeClr val="dk1"/>
+              </a:buClr>
+              <a:buSzPts val="1100"/>
+              <a:buFont typeface="Arial"/>
               <a:buNone/>
             </a:pPr>
             <a:r>
               <a:rPr lang="en-US"/>
-              <a:t>LeMonte</a:t>
+              <a:t>This is a search result page. We have the full species name and description from the literature. We also provide links to a local PDF if it is available, and the link back to the original source.</a:t>
+            </a:r>
+            <a:endParaRPr/>
+          </a:p>
+          <a:p>
+            <a:pPr indent="0" lvl="0" marL="0" rtl="0" algn="l">
+              <a:spcBef>
+                <a:spcPts val="0"/>
+              </a:spcBef>
+              <a:spcAft>
+                <a:spcPts val="0"/>
+              </a:spcAft>
+              <a:buClr>
+                <a:schemeClr val="dk1"/>
+              </a:buClr>
+              <a:buSzPts val="1100"/>
+              <a:buFont typeface="Arial"/>
+              <a:buNone/>
+            </a:pPr>
+            <a:r>
+              <a:t/>
+            </a:r>
+            <a:endParaRPr/>
+          </a:p>
+          <a:p>
+            <a:pPr indent="0" lvl="0" marL="0" rtl="0" algn="l">
+              <a:spcBef>
+                <a:spcPts val="0"/>
+              </a:spcBef>
+              <a:spcAft>
+                <a:spcPts val="0"/>
+              </a:spcAft>
+              <a:buClr>
+                <a:schemeClr val="dk1"/>
+              </a:buClr>
+              <a:buSzPts val="1100"/>
+              <a:buFont typeface="Arial"/>
+              <a:buNone/>
+            </a:pPr>
+            <a:r>
+              <a:rPr lang="en-US"/>
+              <a:t>We can also associate identifiers from other </a:t>
+            </a:r>
+            <a:r>
+              <a:rPr lang="en-US"/>
+              <a:t>repositories</a:t>
+            </a:r>
+            <a:r>
+              <a:rPr lang="en-US"/>
+              <a:t>, such as iNat or MO numbers, or accession numbers for a fungarium. A planned feature will allow the taxonomist to add a description to the iNat entry with a single click.</a:t>
+            </a:r>
+            <a:endParaRPr/>
+          </a:p>
+          <a:p>
+            <a:pPr indent="0" lvl="0" marL="0" rtl="0" algn="l">
+              <a:spcBef>
+                <a:spcPts val="0"/>
+              </a:spcBef>
+              <a:spcAft>
+                <a:spcPts val="0"/>
+              </a:spcAft>
+              <a:buClr>
+                <a:schemeClr val="dk1"/>
+              </a:buClr>
+              <a:buSzPts val="1100"/>
+              <a:buFont typeface="Arial"/>
+              <a:buNone/>
+            </a:pPr>
+            <a:r>
+              <a:t/>
+            </a:r>
+            <a:endParaRPr/>
+          </a:p>
+          <a:p>
+            <a:pPr indent="0" lvl="0" marL="0" rtl="0" algn="l">
+              <a:lnSpc>
+                <a:spcPct val="100000"/>
+              </a:lnSpc>
+              <a:spcBef>
+                <a:spcPts val="0"/>
+              </a:spcBef>
+              <a:spcAft>
+                <a:spcPts val="0"/>
+              </a:spcAft>
+              <a:buSzPts val="1400"/>
+              <a:buNone/>
+            </a:pPr>
+            <a:r>
+              <a:t/>
             </a:r>
             <a:endParaRPr/>
           </a:p>
@@ -1993,7 +2167,1513 @@
       </p:sp>
       <p:sp>
         <p:nvSpPr>
-          <p:cNvPr id="225" name="Google Shape;225;g3cd5945c579_0_79:notes"/>
+          <p:cNvPr id="230" name="Google Shape;230;g3cd5945c579_0_126:notes"/>
+          <p:cNvSpPr txBox="1"/>
+          <p:nvPr>
+            <p:ph idx="12" type="sldNum"/>
+          </p:nvPr>
+        </p:nvSpPr>
+        <p:spPr>
+          <a:xfrm>
+            <a:off x="3884613" y="8685213"/>
+            <a:ext cx="2971800" cy="458700"/>
+          </a:xfrm>
+          <a:prstGeom prst="rect">
+            <a:avLst/>
+          </a:prstGeom>
+          <a:noFill/>
+          <a:ln>
+            <a:noFill/>
+          </a:ln>
+        </p:spPr>
+        <p:txBody>
+          <a:bodyPr anchorCtr="0" anchor="b" bIns="45700" lIns="91425" spcFirstLastPara="1" rIns="91425" wrap="square" tIns="45700">
+            <a:noAutofit/>
+          </a:bodyPr>
+          <a:lstStyle/>
+          <a:p>
+            <a:pPr indent="0" lvl="0" marL="0" rtl="0" algn="r">
+              <a:lnSpc>
+                <a:spcPct val="100000"/>
+              </a:lnSpc>
+              <a:spcBef>
+                <a:spcPts val="0"/>
+              </a:spcBef>
+              <a:spcAft>
+                <a:spcPts val="0"/>
+              </a:spcAft>
+              <a:buSzPts val="1400"/>
+              <a:buNone/>
+            </a:pPr>
+            <a:fld id="{00000000-1234-1234-1234-123412341234}" type="slidenum">
+              <a:rPr lang="en-US"/>
+              <a:t>‹#›</a:t>
+            </a:fld>
+            <a:endParaRPr/>
+          </a:p>
+        </p:txBody>
+      </p:sp>
+    </p:spTree>
+  </p:cSld>
+  <p:clrMapOvr>
+    <a:masterClrMapping/>
+  </p:clrMapOvr>
+</p:notes>
+</file>
+
+<file path=ppt/notesSlides/notesSlide11.xml><?xml version="1.0" encoding="utf-8"?>
+<p:notes xmlns:a="http://schemas.openxmlformats.org/drawingml/2006/main" xmlns:r="http://schemas.openxmlformats.org/officeDocument/2006/relationships" xmlns:mc="http://schemas.openxmlformats.org/markup-compatibility/2006" xmlns:mv="urn:schemas-microsoft-com:mac:vml" xmlns:p="http://schemas.openxmlformats.org/presentationml/2006/main" xmlns:c="http://schemas.openxmlformats.org/drawingml/2006/chart" xmlns:dgm="http://schemas.openxmlformats.org/drawingml/2006/diagram" xmlns:o="urn:schemas-microsoft-com:office:office" xmlns:v="urn:schemas-microsoft-com:vml" xmlns:pvml="urn:schemas-microsoft-com:office:powerpoint" xmlns:com="http://schemas.openxmlformats.org/drawingml/2006/compatibility" xmlns:p14="http://schemas.microsoft.com/office/powerpoint/2010/main" xmlns:p15="http://schemas.microsoft.com/office/powerpoint/2012/main" xmlns:ahyp="http://schemas.microsoft.com/office/drawing/2018/hyperlinkcolor" showMasterPhAnim="0" showMasterSp="0">
+  <p:cSld>
+    <p:spTree>
+      <p:nvGrpSpPr>
+        <p:cNvPr id="235" name="Shape 235"/>
+        <p:cNvGrpSpPr/>
+        <p:nvPr/>
+      </p:nvGrpSpPr>
+      <p:grpSpPr>
+        <a:xfrm>
+          <a:off x="0" y="0"/>
+          <a:ext cx="0" cy="0"/>
+          <a:chOff x="0" y="0"/>
+          <a:chExt cx="0" cy="0"/>
+        </a:xfrm>
+      </p:grpSpPr>
+      <p:sp>
+        <p:nvSpPr>
+          <p:cNvPr id="236" name="Google Shape;236;g3cdd6918556_0_0:notes"/>
+          <p:cNvSpPr/>
+          <p:nvPr>
+            <p:ph idx="2" type="sldImg"/>
+          </p:nvPr>
+        </p:nvSpPr>
+        <p:spPr>
+          <a:xfrm>
+            <a:off x="685800" y="1143000"/>
+            <a:ext cx="5486400" cy="3086100"/>
+          </a:xfrm>
+          <a:custGeom>
+            <a:rect b="b" l="l" r="r" t="t"/>
+            <a:pathLst>
+              <a:path extrusionOk="0" h="120000" w="120000">
+                <a:moveTo>
+                  <a:pt x="0" y="0"/>
+                </a:moveTo>
+                <a:lnTo>
+                  <a:pt x="120000" y="0"/>
+                </a:lnTo>
+                <a:lnTo>
+                  <a:pt x="120000" y="120000"/>
+                </a:lnTo>
+                <a:lnTo>
+                  <a:pt x="0" y="120000"/>
+                </a:lnTo>
+                <a:close/>
+              </a:path>
+            </a:pathLst>
+          </a:custGeom>
+          <a:noFill/>
+          <a:ln cap="flat" cmpd="sng" w="12700">
+            <a:solidFill>
+              <a:srgbClr val="000000"/>
+            </a:solidFill>
+            <a:prstDash val="solid"/>
+            <a:round/>
+            <a:headEnd len="sm" w="sm" type="none"/>
+            <a:tailEnd len="sm" w="sm" type="none"/>
+          </a:ln>
+        </p:spPr>
+      </p:sp>
+      <p:sp>
+        <p:nvSpPr>
+          <p:cNvPr id="237" name="Google Shape;237;g3cdd6918556_0_0:notes"/>
+          <p:cNvSpPr txBox="1"/>
+          <p:nvPr>
+            <p:ph idx="1" type="body"/>
+          </p:nvPr>
+        </p:nvSpPr>
+        <p:spPr>
+          <a:xfrm>
+            <a:off x="685800" y="4400550"/>
+            <a:ext cx="5486400" cy="3600600"/>
+          </a:xfrm>
+          <a:prstGeom prst="rect">
+            <a:avLst/>
+          </a:prstGeom>
+          <a:noFill/>
+          <a:ln>
+            <a:noFill/>
+          </a:ln>
+        </p:spPr>
+        <p:txBody>
+          <a:bodyPr anchorCtr="0" anchor="t" bIns="45700" lIns="91425" spcFirstLastPara="1" rIns="91425" wrap="square" tIns="45700">
+            <a:noAutofit/>
+          </a:bodyPr>
+          <a:lstStyle/>
+          <a:p>
+            <a:pPr indent="0" lvl="0" marL="0" rtl="0" algn="l">
+              <a:spcBef>
+                <a:spcPts val="0"/>
+              </a:spcBef>
+              <a:spcAft>
+                <a:spcPts val="0"/>
+              </a:spcAft>
+              <a:buClr>
+                <a:schemeClr val="dk1"/>
+              </a:buClr>
+              <a:buSzPts val="1100"/>
+              <a:buFont typeface="Arial"/>
+              <a:buNone/>
+            </a:pPr>
+            <a:r>
+              <a:rPr lang="en-US"/>
+              <a:t>This is the simplest of the feature tools, which creates nested menus base on the JSON hierarchical representations of descriptions. This is a static set of menus and is not tied to the current description.</a:t>
+            </a:r>
+            <a:endParaRPr/>
+          </a:p>
+          <a:p>
+            <a:pPr indent="0" lvl="0" marL="0" rtl="0" algn="l">
+              <a:spcBef>
+                <a:spcPts val="0"/>
+              </a:spcBef>
+              <a:spcAft>
+                <a:spcPts val="0"/>
+              </a:spcAft>
+              <a:buClr>
+                <a:schemeClr val="dk1"/>
+              </a:buClr>
+              <a:buSzPts val="1100"/>
+              <a:buFont typeface="Arial"/>
+              <a:buNone/>
+            </a:pPr>
+            <a:r>
+              <a:t/>
+            </a:r>
+            <a:endParaRPr/>
+          </a:p>
+          <a:p>
+            <a:pPr indent="0" lvl="0" marL="0" rtl="0" algn="l">
+              <a:lnSpc>
+                <a:spcPct val="100000"/>
+              </a:lnSpc>
+              <a:spcBef>
+                <a:spcPts val="0"/>
+              </a:spcBef>
+              <a:spcAft>
+                <a:spcPts val="0"/>
+              </a:spcAft>
+              <a:buSzPts val="1400"/>
+              <a:buNone/>
+            </a:pPr>
+            <a:r>
+              <a:t/>
+            </a:r>
+            <a:endParaRPr/>
+          </a:p>
+        </p:txBody>
+      </p:sp>
+      <p:sp>
+        <p:nvSpPr>
+          <p:cNvPr id="238" name="Google Shape;238;g3cdd6918556_0_0:notes"/>
+          <p:cNvSpPr txBox="1"/>
+          <p:nvPr>
+            <p:ph idx="12" type="sldNum"/>
+          </p:nvPr>
+        </p:nvSpPr>
+        <p:spPr>
+          <a:xfrm>
+            <a:off x="3884613" y="8685213"/>
+            <a:ext cx="2971800" cy="458700"/>
+          </a:xfrm>
+          <a:prstGeom prst="rect">
+            <a:avLst/>
+          </a:prstGeom>
+          <a:noFill/>
+          <a:ln>
+            <a:noFill/>
+          </a:ln>
+        </p:spPr>
+        <p:txBody>
+          <a:bodyPr anchorCtr="0" anchor="b" bIns="45700" lIns="91425" spcFirstLastPara="1" rIns="91425" wrap="square" tIns="45700">
+            <a:noAutofit/>
+          </a:bodyPr>
+          <a:lstStyle/>
+          <a:p>
+            <a:pPr indent="0" lvl="0" marL="0" rtl="0" algn="r">
+              <a:lnSpc>
+                <a:spcPct val="100000"/>
+              </a:lnSpc>
+              <a:spcBef>
+                <a:spcPts val="0"/>
+              </a:spcBef>
+              <a:spcAft>
+                <a:spcPts val="0"/>
+              </a:spcAft>
+              <a:buSzPts val="1400"/>
+              <a:buNone/>
+            </a:pPr>
+            <a:fld id="{00000000-1234-1234-1234-123412341234}" type="slidenum">
+              <a:rPr lang="en-US"/>
+              <a:t>‹#›</a:t>
+            </a:fld>
+            <a:endParaRPr/>
+          </a:p>
+        </p:txBody>
+      </p:sp>
+    </p:spTree>
+  </p:cSld>
+  <p:clrMapOvr>
+    <a:masterClrMapping/>
+  </p:clrMapOvr>
+</p:notes>
+</file>
+
+<file path=ppt/notesSlides/notesSlide12.xml><?xml version="1.0" encoding="utf-8"?>
+<p:notes xmlns:a="http://schemas.openxmlformats.org/drawingml/2006/main" xmlns:r="http://schemas.openxmlformats.org/officeDocument/2006/relationships" xmlns:mc="http://schemas.openxmlformats.org/markup-compatibility/2006" xmlns:mv="urn:schemas-microsoft-com:mac:vml" xmlns:p="http://schemas.openxmlformats.org/presentationml/2006/main" xmlns:c="http://schemas.openxmlformats.org/drawingml/2006/chart" xmlns:dgm="http://schemas.openxmlformats.org/drawingml/2006/diagram" xmlns:o="urn:schemas-microsoft-com:office:office" xmlns:v="urn:schemas-microsoft-com:vml" xmlns:pvml="urn:schemas-microsoft-com:office:powerpoint" xmlns:com="http://schemas.openxmlformats.org/drawingml/2006/compatibility" xmlns:p14="http://schemas.microsoft.com/office/powerpoint/2010/main" xmlns:p15="http://schemas.microsoft.com/office/powerpoint/2012/main" xmlns:ahyp="http://schemas.microsoft.com/office/drawing/2018/hyperlinkcolor" showMasterPhAnim="0" showMasterSp="0">
+  <p:cSld>
+    <p:spTree>
+      <p:nvGrpSpPr>
+        <p:cNvPr id="243" name="Shape 243"/>
+        <p:cNvGrpSpPr/>
+        <p:nvPr/>
+      </p:nvGrpSpPr>
+      <p:grpSpPr>
+        <a:xfrm>
+          <a:off x="0" y="0"/>
+          <a:ext cx="0" cy="0"/>
+          <a:chOff x="0" y="0"/>
+          <a:chExt cx="0" cy="0"/>
+        </a:xfrm>
+      </p:grpSpPr>
+      <p:sp>
+        <p:nvSpPr>
+          <p:cNvPr id="244" name="Google Shape;244;g3cd5945c579_0_130:notes"/>
+          <p:cNvSpPr/>
+          <p:nvPr>
+            <p:ph idx="2" type="sldImg"/>
+          </p:nvPr>
+        </p:nvSpPr>
+        <p:spPr>
+          <a:xfrm>
+            <a:off x="685800" y="1143000"/>
+            <a:ext cx="5486400" cy="3086100"/>
+          </a:xfrm>
+          <a:custGeom>
+            <a:rect b="b" l="l" r="r" t="t"/>
+            <a:pathLst>
+              <a:path extrusionOk="0" h="120000" w="120000">
+                <a:moveTo>
+                  <a:pt x="0" y="0"/>
+                </a:moveTo>
+                <a:lnTo>
+                  <a:pt x="120000" y="0"/>
+                </a:lnTo>
+                <a:lnTo>
+                  <a:pt x="120000" y="120000"/>
+                </a:lnTo>
+                <a:lnTo>
+                  <a:pt x="0" y="120000"/>
+                </a:lnTo>
+                <a:close/>
+              </a:path>
+            </a:pathLst>
+          </a:custGeom>
+          <a:noFill/>
+          <a:ln cap="flat" cmpd="sng" w="12700">
+            <a:solidFill>
+              <a:srgbClr val="000000"/>
+            </a:solidFill>
+            <a:prstDash val="solid"/>
+            <a:round/>
+            <a:headEnd len="sm" w="sm" type="none"/>
+            <a:tailEnd len="sm" w="sm" type="none"/>
+          </a:ln>
+        </p:spPr>
+      </p:sp>
+      <p:sp>
+        <p:nvSpPr>
+          <p:cNvPr id="245" name="Google Shape;245;g3cd5945c579_0_130:notes"/>
+          <p:cNvSpPr txBox="1"/>
+          <p:nvPr>
+            <p:ph idx="1" type="body"/>
+          </p:nvPr>
+        </p:nvSpPr>
+        <p:spPr>
+          <a:xfrm>
+            <a:off x="685800" y="4400550"/>
+            <a:ext cx="5486400" cy="3600600"/>
+          </a:xfrm>
+          <a:prstGeom prst="rect">
+            <a:avLst/>
+          </a:prstGeom>
+          <a:noFill/>
+          <a:ln>
+            <a:noFill/>
+          </a:ln>
+        </p:spPr>
+        <p:txBody>
+          <a:bodyPr anchorCtr="0" anchor="t" bIns="45700" lIns="91425" spcFirstLastPara="1" rIns="91425" wrap="square" tIns="45700">
+            <a:noAutofit/>
+          </a:bodyPr>
+          <a:lstStyle/>
+          <a:p>
+            <a:pPr indent="0" lvl="0" marL="0" rtl="0" algn="l">
+              <a:spcBef>
+                <a:spcPts val="0"/>
+              </a:spcBef>
+              <a:spcAft>
+                <a:spcPts val="0"/>
+              </a:spcAft>
+              <a:buClr>
+                <a:schemeClr val="dk1"/>
+              </a:buClr>
+              <a:buSzPts val="1100"/>
+              <a:buFont typeface="Arial"/>
+              <a:buNone/>
+            </a:pPr>
+            <a:r>
+              <a:rPr lang="en-US"/>
+              <a:t>These two tools are based on decision tree models built on-the-fly from the top few taxa that most closely match the current description. The decision tree on the left is based on just the vocabulary of the descriptions. The decision tree on the right is based on the hierarchical JSON representation.</a:t>
+            </a:r>
+            <a:endParaRPr/>
+          </a:p>
+          <a:p>
+            <a:pPr indent="0" lvl="0" marL="0" rtl="0" algn="l">
+              <a:spcBef>
+                <a:spcPts val="0"/>
+              </a:spcBef>
+              <a:spcAft>
+                <a:spcPts val="0"/>
+              </a:spcAft>
+              <a:buClr>
+                <a:schemeClr val="dk1"/>
+              </a:buClr>
+              <a:buSzPts val="1100"/>
+              <a:buFont typeface="Arial"/>
+              <a:buNone/>
+            </a:pPr>
+            <a:r>
+              <a:t/>
+            </a:r>
+            <a:endParaRPr/>
+          </a:p>
+          <a:p>
+            <a:pPr indent="0" lvl="0" marL="0" rtl="0" algn="l">
+              <a:spcBef>
+                <a:spcPts val="0"/>
+              </a:spcBef>
+              <a:spcAft>
+                <a:spcPts val="0"/>
+              </a:spcAft>
+              <a:buClr>
+                <a:schemeClr val="dk1"/>
+              </a:buClr>
+              <a:buSzPts val="1100"/>
+              <a:buFont typeface="Arial"/>
+              <a:buNone/>
+            </a:pPr>
+            <a:r>
+              <a:rPr lang="en-US"/>
+              <a:t>Each feature is a vertical cut through a JSON representation, from feature down to value. The user is invited to edit the preview to </a:t>
+            </a:r>
+            <a:r>
+              <a:rPr lang="en-US"/>
+              <a:t>reflect their collection.</a:t>
+            </a:r>
+            <a:endParaRPr/>
+          </a:p>
+        </p:txBody>
+      </p:sp>
+      <p:sp>
+        <p:nvSpPr>
+          <p:cNvPr id="246" name="Google Shape;246;g3cd5945c579_0_130:notes"/>
+          <p:cNvSpPr txBox="1"/>
+          <p:nvPr>
+            <p:ph idx="12" type="sldNum"/>
+          </p:nvPr>
+        </p:nvSpPr>
+        <p:spPr>
+          <a:xfrm>
+            <a:off x="3884613" y="8685213"/>
+            <a:ext cx="2971800" cy="458700"/>
+          </a:xfrm>
+          <a:prstGeom prst="rect">
+            <a:avLst/>
+          </a:prstGeom>
+          <a:noFill/>
+          <a:ln>
+            <a:noFill/>
+          </a:ln>
+        </p:spPr>
+        <p:txBody>
+          <a:bodyPr anchorCtr="0" anchor="b" bIns="45700" lIns="91425" spcFirstLastPara="1" rIns="91425" wrap="square" tIns="45700">
+            <a:noAutofit/>
+          </a:bodyPr>
+          <a:lstStyle/>
+          <a:p>
+            <a:pPr indent="0" lvl="0" marL="0" rtl="0" algn="r">
+              <a:lnSpc>
+                <a:spcPct val="100000"/>
+              </a:lnSpc>
+              <a:spcBef>
+                <a:spcPts val="0"/>
+              </a:spcBef>
+              <a:spcAft>
+                <a:spcPts val="0"/>
+              </a:spcAft>
+              <a:buSzPts val="1400"/>
+              <a:buNone/>
+            </a:pPr>
+            <a:fld id="{00000000-1234-1234-1234-123412341234}" type="slidenum">
+              <a:rPr lang="en-US"/>
+              <a:t>‹#›</a:t>
+            </a:fld>
+            <a:endParaRPr/>
+          </a:p>
+        </p:txBody>
+      </p:sp>
+    </p:spTree>
+  </p:cSld>
+  <p:clrMapOvr>
+    <a:masterClrMapping/>
+  </p:clrMapOvr>
+</p:notes>
+</file>
+
+<file path=ppt/notesSlides/notesSlide13.xml><?xml version="1.0" encoding="utf-8"?>
+<p:notes xmlns:a="http://schemas.openxmlformats.org/drawingml/2006/main" xmlns:r="http://schemas.openxmlformats.org/officeDocument/2006/relationships" xmlns:mc="http://schemas.openxmlformats.org/markup-compatibility/2006" xmlns:mv="urn:schemas-microsoft-com:mac:vml" xmlns:p="http://schemas.openxmlformats.org/presentationml/2006/main" xmlns:c="http://schemas.openxmlformats.org/drawingml/2006/chart" xmlns:dgm="http://schemas.openxmlformats.org/drawingml/2006/diagram" xmlns:o="urn:schemas-microsoft-com:office:office" xmlns:v="urn:schemas-microsoft-com:vml" xmlns:pvml="urn:schemas-microsoft-com:office:powerpoint" xmlns:com="http://schemas.openxmlformats.org/drawingml/2006/compatibility" xmlns:p14="http://schemas.microsoft.com/office/powerpoint/2010/main" xmlns:p15="http://schemas.microsoft.com/office/powerpoint/2012/main" xmlns:ahyp="http://schemas.microsoft.com/office/drawing/2018/hyperlinkcolor" showMasterPhAnim="0" showMasterSp="0">
+  <p:cSld>
+    <p:spTree>
+      <p:nvGrpSpPr>
+        <p:cNvPr id="252" name="Shape 252"/>
+        <p:cNvGrpSpPr/>
+        <p:nvPr/>
+      </p:nvGrpSpPr>
+      <p:grpSpPr>
+        <a:xfrm>
+          <a:off x="0" y="0"/>
+          <a:ext cx="0" cy="0"/>
+          <a:chOff x="0" y="0"/>
+          <a:chExt cx="0" cy="0"/>
+        </a:xfrm>
+      </p:grpSpPr>
+      <p:sp>
+        <p:nvSpPr>
+          <p:cNvPr id="253" name="Google Shape;253;g3cd5945c579_0_121:notes"/>
+          <p:cNvSpPr/>
+          <p:nvPr>
+            <p:ph idx="2" type="sldImg"/>
+          </p:nvPr>
+        </p:nvSpPr>
+        <p:spPr>
+          <a:xfrm>
+            <a:off x="685800" y="1143000"/>
+            <a:ext cx="5486400" cy="3086100"/>
+          </a:xfrm>
+          <a:custGeom>
+            <a:rect b="b" l="l" r="r" t="t"/>
+            <a:pathLst>
+              <a:path extrusionOk="0" h="120000" w="120000">
+                <a:moveTo>
+                  <a:pt x="0" y="0"/>
+                </a:moveTo>
+                <a:lnTo>
+                  <a:pt x="120000" y="0"/>
+                </a:lnTo>
+                <a:lnTo>
+                  <a:pt x="120000" y="120000"/>
+                </a:lnTo>
+                <a:lnTo>
+                  <a:pt x="0" y="120000"/>
+                </a:lnTo>
+                <a:close/>
+              </a:path>
+            </a:pathLst>
+          </a:custGeom>
+          <a:noFill/>
+          <a:ln cap="flat" cmpd="sng" w="12700">
+            <a:solidFill>
+              <a:srgbClr val="000000"/>
+            </a:solidFill>
+            <a:prstDash val="solid"/>
+            <a:round/>
+            <a:headEnd len="sm" w="sm" type="none"/>
+            <a:tailEnd len="sm" w="sm" type="none"/>
+          </a:ln>
+        </p:spPr>
+      </p:sp>
+      <p:sp>
+        <p:nvSpPr>
+          <p:cNvPr id="254" name="Google Shape;254;g3cd5945c579_0_121:notes"/>
+          <p:cNvSpPr txBox="1"/>
+          <p:nvPr>
+            <p:ph idx="1" type="body"/>
+          </p:nvPr>
+        </p:nvSpPr>
+        <p:spPr>
+          <a:xfrm>
+            <a:off x="685800" y="4400550"/>
+            <a:ext cx="5486400" cy="3600600"/>
+          </a:xfrm>
+          <a:prstGeom prst="rect">
+            <a:avLst/>
+          </a:prstGeom>
+          <a:noFill/>
+          <a:ln>
+            <a:noFill/>
+          </a:ln>
+        </p:spPr>
+        <p:txBody>
+          <a:bodyPr anchorCtr="0" anchor="t" bIns="45700" lIns="91425" spcFirstLastPara="1" rIns="91425" wrap="square" tIns="45700">
+            <a:noAutofit/>
+          </a:bodyPr>
+          <a:lstStyle/>
+          <a:p>
+            <a:pPr indent="0" lvl="0" marL="0" rtl="0" algn="l">
+              <a:spcBef>
+                <a:spcPts val="0"/>
+              </a:spcBef>
+              <a:spcAft>
+                <a:spcPts val="0"/>
+              </a:spcAft>
+              <a:buSzPts val="1100"/>
+              <a:buNone/>
+            </a:pPr>
+            <a:r>
+              <a:rPr lang="en-US"/>
+              <a:t>The final feature tool helps the user collect statistics for microscopic features. It keeps a permanent record of every measurement. The count n turns green once it gets to 30. Metrics can be 1 dimensional (e.g. length of paraphyses), or 2 </a:t>
+            </a:r>
+            <a:r>
+              <a:rPr lang="en-US"/>
+              <a:t>dimensional</a:t>
+            </a:r>
+            <a:r>
+              <a:rPr lang="en-US"/>
+              <a:t> (e.g. spores). 2D measurements can also report Q value (ratio of length to width). A Q value of 1.0 indicates round spores. Higher Q values indicate more elongated spores.</a:t>
+            </a:r>
+            <a:endParaRPr/>
+          </a:p>
+          <a:p>
+            <a:pPr indent="0" lvl="0" marL="0" rtl="0" algn="l">
+              <a:spcBef>
+                <a:spcPts val="0"/>
+              </a:spcBef>
+              <a:spcAft>
+                <a:spcPts val="0"/>
+              </a:spcAft>
+              <a:buSzPts val="1100"/>
+              <a:buNone/>
+            </a:pPr>
+            <a:r>
+              <a:t/>
+            </a:r>
+            <a:endParaRPr/>
+          </a:p>
+          <a:p>
+            <a:pPr indent="0" lvl="0" marL="0" rtl="0" algn="l">
+              <a:spcBef>
+                <a:spcPts val="0"/>
+              </a:spcBef>
+              <a:spcAft>
+                <a:spcPts val="0"/>
+              </a:spcAft>
+              <a:buSzPts val="1100"/>
+              <a:buNone/>
+            </a:pPr>
+            <a:r>
+              <a:rPr lang="en-US"/>
+              <a:t>The user can add whatever measurable feature they care to.</a:t>
+            </a:r>
+            <a:endParaRPr/>
+          </a:p>
+          <a:p>
+            <a:pPr indent="0" lvl="0" marL="0" rtl="0" algn="l">
+              <a:spcBef>
+                <a:spcPts val="0"/>
+              </a:spcBef>
+              <a:spcAft>
+                <a:spcPts val="0"/>
+              </a:spcAft>
+              <a:buSzPts val="1100"/>
+              <a:buNone/>
+            </a:pPr>
+            <a:r>
+              <a:t/>
+            </a:r>
+            <a:endParaRPr/>
+          </a:p>
+        </p:txBody>
+      </p:sp>
+      <p:sp>
+        <p:nvSpPr>
+          <p:cNvPr id="255" name="Google Shape;255;g3cd5945c579_0_121:notes"/>
+          <p:cNvSpPr txBox="1"/>
+          <p:nvPr>
+            <p:ph idx="12" type="sldNum"/>
+          </p:nvPr>
+        </p:nvSpPr>
+        <p:spPr>
+          <a:xfrm>
+            <a:off x="3884613" y="8685213"/>
+            <a:ext cx="2971800" cy="458700"/>
+          </a:xfrm>
+          <a:prstGeom prst="rect">
+            <a:avLst/>
+          </a:prstGeom>
+          <a:noFill/>
+          <a:ln>
+            <a:noFill/>
+          </a:ln>
+        </p:spPr>
+        <p:txBody>
+          <a:bodyPr anchorCtr="0" anchor="b" bIns="45700" lIns="91425" spcFirstLastPara="1" rIns="91425" wrap="square" tIns="45700">
+            <a:noAutofit/>
+          </a:bodyPr>
+          <a:lstStyle/>
+          <a:p>
+            <a:pPr indent="0" lvl="0" marL="0" rtl="0" algn="r">
+              <a:lnSpc>
+                <a:spcPct val="100000"/>
+              </a:lnSpc>
+              <a:spcBef>
+                <a:spcPts val="0"/>
+              </a:spcBef>
+              <a:spcAft>
+                <a:spcPts val="0"/>
+              </a:spcAft>
+              <a:buSzPts val="1400"/>
+              <a:buNone/>
+            </a:pPr>
+            <a:fld id="{00000000-1234-1234-1234-123412341234}" type="slidenum">
+              <a:rPr lang="en-US"/>
+              <a:t>‹#›</a:t>
+            </a:fld>
+            <a:endParaRPr/>
+          </a:p>
+        </p:txBody>
+      </p:sp>
+    </p:spTree>
+  </p:cSld>
+  <p:clrMapOvr>
+    <a:masterClrMapping/>
+  </p:clrMapOvr>
+</p:notes>
+</file>
+
+<file path=ppt/notesSlides/notesSlide14.xml><?xml version="1.0" encoding="utf-8"?>
+<p:notes xmlns:a="http://schemas.openxmlformats.org/drawingml/2006/main" xmlns:r="http://schemas.openxmlformats.org/officeDocument/2006/relationships" xmlns:mc="http://schemas.openxmlformats.org/markup-compatibility/2006" xmlns:mv="urn:schemas-microsoft-com:mac:vml" xmlns:p="http://schemas.openxmlformats.org/presentationml/2006/main" xmlns:c="http://schemas.openxmlformats.org/drawingml/2006/chart" xmlns:dgm="http://schemas.openxmlformats.org/drawingml/2006/diagram" xmlns:o="urn:schemas-microsoft-com:office:office" xmlns:v="urn:schemas-microsoft-com:vml" xmlns:pvml="urn:schemas-microsoft-com:office:powerpoint" xmlns:com="http://schemas.openxmlformats.org/drawingml/2006/compatibility" xmlns:p14="http://schemas.microsoft.com/office/powerpoint/2010/main" xmlns:p15="http://schemas.microsoft.com/office/powerpoint/2012/main" xmlns:ahyp="http://schemas.microsoft.com/office/drawing/2018/hyperlinkcolor" showMasterPhAnim="0" showMasterSp="0">
+  <p:cSld>
+    <p:spTree>
+      <p:nvGrpSpPr>
+        <p:cNvPr id="260" name="Shape 260"/>
+        <p:cNvGrpSpPr/>
+        <p:nvPr/>
+      </p:nvGrpSpPr>
+      <p:grpSpPr>
+        <a:xfrm>
+          <a:off x="0" y="0"/>
+          <a:ext cx="0" cy="0"/>
+          <a:chOff x="0" y="0"/>
+          <a:chExt cx="0" cy="0"/>
+        </a:xfrm>
+      </p:grpSpPr>
+      <p:sp>
+        <p:nvSpPr>
+          <p:cNvPr id="261" name="Google Shape;261;g3cdd6918556_0_6:notes"/>
+          <p:cNvSpPr/>
+          <p:nvPr>
+            <p:ph idx="2" type="sldImg"/>
+          </p:nvPr>
+        </p:nvSpPr>
+        <p:spPr>
+          <a:xfrm>
+            <a:off x="685800" y="1143000"/>
+            <a:ext cx="5486400" cy="3086100"/>
+          </a:xfrm>
+          <a:custGeom>
+            <a:rect b="b" l="l" r="r" t="t"/>
+            <a:pathLst>
+              <a:path extrusionOk="0" h="120000" w="120000">
+                <a:moveTo>
+                  <a:pt x="0" y="0"/>
+                </a:moveTo>
+                <a:lnTo>
+                  <a:pt x="120000" y="0"/>
+                </a:lnTo>
+                <a:lnTo>
+                  <a:pt x="120000" y="120000"/>
+                </a:lnTo>
+                <a:lnTo>
+                  <a:pt x="0" y="120000"/>
+                </a:lnTo>
+                <a:close/>
+              </a:path>
+            </a:pathLst>
+          </a:custGeom>
+          <a:noFill/>
+          <a:ln cap="flat" cmpd="sng" w="12700">
+            <a:solidFill>
+              <a:srgbClr val="000000"/>
+            </a:solidFill>
+            <a:prstDash val="solid"/>
+            <a:round/>
+            <a:headEnd len="sm" w="sm" type="none"/>
+            <a:tailEnd len="sm" w="sm" type="none"/>
+          </a:ln>
+        </p:spPr>
+      </p:sp>
+      <p:sp>
+        <p:nvSpPr>
+          <p:cNvPr id="262" name="Google Shape;262;g3cdd6918556_0_6:notes"/>
+          <p:cNvSpPr txBox="1"/>
+          <p:nvPr>
+            <p:ph idx="1" type="body"/>
+          </p:nvPr>
+        </p:nvSpPr>
+        <p:spPr>
+          <a:xfrm>
+            <a:off x="685800" y="4400550"/>
+            <a:ext cx="5486400" cy="3600600"/>
+          </a:xfrm>
+          <a:prstGeom prst="rect">
+            <a:avLst/>
+          </a:prstGeom>
+          <a:noFill/>
+          <a:ln>
+            <a:noFill/>
+          </a:ln>
+        </p:spPr>
+        <p:txBody>
+          <a:bodyPr anchorCtr="0" anchor="t" bIns="45700" lIns="91425" spcFirstLastPara="1" rIns="91425" wrap="square" tIns="45700">
+            <a:noAutofit/>
+          </a:bodyPr>
+          <a:lstStyle/>
+          <a:p>
+            <a:pPr indent="0" lvl="0" marL="0" rtl="0" algn="l">
+              <a:spcBef>
+                <a:spcPts val="0"/>
+              </a:spcBef>
+              <a:spcAft>
+                <a:spcPts val="0"/>
+              </a:spcAft>
+              <a:buClr>
+                <a:schemeClr val="dk1"/>
+              </a:buClr>
+              <a:buSzPts val="1100"/>
+              <a:buFont typeface="Arial"/>
+              <a:buNone/>
+            </a:pPr>
+            <a:r>
+              <a:rPr lang="en-US"/>
+              <a:t>The web site also includes typical features like account and settings management.</a:t>
+            </a:r>
+            <a:endParaRPr/>
+          </a:p>
+          <a:p>
+            <a:pPr indent="0" lvl="0" marL="0" rtl="0" algn="l">
+              <a:lnSpc>
+                <a:spcPct val="100000"/>
+              </a:lnSpc>
+              <a:spcBef>
+                <a:spcPts val="0"/>
+              </a:spcBef>
+              <a:spcAft>
+                <a:spcPts val="0"/>
+              </a:spcAft>
+              <a:buSzPts val="1400"/>
+              <a:buNone/>
+            </a:pPr>
+            <a:r>
+              <a:t/>
+            </a:r>
+            <a:endParaRPr/>
+          </a:p>
+          <a:p>
+            <a:pPr indent="0" lvl="0" marL="0" rtl="0" algn="l">
+              <a:lnSpc>
+                <a:spcPct val="100000"/>
+              </a:lnSpc>
+              <a:spcBef>
+                <a:spcPts val="0"/>
+              </a:spcBef>
+              <a:spcAft>
+                <a:spcPts val="0"/>
+              </a:spcAft>
+              <a:buSzPts val="1400"/>
+              <a:buNone/>
+            </a:pPr>
+            <a:r>
+              <a:rPr lang="en-US"/>
+              <a:t>The site supports logging in with local credentials or credentials from GitHub, Google, or ORCID. I’m hoping to add iNaturalist soon. If GitHub credentials are available, they will be used to create GitHub Issues for Feedback messages.</a:t>
+            </a:r>
+            <a:endParaRPr/>
+          </a:p>
+          <a:p>
+            <a:pPr indent="0" lvl="0" marL="0" rtl="0" algn="l">
+              <a:lnSpc>
+                <a:spcPct val="100000"/>
+              </a:lnSpc>
+              <a:spcBef>
+                <a:spcPts val="0"/>
+              </a:spcBef>
+              <a:spcAft>
+                <a:spcPts val="0"/>
+              </a:spcAft>
+              <a:buSzPts val="1400"/>
+              <a:buNone/>
+            </a:pPr>
+            <a:r>
+              <a:t/>
+            </a:r>
+            <a:endParaRPr/>
+          </a:p>
+          <a:p>
+            <a:pPr indent="0" lvl="0" marL="0" rtl="0" algn="l">
+              <a:lnSpc>
+                <a:spcPct val="100000"/>
+              </a:lnSpc>
+              <a:spcBef>
+                <a:spcPts val="0"/>
+              </a:spcBef>
+              <a:spcAft>
+                <a:spcPts val="0"/>
+              </a:spcAft>
+              <a:buSzPts val="1400"/>
+              <a:buNone/>
+            </a:pPr>
+            <a:r>
+              <a:rPr lang="en-US"/>
+              <a:t>The settings include the embedding model to use for semantic search. The default model includes all records, which includes all records from the literature and all records generated by site members. Site members may elect to embargo their descriptions for up to 1 year to allow for publication. Additional models will be available in the future, e.g. I plan to add a dichotomous key detector.</a:t>
+            </a:r>
+            <a:endParaRPr/>
+          </a:p>
+          <a:p>
+            <a:pPr indent="0" lvl="0" marL="0" rtl="0" algn="l">
+              <a:lnSpc>
+                <a:spcPct val="100000"/>
+              </a:lnSpc>
+              <a:spcBef>
+                <a:spcPts val="0"/>
+              </a:spcBef>
+              <a:spcAft>
+                <a:spcPts val="0"/>
+              </a:spcAft>
+              <a:buSzPts val="1400"/>
+              <a:buNone/>
+            </a:pPr>
+            <a:r>
+              <a:t/>
+            </a:r>
+            <a:endParaRPr/>
+          </a:p>
+          <a:p>
+            <a:pPr indent="0" lvl="0" marL="0" rtl="0" algn="l">
+              <a:lnSpc>
+                <a:spcPct val="100000"/>
+              </a:lnSpc>
+              <a:spcBef>
+                <a:spcPts val="0"/>
+              </a:spcBef>
+              <a:spcAft>
+                <a:spcPts val="0"/>
+              </a:spcAft>
+              <a:buSzPts val="1400"/>
+              <a:buNone/>
+            </a:pPr>
+            <a:r>
+              <a:rPr lang="en-US"/>
+              <a:t>Other settings control the number of results retrieved for a search, the number displayed at a time, and the number displayed for a Nomenclature search.</a:t>
+            </a:r>
+            <a:endParaRPr/>
+          </a:p>
+          <a:p>
+            <a:pPr indent="0" lvl="0" marL="0" rtl="0" algn="l">
+              <a:lnSpc>
+                <a:spcPct val="100000"/>
+              </a:lnSpc>
+              <a:spcBef>
+                <a:spcPts val="0"/>
+              </a:spcBef>
+              <a:spcAft>
+                <a:spcPts val="0"/>
+              </a:spcAft>
+              <a:buSzPts val="1400"/>
+              <a:buNone/>
+            </a:pPr>
+            <a:r>
+              <a:t/>
+            </a:r>
+            <a:endParaRPr/>
+          </a:p>
+          <a:p>
+            <a:pPr indent="0" lvl="0" marL="0" rtl="0" algn="l">
+              <a:lnSpc>
+                <a:spcPct val="100000"/>
+              </a:lnSpc>
+              <a:spcBef>
+                <a:spcPts val="0"/>
+              </a:spcBef>
+              <a:spcAft>
+                <a:spcPts val="0"/>
+              </a:spcAft>
+              <a:buSzPts val="1400"/>
+              <a:buNone/>
+            </a:pPr>
+            <a:r>
+              <a:rPr lang="en-US"/>
+              <a:t>The feature settings control generation of decision trees.</a:t>
+            </a:r>
+            <a:endParaRPr/>
+          </a:p>
+          <a:p>
+            <a:pPr indent="0" lvl="0" marL="0" rtl="0" algn="l">
+              <a:lnSpc>
+                <a:spcPct val="100000"/>
+              </a:lnSpc>
+              <a:spcBef>
+                <a:spcPts val="0"/>
+              </a:spcBef>
+              <a:spcAft>
+                <a:spcPts val="0"/>
+              </a:spcAft>
+              <a:buSzPts val="1400"/>
+              <a:buNone/>
+            </a:pPr>
+            <a:r>
+              <a:t/>
+            </a:r>
+            <a:endParaRPr/>
+          </a:p>
+          <a:p>
+            <a:pPr indent="0" lvl="0" marL="0" rtl="0" algn="l">
+              <a:lnSpc>
+                <a:spcPct val="100000"/>
+              </a:lnSpc>
+              <a:spcBef>
+                <a:spcPts val="0"/>
+              </a:spcBef>
+              <a:spcAft>
+                <a:spcPts val="0"/>
+              </a:spcAft>
+              <a:buSzPts val="1400"/>
+              <a:buNone/>
+            </a:pPr>
+            <a:r>
+              <a:rPr lang="en-US"/>
+              <a:t>The system currently has a single daily report which anybody can subscribe to. This report covers all activity on the site. We will add additional reporting options once the admin report gets too verbose.</a:t>
+            </a:r>
+            <a:endParaRPr/>
+          </a:p>
+        </p:txBody>
+      </p:sp>
+      <p:sp>
+        <p:nvSpPr>
+          <p:cNvPr id="263" name="Google Shape;263;g3cdd6918556_0_6:notes"/>
+          <p:cNvSpPr txBox="1"/>
+          <p:nvPr>
+            <p:ph idx="12" type="sldNum"/>
+          </p:nvPr>
+        </p:nvSpPr>
+        <p:spPr>
+          <a:xfrm>
+            <a:off x="3884613" y="8685213"/>
+            <a:ext cx="2971800" cy="458700"/>
+          </a:xfrm>
+          <a:prstGeom prst="rect">
+            <a:avLst/>
+          </a:prstGeom>
+          <a:noFill/>
+          <a:ln>
+            <a:noFill/>
+          </a:ln>
+        </p:spPr>
+        <p:txBody>
+          <a:bodyPr anchorCtr="0" anchor="b" bIns="45700" lIns="91425" spcFirstLastPara="1" rIns="91425" wrap="square" tIns="45700">
+            <a:noAutofit/>
+          </a:bodyPr>
+          <a:lstStyle/>
+          <a:p>
+            <a:pPr indent="0" lvl="0" marL="0" rtl="0" algn="r">
+              <a:lnSpc>
+                <a:spcPct val="100000"/>
+              </a:lnSpc>
+              <a:spcBef>
+                <a:spcPts val="0"/>
+              </a:spcBef>
+              <a:spcAft>
+                <a:spcPts val="0"/>
+              </a:spcAft>
+              <a:buSzPts val="1400"/>
+              <a:buNone/>
+            </a:pPr>
+            <a:fld id="{00000000-1234-1234-1234-123412341234}" type="slidenum">
+              <a:rPr lang="en-US"/>
+              <a:t>‹#›</a:t>
+            </a:fld>
+            <a:endParaRPr/>
+          </a:p>
+        </p:txBody>
+      </p:sp>
+    </p:spTree>
+  </p:cSld>
+  <p:clrMapOvr>
+    <a:masterClrMapping/>
+  </p:clrMapOvr>
+</p:notes>
+</file>
+
+<file path=ppt/notesSlides/notesSlide15.xml><?xml version="1.0" encoding="utf-8"?>
+<p:notes xmlns:a="http://schemas.openxmlformats.org/drawingml/2006/main" xmlns:r="http://schemas.openxmlformats.org/officeDocument/2006/relationships" xmlns:mc="http://schemas.openxmlformats.org/markup-compatibility/2006" xmlns:mv="urn:schemas-microsoft-com:mac:vml" xmlns:p="http://schemas.openxmlformats.org/presentationml/2006/main" xmlns:c="http://schemas.openxmlformats.org/drawingml/2006/chart" xmlns:dgm="http://schemas.openxmlformats.org/drawingml/2006/diagram" xmlns:o="urn:schemas-microsoft-com:office:office" xmlns:v="urn:schemas-microsoft-com:vml" xmlns:pvml="urn:schemas-microsoft-com:office:powerpoint" xmlns:com="http://schemas.openxmlformats.org/drawingml/2006/compatibility" xmlns:p14="http://schemas.microsoft.com/office/powerpoint/2010/main" xmlns:p15="http://schemas.microsoft.com/office/powerpoint/2012/main" xmlns:ahyp="http://schemas.microsoft.com/office/drawing/2018/hyperlinkcolor" showMasterPhAnim="0" showMasterSp="0">
+  <p:cSld>
+    <p:spTree>
+      <p:nvGrpSpPr>
+        <p:cNvPr id="269" name="Shape 269"/>
+        <p:cNvGrpSpPr/>
+        <p:nvPr/>
+      </p:nvGrpSpPr>
+      <p:grpSpPr>
+        <a:xfrm>
+          <a:off x="0" y="0"/>
+          <a:ext cx="0" cy="0"/>
+          <a:chOff x="0" y="0"/>
+          <a:chExt cx="0" cy="0"/>
+        </a:xfrm>
+      </p:grpSpPr>
+      <p:sp>
+        <p:nvSpPr>
+          <p:cNvPr id="270" name="Google Shape;270;g3cd5945c579_0_79:notes"/>
+          <p:cNvSpPr/>
+          <p:nvPr>
+            <p:ph idx="2" type="sldImg"/>
+          </p:nvPr>
+        </p:nvSpPr>
+        <p:spPr>
+          <a:xfrm>
+            <a:off x="685800" y="1143000"/>
+            <a:ext cx="5486400" cy="3086100"/>
+          </a:xfrm>
+          <a:custGeom>
+            <a:rect b="b" l="l" r="r" t="t"/>
+            <a:pathLst>
+              <a:path extrusionOk="0" h="120000" w="120000">
+                <a:moveTo>
+                  <a:pt x="0" y="0"/>
+                </a:moveTo>
+                <a:lnTo>
+                  <a:pt x="120000" y="0"/>
+                </a:lnTo>
+                <a:lnTo>
+                  <a:pt x="120000" y="120000"/>
+                </a:lnTo>
+                <a:lnTo>
+                  <a:pt x="0" y="120000"/>
+                </a:lnTo>
+                <a:close/>
+              </a:path>
+            </a:pathLst>
+          </a:custGeom>
+          <a:noFill/>
+          <a:ln cap="flat" cmpd="sng" w="12700">
+            <a:solidFill>
+              <a:srgbClr val="000000"/>
+            </a:solidFill>
+            <a:prstDash val="solid"/>
+            <a:round/>
+            <a:headEnd len="sm" w="sm" type="none"/>
+            <a:tailEnd len="sm" w="sm" type="none"/>
+          </a:ln>
+        </p:spPr>
+      </p:sp>
+      <p:sp>
+        <p:nvSpPr>
+          <p:cNvPr id="271" name="Google Shape;271;g3cd5945c579_0_79:notes"/>
+          <p:cNvSpPr txBox="1"/>
+          <p:nvPr>
+            <p:ph idx="1" type="body"/>
+          </p:nvPr>
+        </p:nvSpPr>
+        <p:spPr>
+          <a:xfrm>
+            <a:off x="685800" y="4400550"/>
+            <a:ext cx="5486400" cy="3600600"/>
+          </a:xfrm>
+          <a:prstGeom prst="rect">
+            <a:avLst/>
+          </a:prstGeom>
+          <a:noFill/>
+          <a:ln>
+            <a:noFill/>
+          </a:ln>
+        </p:spPr>
+        <p:txBody>
+          <a:bodyPr anchorCtr="0" anchor="t" bIns="45700" lIns="91425" spcFirstLastPara="1" rIns="91425" wrap="square" tIns="45700">
+            <a:noAutofit/>
+          </a:bodyPr>
+          <a:lstStyle/>
+          <a:p>
+            <a:pPr indent="0" lvl="0" marL="0" rtl="0" algn="l">
+              <a:lnSpc>
+                <a:spcPct val="100000"/>
+              </a:lnSpc>
+              <a:spcBef>
+                <a:spcPts val="0"/>
+              </a:spcBef>
+              <a:spcAft>
+                <a:spcPts val="0"/>
+              </a:spcAft>
+              <a:buSzPts val="1400"/>
+              <a:buNone/>
+            </a:pPr>
+            <a:r>
+              <a:rPr lang="en-US"/>
+              <a:t>I plan to keep working on this for some years to come.</a:t>
+            </a:r>
+            <a:endParaRPr/>
+          </a:p>
+          <a:p>
+            <a:pPr indent="0" lvl="0" marL="0" rtl="0" algn="l">
+              <a:lnSpc>
+                <a:spcPct val="100000"/>
+              </a:lnSpc>
+              <a:spcBef>
+                <a:spcPts val="0"/>
+              </a:spcBef>
+              <a:spcAft>
+                <a:spcPts val="0"/>
+              </a:spcAft>
+              <a:buSzPts val="1400"/>
+              <a:buNone/>
+            </a:pPr>
+            <a:r>
+              <a:t/>
+            </a:r>
+            <a:endParaRPr/>
+          </a:p>
+          <a:p>
+            <a:pPr indent="0" lvl="0" marL="0" rtl="0" algn="l">
+              <a:lnSpc>
+                <a:spcPct val="100000"/>
+              </a:lnSpc>
+              <a:spcBef>
+                <a:spcPts val="0"/>
+              </a:spcBef>
+              <a:spcAft>
+                <a:spcPts val="0"/>
+              </a:spcAft>
+              <a:buSzPts val="1400"/>
+              <a:buNone/>
+            </a:pPr>
+            <a:r>
+              <a:rPr lang="en-US"/>
+              <a:t>The web site is currently in alpha test. This means that data may go away, so be sure to download your data regularly. That said, I’m pretty confident that the data formats are stable and a complete database reset is unlikely.</a:t>
+            </a:r>
+            <a:endParaRPr/>
+          </a:p>
+          <a:p>
+            <a:pPr indent="0" lvl="0" marL="0" rtl="0" algn="l">
+              <a:lnSpc>
+                <a:spcPct val="100000"/>
+              </a:lnSpc>
+              <a:spcBef>
+                <a:spcPts val="0"/>
+              </a:spcBef>
+              <a:spcAft>
+                <a:spcPts val="0"/>
+              </a:spcAft>
+              <a:buSzPts val="1400"/>
+              <a:buNone/>
+            </a:pPr>
+            <a:r>
+              <a:t/>
+            </a:r>
+            <a:endParaRPr/>
+          </a:p>
+          <a:p>
+            <a:pPr indent="0" lvl="0" marL="0" rtl="0" algn="l">
+              <a:lnSpc>
+                <a:spcPct val="100000"/>
+              </a:lnSpc>
+              <a:spcBef>
+                <a:spcPts val="0"/>
+              </a:spcBef>
+              <a:spcAft>
+                <a:spcPts val="0"/>
+              </a:spcAft>
+              <a:buSzPts val="1400"/>
+              <a:buNone/>
+            </a:pPr>
+            <a:r>
+              <a:rPr lang="en-US"/>
+              <a:t>The compute </a:t>
+            </a:r>
+            <a:r>
+              <a:rPr lang="en-US"/>
+              <a:t>resources</a:t>
+            </a:r>
+            <a:r>
+              <a:rPr lang="en-US"/>
+              <a:t> of the current production machine are pretty limited. I think we can support up to three simultaneous searches, though that drops to zero while  rebuilding the embeddings. Right now, embeddings are rebuilt at 6am ET and take less than a half an hour.</a:t>
+            </a:r>
+            <a:endParaRPr/>
+          </a:p>
+          <a:p>
+            <a:pPr indent="0" lvl="0" marL="0" rtl="0" algn="l">
+              <a:lnSpc>
+                <a:spcPct val="100000"/>
+              </a:lnSpc>
+              <a:spcBef>
+                <a:spcPts val="0"/>
+              </a:spcBef>
+              <a:spcAft>
+                <a:spcPts val="0"/>
+              </a:spcAft>
+              <a:buSzPts val="1400"/>
+              <a:buNone/>
+            </a:pPr>
+            <a:r>
+              <a:t/>
+            </a:r>
+            <a:endParaRPr/>
+          </a:p>
+          <a:p>
+            <a:pPr indent="0" lvl="0" marL="0" rtl="0" algn="l">
+              <a:spcBef>
+                <a:spcPts val="0"/>
+              </a:spcBef>
+              <a:spcAft>
+                <a:spcPts val="0"/>
+              </a:spcAft>
+              <a:buClr>
+                <a:schemeClr val="dk1"/>
+              </a:buClr>
+              <a:buSzPts val="1400"/>
+              <a:buFont typeface="Arial"/>
+              <a:buNone/>
+            </a:pPr>
+            <a:r>
+              <a:rPr lang="en-US"/>
+              <a:t>I have a data quality project whose completion will trigger beta test.</a:t>
+            </a:r>
+            <a:endParaRPr/>
+          </a:p>
+          <a:p>
+            <a:pPr indent="0" lvl="0" marL="0" rtl="0" algn="l">
+              <a:lnSpc>
+                <a:spcPct val="100000"/>
+              </a:lnSpc>
+              <a:spcBef>
+                <a:spcPts val="0"/>
+              </a:spcBef>
+              <a:spcAft>
+                <a:spcPts val="0"/>
+              </a:spcAft>
+              <a:buSzPts val="1400"/>
+              <a:buNone/>
+            </a:pPr>
+            <a:r>
+              <a:t/>
+            </a:r>
+            <a:endParaRPr/>
+          </a:p>
+          <a:p>
+            <a:pPr indent="0" lvl="0" marL="0" rtl="0" algn="l">
+              <a:lnSpc>
+                <a:spcPct val="100000"/>
+              </a:lnSpc>
+              <a:spcBef>
+                <a:spcPts val="0"/>
+              </a:spcBef>
+              <a:spcAft>
+                <a:spcPts val="0"/>
+              </a:spcAft>
+              <a:buSzPts val="1400"/>
+              <a:buNone/>
+            </a:pPr>
+            <a:r>
+              <a:rPr lang="en-US"/>
+              <a:t>I’d like to add a glossary tool that lets you hover over technical terms to get definitions.</a:t>
+            </a:r>
+            <a:endParaRPr/>
+          </a:p>
+          <a:p>
+            <a:pPr indent="0" lvl="0" marL="0" rtl="0" algn="l">
+              <a:lnSpc>
+                <a:spcPct val="100000"/>
+              </a:lnSpc>
+              <a:spcBef>
+                <a:spcPts val="0"/>
+              </a:spcBef>
+              <a:spcAft>
+                <a:spcPts val="0"/>
+              </a:spcAft>
+              <a:buSzPts val="1400"/>
+              <a:buNone/>
+            </a:pPr>
+            <a:r>
+              <a:t/>
+            </a:r>
+            <a:endParaRPr/>
+          </a:p>
+          <a:p>
+            <a:pPr indent="0" lvl="0" marL="0" rtl="0" algn="l">
+              <a:lnSpc>
+                <a:spcPct val="100000"/>
+              </a:lnSpc>
+              <a:spcBef>
+                <a:spcPts val="0"/>
+              </a:spcBef>
+              <a:spcAft>
+                <a:spcPts val="0"/>
+              </a:spcAft>
+              <a:buSzPts val="1400"/>
+              <a:buNone/>
+            </a:pPr>
+            <a:r>
+              <a:rPr lang="en-US"/>
+              <a:t>Precalculated translations of LOTE descriptions are in the moderately near future.</a:t>
+            </a:r>
+            <a:endParaRPr/>
+          </a:p>
+          <a:p>
+            <a:pPr indent="0" lvl="0" marL="0" rtl="0" algn="l">
+              <a:lnSpc>
+                <a:spcPct val="100000"/>
+              </a:lnSpc>
+              <a:spcBef>
+                <a:spcPts val="0"/>
+              </a:spcBef>
+              <a:spcAft>
+                <a:spcPts val="0"/>
+              </a:spcAft>
+              <a:buSzPts val="1400"/>
+              <a:buNone/>
+            </a:pPr>
+            <a:r>
+              <a:t/>
+            </a:r>
+            <a:endParaRPr/>
+          </a:p>
+          <a:p>
+            <a:pPr indent="0" lvl="0" marL="0" rtl="0" algn="l">
+              <a:lnSpc>
+                <a:spcPct val="100000"/>
+              </a:lnSpc>
+              <a:spcBef>
+                <a:spcPts val="0"/>
+              </a:spcBef>
+              <a:spcAft>
+                <a:spcPts val="0"/>
+              </a:spcAft>
+              <a:buSzPts val="1400"/>
+              <a:buNone/>
+            </a:pPr>
+            <a:r>
+              <a:rPr lang="en-US"/>
+              <a:t>Check the sources page for a current list of journals. Feedback on additional open access journals is solicited.</a:t>
+            </a:r>
+            <a:endParaRPr/>
+          </a:p>
+          <a:p>
+            <a:pPr indent="0" lvl="0" marL="0" rtl="0" algn="l">
+              <a:lnSpc>
+                <a:spcPct val="100000"/>
+              </a:lnSpc>
+              <a:spcBef>
+                <a:spcPts val="0"/>
+              </a:spcBef>
+              <a:spcAft>
+                <a:spcPts val="0"/>
+              </a:spcAft>
+              <a:buSzPts val="1400"/>
+              <a:buNone/>
+            </a:pPr>
+            <a:r>
+              <a:t/>
+            </a:r>
+            <a:endParaRPr/>
+          </a:p>
+          <a:p>
+            <a:pPr indent="0" lvl="0" marL="0" rtl="0" algn="l">
+              <a:lnSpc>
+                <a:spcPct val="100000"/>
+              </a:lnSpc>
+              <a:spcBef>
+                <a:spcPts val="0"/>
+              </a:spcBef>
+              <a:spcAft>
+                <a:spcPts val="0"/>
+              </a:spcAft>
+              <a:buSzPts val="1400"/>
+              <a:buNone/>
+            </a:pPr>
+            <a:r>
+              <a:rPr lang="en-US"/>
+              <a:t>Eventually, I’d like to expand this to cover other organisms. My short list includes bryophytes. Note that myxomycetes are already included.</a:t>
+            </a:r>
+            <a:endParaRPr/>
+          </a:p>
+          <a:p>
+            <a:pPr indent="0" lvl="0" marL="0" rtl="0" algn="l">
+              <a:lnSpc>
+                <a:spcPct val="100000"/>
+              </a:lnSpc>
+              <a:spcBef>
+                <a:spcPts val="0"/>
+              </a:spcBef>
+              <a:spcAft>
+                <a:spcPts val="0"/>
+              </a:spcAft>
+              <a:buSzPts val="1400"/>
+              <a:buNone/>
+            </a:pPr>
+            <a:r>
+              <a:t/>
+            </a:r>
+            <a:endParaRPr/>
+          </a:p>
+          <a:p>
+            <a:pPr indent="0" lvl="0" marL="0" rtl="0" algn="l">
+              <a:lnSpc>
+                <a:spcPct val="100000"/>
+              </a:lnSpc>
+              <a:spcBef>
+                <a:spcPts val="0"/>
+              </a:spcBef>
+              <a:spcAft>
+                <a:spcPts val="0"/>
+              </a:spcAft>
+              <a:buSzPts val="1400"/>
+              <a:buNone/>
+            </a:pPr>
+            <a:r>
+              <a:rPr lang="en-US"/>
+              <a:t>See our public Trello for a complete backlog of plans.</a:t>
+            </a:r>
+            <a:endParaRPr/>
+          </a:p>
+          <a:p>
+            <a:pPr indent="0" lvl="0" marL="0" rtl="0" algn="l">
+              <a:lnSpc>
+                <a:spcPct val="100000"/>
+              </a:lnSpc>
+              <a:spcBef>
+                <a:spcPts val="0"/>
+              </a:spcBef>
+              <a:spcAft>
+                <a:spcPts val="0"/>
+              </a:spcAft>
+              <a:buSzPts val="1400"/>
+              <a:buNone/>
+            </a:pPr>
+            <a:r>
+              <a:t/>
+            </a:r>
+            <a:endParaRPr/>
+          </a:p>
+        </p:txBody>
+      </p:sp>
+      <p:sp>
+        <p:nvSpPr>
+          <p:cNvPr id="272" name="Google Shape;272;g3cd5945c579_0_79:notes"/>
           <p:cNvSpPr txBox="1"/>
           <p:nvPr>
             <p:ph idx="12" type="sldNum"/>
@@ -2056,6 +3736,586 @@
               <a:cs typeface="Arial"/>
               <a:sym typeface="Arial"/>
             </a:endParaRPr>
+          </a:p>
+        </p:txBody>
+      </p:sp>
+    </p:spTree>
+  </p:cSld>
+  <p:clrMapOvr>
+    <a:masterClrMapping/>
+  </p:clrMapOvr>
+</p:notes>
+</file>
+
+<file path=ppt/notesSlides/notesSlide16.xml><?xml version="1.0" encoding="utf-8"?>
+<p:notes xmlns:a="http://schemas.openxmlformats.org/drawingml/2006/main" xmlns:r="http://schemas.openxmlformats.org/officeDocument/2006/relationships" xmlns:mc="http://schemas.openxmlformats.org/markup-compatibility/2006" xmlns:mv="urn:schemas-microsoft-com:mac:vml" xmlns:p="http://schemas.openxmlformats.org/presentationml/2006/main" xmlns:c="http://schemas.openxmlformats.org/drawingml/2006/chart" xmlns:dgm="http://schemas.openxmlformats.org/drawingml/2006/diagram" xmlns:o="urn:schemas-microsoft-com:office:office" xmlns:v="urn:schemas-microsoft-com:vml" xmlns:pvml="urn:schemas-microsoft-com:office:powerpoint" xmlns:com="http://schemas.openxmlformats.org/drawingml/2006/compatibility" xmlns:p14="http://schemas.microsoft.com/office/powerpoint/2010/main" xmlns:p15="http://schemas.microsoft.com/office/powerpoint/2012/main" xmlns:ahyp="http://schemas.microsoft.com/office/drawing/2018/hyperlinkcolor" showMasterPhAnim="0" showMasterSp="0">
+  <p:cSld>
+    <p:spTree>
+      <p:nvGrpSpPr>
+        <p:cNvPr id="285" name="Shape 285"/>
+        <p:cNvGrpSpPr/>
+        <p:nvPr/>
+      </p:nvGrpSpPr>
+      <p:grpSpPr>
+        <a:xfrm>
+          <a:off x="0" y="0"/>
+          <a:ext cx="0" cy="0"/>
+          <a:chOff x="0" y="0"/>
+          <a:chExt cx="0" cy="0"/>
+        </a:xfrm>
+      </p:grpSpPr>
+      <p:sp>
+        <p:nvSpPr>
+          <p:cNvPr id="286" name="Google Shape;286;g3d18e836f13_0_0:notes"/>
+          <p:cNvSpPr/>
+          <p:nvPr>
+            <p:ph idx="2" type="sldImg"/>
+          </p:nvPr>
+        </p:nvSpPr>
+        <p:spPr>
+          <a:xfrm>
+            <a:off x="685800" y="1143000"/>
+            <a:ext cx="5486400" cy="3086100"/>
+          </a:xfrm>
+          <a:custGeom>
+            <a:rect b="b" l="l" r="r" t="t"/>
+            <a:pathLst>
+              <a:path extrusionOk="0" h="120000" w="120000">
+                <a:moveTo>
+                  <a:pt x="0" y="0"/>
+                </a:moveTo>
+                <a:lnTo>
+                  <a:pt x="120000" y="0"/>
+                </a:lnTo>
+                <a:lnTo>
+                  <a:pt x="120000" y="120000"/>
+                </a:lnTo>
+                <a:lnTo>
+                  <a:pt x="0" y="120000"/>
+                </a:lnTo>
+                <a:close/>
+              </a:path>
+            </a:pathLst>
+          </a:custGeom>
+          <a:noFill/>
+          <a:ln cap="flat" cmpd="sng" w="12700">
+            <a:solidFill>
+              <a:srgbClr val="000000"/>
+            </a:solidFill>
+            <a:prstDash val="solid"/>
+            <a:round/>
+            <a:headEnd len="sm" w="sm" type="none"/>
+            <a:tailEnd len="sm" w="sm" type="none"/>
+          </a:ln>
+        </p:spPr>
+      </p:sp>
+      <p:sp>
+        <p:nvSpPr>
+          <p:cNvPr id="287" name="Google Shape;287;g3d18e836f13_0_0:notes"/>
+          <p:cNvSpPr txBox="1"/>
+          <p:nvPr>
+            <p:ph idx="1" type="body"/>
+          </p:nvPr>
+        </p:nvSpPr>
+        <p:spPr>
+          <a:xfrm>
+            <a:off x="685800" y="4400550"/>
+            <a:ext cx="5486400" cy="3600600"/>
+          </a:xfrm>
+          <a:prstGeom prst="rect">
+            <a:avLst/>
+          </a:prstGeom>
+          <a:noFill/>
+          <a:ln>
+            <a:noFill/>
+          </a:ln>
+        </p:spPr>
+        <p:txBody>
+          <a:bodyPr anchorCtr="0" anchor="t" bIns="45700" lIns="91425" spcFirstLastPara="1" rIns="91425" wrap="square" tIns="45700">
+            <a:noAutofit/>
+          </a:bodyPr>
+          <a:lstStyle/>
+          <a:p>
+            <a:pPr indent="0" lvl="0" marL="0" rtl="0" algn="l">
+              <a:lnSpc>
+                <a:spcPct val="100000"/>
+              </a:lnSpc>
+              <a:spcBef>
+                <a:spcPts val="0"/>
+              </a:spcBef>
+              <a:spcAft>
+                <a:spcPts val="0"/>
+              </a:spcAft>
+              <a:buSzPts val="1400"/>
+              <a:buNone/>
+            </a:pPr>
+            <a:r>
+              <a:rPr lang="en-US"/>
+              <a:t>These are my collaborators, so far.</a:t>
+            </a:r>
+            <a:endParaRPr/>
+          </a:p>
+          <a:p>
+            <a:pPr indent="0" lvl="0" marL="0" rtl="0" algn="l">
+              <a:lnSpc>
+                <a:spcPct val="100000"/>
+              </a:lnSpc>
+              <a:spcBef>
+                <a:spcPts val="0"/>
+              </a:spcBef>
+              <a:spcAft>
+                <a:spcPts val="0"/>
+              </a:spcAft>
+              <a:buSzPts val="1400"/>
+              <a:buNone/>
+            </a:pPr>
+            <a:r>
+              <a:t/>
+            </a:r>
+            <a:endParaRPr/>
+          </a:p>
+          <a:p>
+            <a:pPr indent="0" lvl="0" marL="0" rtl="0" algn="l">
+              <a:lnSpc>
+                <a:spcPct val="100000"/>
+              </a:lnSpc>
+              <a:spcBef>
+                <a:spcPts val="0"/>
+              </a:spcBef>
+              <a:spcAft>
+                <a:spcPts val="0"/>
+              </a:spcAft>
+              <a:buSzPts val="1400"/>
+              <a:buNone/>
+            </a:pPr>
+            <a:r>
+              <a:rPr lang="en-US"/>
+              <a:t>Feel free to create an account for yourself and play with the web site!</a:t>
+            </a:r>
+            <a:endParaRPr/>
+          </a:p>
+          <a:p>
+            <a:pPr indent="0" lvl="0" marL="0" rtl="0" algn="l">
+              <a:lnSpc>
+                <a:spcPct val="100000"/>
+              </a:lnSpc>
+              <a:spcBef>
+                <a:spcPts val="0"/>
+              </a:spcBef>
+              <a:spcAft>
+                <a:spcPts val="0"/>
+              </a:spcAft>
+              <a:buSzPts val="1400"/>
+              <a:buNone/>
+            </a:pPr>
+            <a:r>
+              <a:t/>
+            </a:r>
+            <a:endParaRPr/>
+          </a:p>
+        </p:txBody>
+      </p:sp>
+      <p:sp>
+        <p:nvSpPr>
+          <p:cNvPr id="288" name="Google Shape;288;g3d18e836f13_0_0:notes"/>
+          <p:cNvSpPr txBox="1"/>
+          <p:nvPr>
+            <p:ph idx="12" type="sldNum"/>
+          </p:nvPr>
+        </p:nvSpPr>
+        <p:spPr>
+          <a:xfrm>
+            <a:off x="3884613" y="8685213"/>
+            <a:ext cx="2971800" cy="458700"/>
+          </a:xfrm>
+          <a:prstGeom prst="rect">
+            <a:avLst/>
+          </a:prstGeom>
+          <a:noFill/>
+          <a:ln>
+            <a:noFill/>
+          </a:ln>
+        </p:spPr>
+        <p:txBody>
+          <a:bodyPr anchorCtr="0" anchor="b" bIns="45700" lIns="91425" spcFirstLastPara="1" rIns="91425" wrap="square" tIns="45700">
+            <a:noAutofit/>
+          </a:bodyPr>
+          <a:lstStyle/>
+          <a:p>
+            <a:pPr indent="0" lvl="0" marL="0" marR="0" rtl="0" algn="r">
+              <a:lnSpc>
+                <a:spcPct val="100000"/>
+              </a:lnSpc>
+              <a:spcBef>
+                <a:spcPts val="0"/>
+              </a:spcBef>
+              <a:spcAft>
+                <a:spcPts val="0"/>
+              </a:spcAft>
+              <a:buClr>
+                <a:srgbClr val="000000"/>
+              </a:buClr>
+              <a:buSzPts val="1200"/>
+              <a:buFont typeface="Arial"/>
+              <a:buNone/>
+            </a:pPr>
+            <a:fld id="{00000000-1234-1234-1234-123412341234}" type="slidenum">
+              <a:rPr b="0" i="0" lang="en-US" sz="1200" u="none" cap="none" strike="noStrike">
+                <a:solidFill>
+                  <a:srgbClr val="000000"/>
+                </a:solidFill>
+                <a:latin typeface="Arial"/>
+                <a:ea typeface="Arial"/>
+                <a:cs typeface="Arial"/>
+                <a:sym typeface="Arial"/>
+              </a:rPr>
+              <a:t>‹#›</a:t>
+            </a:fld>
+            <a:endParaRPr b="0" i="0" sz="1200" u="none" cap="none" strike="noStrike">
+              <a:solidFill>
+                <a:srgbClr val="000000"/>
+              </a:solidFill>
+              <a:latin typeface="Arial"/>
+              <a:ea typeface="Arial"/>
+              <a:cs typeface="Arial"/>
+              <a:sym typeface="Arial"/>
+            </a:endParaRPr>
+          </a:p>
+        </p:txBody>
+      </p:sp>
+    </p:spTree>
+  </p:cSld>
+  <p:clrMapOvr>
+    <a:masterClrMapping/>
+  </p:clrMapOvr>
+</p:notes>
+</file>
+
+<file path=ppt/notesSlides/notesSlide17.xml><?xml version="1.0" encoding="utf-8"?>
+<p:notes xmlns:a="http://schemas.openxmlformats.org/drawingml/2006/main" xmlns:r="http://schemas.openxmlformats.org/officeDocument/2006/relationships" xmlns:mc="http://schemas.openxmlformats.org/markup-compatibility/2006" xmlns:mv="urn:schemas-microsoft-com:mac:vml" xmlns:p="http://schemas.openxmlformats.org/presentationml/2006/main" xmlns:c="http://schemas.openxmlformats.org/drawingml/2006/chart" xmlns:dgm="http://schemas.openxmlformats.org/drawingml/2006/diagram" xmlns:o="urn:schemas-microsoft-com:office:office" xmlns:v="urn:schemas-microsoft-com:vml" xmlns:pvml="urn:schemas-microsoft-com:office:powerpoint" xmlns:com="http://schemas.openxmlformats.org/drawingml/2006/compatibility" xmlns:p14="http://schemas.microsoft.com/office/powerpoint/2010/main" xmlns:p15="http://schemas.microsoft.com/office/powerpoint/2012/main" xmlns:ahyp="http://schemas.microsoft.com/office/drawing/2018/hyperlinkcolor" showMasterPhAnim="0" showMasterSp="0">
+  <p:cSld>
+    <p:spTree>
+      <p:nvGrpSpPr>
+        <p:cNvPr id="304" name="Shape 304"/>
+        <p:cNvGrpSpPr/>
+        <p:nvPr/>
+      </p:nvGrpSpPr>
+      <p:grpSpPr>
+        <a:xfrm>
+          <a:off x="0" y="0"/>
+          <a:ext cx="0" cy="0"/>
+          <a:chOff x="0" y="0"/>
+          <a:chExt cx="0" cy="0"/>
+        </a:xfrm>
+      </p:grpSpPr>
+      <p:sp>
+        <p:nvSpPr>
+          <p:cNvPr id="305" name="Google Shape;305;g3ce41fdc5fc_0_6:notes"/>
+          <p:cNvSpPr/>
+          <p:nvPr>
+            <p:ph idx="2" type="sldImg"/>
+          </p:nvPr>
+        </p:nvSpPr>
+        <p:spPr>
+          <a:xfrm>
+            <a:off x="685800" y="1143000"/>
+            <a:ext cx="5486400" cy="3086100"/>
+          </a:xfrm>
+          <a:custGeom>
+            <a:rect b="b" l="l" r="r" t="t"/>
+            <a:pathLst>
+              <a:path extrusionOk="0" h="120000" w="120000">
+                <a:moveTo>
+                  <a:pt x="0" y="0"/>
+                </a:moveTo>
+                <a:lnTo>
+                  <a:pt x="120000" y="0"/>
+                </a:lnTo>
+                <a:lnTo>
+                  <a:pt x="120000" y="120000"/>
+                </a:lnTo>
+                <a:lnTo>
+                  <a:pt x="0" y="120000"/>
+                </a:lnTo>
+                <a:close/>
+              </a:path>
+            </a:pathLst>
+          </a:custGeom>
+        </p:spPr>
+      </p:sp>
+      <p:sp>
+        <p:nvSpPr>
+          <p:cNvPr id="306" name="Google Shape;306;g3ce41fdc5fc_0_6:notes"/>
+          <p:cNvSpPr txBox="1"/>
+          <p:nvPr>
+            <p:ph idx="1" type="body"/>
+          </p:nvPr>
+        </p:nvSpPr>
+        <p:spPr>
+          <a:xfrm>
+            <a:off x="685800" y="4400550"/>
+            <a:ext cx="5486400" cy="3600600"/>
+          </a:xfrm>
+          <a:prstGeom prst="rect">
+            <a:avLst/>
+          </a:prstGeom>
+        </p:spPr>
+        <p:txBody>
+          <a:bodyPr anchorCtr="0" anchor="t" bIns="45700" lIns="91425" spcFirstLastPara="1" rIns="91425" wrap="square" tIns="45700">
+            <a:noAutofit/>
+          </a:bodyPr>
+          <a:lstStyle/>
+          <a:p>
+            <a:pPr indent="0" lvl="0" marL="0" rtl="0" algn="l">
+              <a:spcBef>
+                <a:spcPts val="0"/>
+              </a:spcBef>
+              <a:spcAft>
+                <a:spcPts val="0"/>
+              </a:spcAft>
+              <a:buNone/>
+            </a:pPr>
+            <a:r>
+              <a:rPr lang="en-US"/>
+              <a:t>Here are links for those interested in diving deeper.</a:t>
+            </a:r>
+            <a:endParaRPr/>
+          </a:p>
+        </p:txBody>
+      </p:sp>
+      <p:sp>
+        <p:nvSpPr>
+          <p:cNvPr id="307" name="Google Shape;307;g3ce41fdc5fc_0_6:notes"/>
+          <p:cNvSpPr txBox="1"/>
+          <p:nvPr>
+            <p:ph idx="12" type="sldNum"/>
+          </p:nvPr>
+        </p:nvSpPr>
+        <p:spPr>
+          <a:xfrm>
+            <a:off x="3884613" y="8685213"/>
+            <a:ext cx="2971800" cy="458700"/>
+          </a:xfrm>
+          <a:prstGeom prst="rect">
+            <a:avLst/>
+          </a:prstGeom>
+        </p:spPr>
+        <p:txBody>
+          <a:bodyPr anchorCtr="0" anchor="b" bIns="45700" lIns="91425" spcFirstLastPara="1" rIns="91425" wrap="square" tIns="45700">
+            <a:noAutofit/>
+          </a:bodyPr>
+          <a:lstStyle/>
+          <a:p>
+            <a:pPr indent="0" lvl="0" marL="0" rtl="0" algn="r">
+              <a:spcBef>
+                <a:spcPts val="0"/>
+              </a:spcBef>
+              <a:spcAft>
+                <a:spcPts val="0"/>
+              </a:spcAft>
+              <a:buClr>
+                <a:srgbClr val="000000"/>
+              </a:buClr>
+              <a:buSzPts val="1200"/>
+              <a:buFont typeface="Arial"/>
+              <a:buNone/>
+            </a:pPr>
+            <a:fld id="{00000000-1234-1234-1234-123412341234}" type="slidenum">
+              <a:rPr lang="en-US"/>
+              <a:t>‹#›</a:t>
+            </a:fld>
+            <a:endParaRPr/>
+          </a:p>
+        </p:txBody>
+      </p:sp>
+    </p:spTree>
+  </p:cSld>
+  <p:clrMapOvr>
+    <a:masterClrMapping/>
+  </p:clrMapOvr>
+</p:notes>
+</file>
+
+<file path=ppt/notesSlides/notesSlide18.xml><?xml version="1.0" encoding="utf-8"?>
+<p:notes xmlns:a="http://schemas.openxmlformats.org/drawingml/2006/main" xmlns:r="http://schemas.openxmlformats.org/officeDocument/2006/relationships" xmlns:mc="http://schemas.openxmlformats.org/markup-compatibility/2006" xmlns:mv="urn:schemas-microsoft-com:mac:vml" xmlns:p="http://schemas.openxmlformats.org/presentationml/2006/main" xmlns:c="http://schemas.openxmlformats.org/drawingml/2006/chart" xmlns:dgm="http://schemas.openxmlformats.org/drawingml/2006/diagram" xmlns:o="urn:schemas-microsoft-com:office:office" xmlns:v="urn:schemas-microsoft-com:vml" xmlns:pvml="urn:schemas-microsoft-com:office:powerpoint" xmlns:com="http://schemas.openxmlformats.org/drawingml/2006/compatibility" xmlns:p14="http://schemas.microsoft.com/office/powerpoint/2010/main" xmlns:p15="http://schemas.microsoft.com/office/powerpoint/2012/main" xmlns:ahyp="http://schemas.microsoft.com/office/drawing/2018/hyperlinkcolor" showMasterPhAnim="0" showMasterSp="0">
+  <p:cSld>
+    <p:spTree>
+      <p:nvGrpSpPr>
+        <p:cNvPr id="311" name="Shape 311"/>
+        <p:cNvGrpSpPr/>
+        <p:nvPr/>
+      </p:nvGrpSpPr>
+      <p:grpSpPr>
+        <a:xfrm>
+          <a:off x="0" y="0"/>
+          <a:ext cx="0" cy="0"/>
+          <a:chOff x="0" y="0"/>
+          <a:chExt cx="0" cy="0"/>
+        </a:xfrm>
+      </p:grpSpPr>
+      <p:sp>
+        <p:nvSpPr>
+          <p:cNvPr id="312" name="Google Shape;312;g3d18e836f13_0_19:notes"/>
+          <p:cNvSpPr/>
+          <p:nvPr>
+            <p:ph idx="2" type="sldImg"/>
+          </p:nvPr>
+        </p:nvSpPr>
+        <p:spPr>
+          <a:xfrm>
+            <a:off x="685800" y="1143000"/>
+            <a:ext cx="5486400" cy="3086100"/>
+          </a:xfrm>
+          <a:custGeom>
+            <a:rect b="b" l="l" r="r" t="t"/>
+            <a:pathLst>
+              <a:path extrusionOk="0" h="120000" w="120000">
+                <a:moveTo>
+                  <a:pt x="0" y="0"/>
+                </a:moveTo>
+                <a:lnTo>
+                  <a:pt x="120000" y="0"/>
+                </a:lnTo>
+                <a:lnTo>
+                  <a:pt x="120000" y="120000"/>
+                </a:lnTo>
+                <a:lnTo>
+                  <a:pt x="0" y="120000"/>
+                </a:lnTo>
+                <a:close/>
+              </a:path>
+            </a:pathLst>
+          </a:custGeom>
+        </p:spPr>
+      </p:sp>
+      <p:sp>
+        <p:nvSpPr>
+          <p:cNvPr id="313" name="Google Shape;313;g3d18e836f13_0_19:notes"/>
+          <p:cNvSpPr txBox="1"/>
+          <p:nvPr>
+            <p:ph idx="1" type="body"/>
+          </p:nvPr>
+        </p:nvSpPr>
+        <p:spPr>
+          <a:xfrm>
+            <a:off x="685800" y="4400550"/>
+            <a:ext cx="5486400" cy="3600600"/>
+          </a:xfrm>
+          <a:prstGeom prst="rect">
+            <a:avLst/>
+          </a:prstGeom>
+        </p:spPr>
+        <p:txBody>
+          <a:bodyPr anchorCtr="0" anchor="t" bIns="45700" lIns="91425" spcFirstLastPara="1" rIns="91425" wrap="square" tIns="45700">
+            <a:noAutofit/>
+          </a:bodyPr>
+          <a:lstStyle/>
+          <a:p>
+            <a:pPr indent="0" lvl="0" marL="0" rtl="0" algn="l">
+              <a:spcBef>
+                <a:spcPts val="0"/>
+              </a:spcBef>
+              <a:spcAft>
+                <a:spcPts val="0"/>
+              </a:spcAft>
+              <a:buNone/>
+            </a:pPr>
+            <a:r>
+              <a:rPr lang="en-US"/>
+              <a:t>Here is the current list of journals.</a:t>
+            </a:r>
+            <a:endParaRPr/>
+          </a:p>
+          <a:p>
+            <a:pPr indent="0" lvl="0" marL="0" rtl="0" algn="l">
+              <a:spcBef>
+                <a:spcPts val="0"/>
+              </a:spcBef>
+              <a:spcAft>
+                <a:spcPts val="0"/>
+              </a:spcAft>
+              <a:buNone/>
+            </a:pPr>
+            <a:r>
+              <a:t/>
+            </a:r>
+            <a:endParaRPr/>
+          </a:p>
+          <a:p>
+            <a:pPr indent="0" lvl="0" marL="0" rtl="0" algn="l">
+              <a:spcBef>
+                <a:spcPts val="0"/>
+              </a:spcBef>
+              <a:spcAft>
+                <a:spcPts val="0"/>
+              </a:spcAft>
+              <a:buNone/>
+            </a:pPr>
+            <a:r>
+              <a:rPr lang="en-US"/>
+              <a:t>A lot of public domain books are lumped together under “Unknown”. I need to fix the ingesters for local files to provide better metadata.</a:t>
+            </a:r>
+            <a:endParaRPr/>
+          </a:p>
+          <a:p>
+            <a:pPr indent="0" lvl="0" marL="0" rtl="0" algn="l">
+              <a:spcBef>
+                <a:spcPts val="0"/>
+              </a:spcBef>
+              <a:spcAft>
+                <a:spcPts val="0"/>
+              </a:spcAft>
+              <a:buNone/>
+            </a:pPr>
+            <a:r>
+              <a:t/>
+            </a:r>
+            <a:endParaRPr/>
+          </a:p>
+        </p:txBody>
+      </p:sp>
+      <p:sp>
+        <p:nvSpPr>
+          <p:cNvPr id="314" name="Google Shape;314;g3d18e836f13_0_19:notes"/>
+          <p:cNvSpPr txBox="1"/>
+          <p:nvPr>
+            <p:ph idx="12" type="sldNum"/>
+          </p:nvPr>
+        </p:nvSpPr>
+        <p:spPr>
+          <a:xfrm>
+            <a:off x="3884613" y="8685213"/>
+            <a:ext cx="2971800" cy="458700"/>
+          </a:xfrm>
+          <a:prstGeom prst="rect">
+            <a:avLst/>
+          </a:prstGeom>
+        </p:spPr>
+        <p:txBody>
+          <a:bodyPr anchorCtr="0" anchor="b" bIns="45700" lIns="91425" spcFirstLastPara="1" rIns="91425" wrap="square" tIns="45700">
+            <a:noAutofit/>
+          </a:bodyPr>
+          <a:lstStyle/>
+          <a:p>
+            <a:pPr indent="0" lvl="0" marL="0" rtl="0" algn="r">
+              <a:spcBef>
+                <a:spcPts val="0"/>
+              </a:spcBef>
+              <a:spcAft>
+                <a:spcPts val="0"/>
+              </a:spcAft>
+              <a:buClr>
+                <a:srgbClr val="000000"/>
+              </a:buClr>
+              <a:buSzPts val="1200"/>
+              <a:buFont typeface="Arial"/>
+              <a:buNone/>
+            </a:pPr>
+            <a:fld id="{00000000-1234-1234-1234-123412341234}" type="slidenum">
+              <a:rPr lang="en-US"/>
+              <a:t>‹#›</a:t>
+            </a:fld>
+            <a:endParaRPr/>
           </a:p>
         </p:txBody>
       </p:sp>
@@ -2155,6 +4415,27 @@
             <a:noAutofit/>
           </a:bodyPr>
           <a:lstStyle/>
+          <a:p>
+            <a:pPr indent="0" lvl="0" marL="0" rtl="0" algn="l">
+              <a:spcBef>
+                <a:spcPts val="0"/>
+              </a:spcBef>
+              <a:spcAft>
+                <a:spcPts val="0"/>
+              </a:spcAft>
+              <a:buClr>
+                <a:schemeClr val="dk1"/>
+              </a:buClr>
+              <a:buSzPts val="1100"/>
+              <a:buFont typeface="Arial"/>
+              <a:buNone/>
+            </a:pPr>
+            <a:r>
+              <a:rPr lang="en-US"/>
+              <a:t>Here is an overview of the SKOL Architecture as seen through subprojects. On the left we have the web sites that we scrape for articles and the ingestors that keep the local copies of journals up to date. The next two blocks represent data storage and cleaning. This dark blue block is a PySpark pipeline that builds a classifier to extract species names and their descriptions from the literature. These names and descriptions are combined into Taxa objects in the light blue box.</a:t>
+            </a:r>
+            <a:endParaRPr/>
+          </a:p>
           <a:p>
             <a:pPr indent="0" lvl="0" marL="0" rtl="0" algn="l">
               <a:lnSpc>
@@ -2322,6 +4603,150 @@
           <a:lstStyle/>
           <a:p>
             <a:pPr indent="0" lvl="0" marL="0" rtl="0" algn="l">
+              <a:spcBef>
+                <a:spcPts val="0"/>
+              </a:spcBef>
+              <a:spcAft>
+                <a:spcPts val="0"/>
+              </a:spcAft>
+              <a:buClr>
+                <a:schemeClr val="dk1"/>
+              </a:buClr>
+              <a:buSzPts val="1100"/>
+              <a:buFont typeface="Arial"/>
+              <a:buNone/>
+            </a:pPr>
+            <a:r>
+              <a:rPr lang="en-US"/>
+              <a:t>The taxa are then processed in two separate paths.</a:t>
+            </a:r>
+            <a:endParaRPr/>
+          </a:p>
+          <a:p>
+            <a:pPr indent="0" lvl="0" marL="0" rtl="0" algn="l">
+              <a:spcBef>
+                <a:spcPts val="0"/>
+              </a:spcBef>
+              <a:spcAft>
+                <a:spcPts val="0"/>
+              </a:spcAft>
+              <a:buClr>
+                <a:schemeClr val="dk1"/>
+              </a:buClr>
+              <a:buSzPts val="1100"/>
+              <a:buFont typeface="Arial"/>
+              <a:buNone/>
+            </a:pPr>
+            <a:r>
+              <a:t/>
+            </a:r>
+            <a:endParaRPr/>
+          </a:p>
+          <a:p>
+            <a:pPr indent="0" lvl="0" marL="0" rtl="0" algn="l">
+              <a:spcBef>
+                <a:spcPts val="0"/>
+              </a:spcBef>
+              <a:spcAft>
+                <a:spcPts val="0"/>
+              </a:spcAft>
+              <a:buClr>
+                <a:schemeClr val="dk1"/>
+              </a:buClr>
+              <a:buSzPts val="1100"/>
+              <a:buFont typeface="Arial"/>
+              <a:buNone/>
+            </a:pPr>
+            <a:r>
+              <a:rPr lang="en-US"/>
+              <a:t>The upper path uses an embedding into a searchable semantic space with the SBERT Small Language Model. This embedding is then used to find taxa that are similar to a description provided by the user.</a:t>
+            </a:r>
+            <a:endParaRPr/>
+          </a:p>
+          <a:p>
+            <a:pPr indent="0" lvl="0" marL="0" rtl="0" algn="l">
+              <a:spcBef>
+                <a:spcPts val="0"/>
+              </a:spcBef>
+              <a:spcAft>
+                <a:spcPts val="0"/>
+              </a:spcAft>
+              <a:buClr>
+                <a:schemeClr val="dk1"/>
+              </a:buClr>
+              <a:buSzPts val="1100"/>
+              <a:buFont typeface="Arial"/>
+              <a:buNone/>
+            </a:pPr>
+            <a:r>
+              <a:t/>
+            </a:r>
+            <a:endParaRPr/>
+          </a:p>
+          <a:p>
+            <a:pPr indent="0" lvl="0" marL="0" rtl="0" algn="l">
+              <a:spcBef>
+                <a:spcPts val="0"/>
+              </a:spcBef>
+              <a:spcAft>
+                <a:spcPts val="0"/>
+              </a:spcAft>
+              <a:buClr>
+                <a:schemeClr val="dk1"/>
+              </a:buClr>
+              <a:buSzPts val="1100"/>
+              <a:buFont typeface="Arial"/>
+              <a:buNone/>
+            </a:pPr>
+            <a:r>
+              <a:rPr lang="en-US"/>
+              <a:t>The lower path uses a different Small Language Model, Mistral 7b, which translates the free form text description into a hierarchical representation of features, subfeatures, and values. These representations are refined through constrained decoding, which limits the output to valid JSON structures. The vocabulary is then normalized using similarity to published ontologies.</a:t>
+            </a:r>
+            <a:endParaRPr/>
+          </a:p>
+          <a:p>
+            <a:pPr indent="0" lvl="0" marL="0" rtl="0" algn="l">
+              <a:spcBef>
+                <a:spcPts val="0"/>
+              </a:spcBef>
+              <a:spcAft>
+                <a:spcPts val="0"/>
+              </a:spcAft>
+              <a:buClr>
+                <a:schemeClr val="dk1"/>
+              </a:buClr>
+              <a:buSzPts val="1100"/>
+              <a:buFont typeface="Arial"/>
+              <a:buNone/>
+            </a:pPr>
+            <a:r>
+              <a:t/>
+            </a:r>
+            <a:endParaRPr/>
+          </a:p>
+          <a:p>
+            <a:pPr indent="0" lvl="0" marL="0" rtl="0" algn="l">
+              <a:spcBef>
+                <a:spcPts val="0"/>
+              </a:spcBef>
+              <a:spcAft>
+                <a:spcPts val="0"/>
+              </a:spcAft>
+              <a:buClr>
+                <a:schemeClr val="dk1"/>
+              </a:buClr>
+              <a:buSzPts val="1100"/>
+              <a:buFont typeface="Arial"/>
+              <a:buNone/>
+            </a:pPr>
+            <a:r>
+              <a:rPr lang="en-US"/>
+              <a:t>Finally, we have the web site built with Django and React.</a:t>
+            </a:r>
+            <a:endParaRPr/>
+          </a:p>
+          <a:p>
+            <a:pPr indent="0" lvl="0" marL="0" rtl="0" algn="l">
               <a:lnSpc>
                 <a:spcPct val="100000"/>
               </a:lnSpc>
@@ -2416,7 +4841,7 @@
       </p:grpSpPr>
       <p:sp>
         <p:nvSpPr>
-          <p:cNvPr id="179" name="Google Shape;179;g3cd5945c579_0_106:notes"/>
+          <p:cNvPr id="179" name="Google Shape;179;g3cdd6918926_0_6:notes"/>
           <p:cNvSpPr/>
           <p:nvPr>
             <p:ph idx="2" type="sldImg"/>
@@ -2461,7 +4886,7 @@
       </p:sp>
       <p:sp>
         <p:nvSpPr>
-          <p:cNvPr id="180" name="Google Shape;180;g3cd5945c579_0_106:notes"/>
+          <p:cNvPr id="180" name="Google Shape;180;g3cdd6918926_0_6:notes"/>
           <p:cNvSpPr txBox="1"/>
           <p:nvPr>
             <p:ph idx="1" type="body"/>
@@ -2500,6 +4925,26 @@
               <a:buNone/>
             </a:pPr>
             <a:r>
+              <a:rPr lang="en-US"/>
+              <a:t>Starting from the dark blue box, the Classifier, we have an example of a labeled taxon as produced by the Classifier. Note the Nomenclature and Description annotations.</a:t>
+            </a:r>
+            <a:endParaRPr/>
+          </a:p>
+          <a:p>
+            <a:pPr indent="0" lvl="0" marL="0" rtl="0" algn="l">
+              <a:lnSpc>
+                <a:spcPct val="100000"/>
+              </a:lnSpc>
+              <a:spcBef>
+                <a:spcPts val="0"/>
+              </a:spcBef>
+              <a:spcAft>
+                <a:spcPts val="0"/>
+              </a:spcAft>
+              <a:buSzPts val="1400"/>
+              <a:buNone/>
+            </a:pPr>
+            <a:r>
               <a:t/>
             </a:r>
             <a:endParaRPr/>
@@ -2508,7 +4953,7 @@
       </p:sp>
       <p:sp>
         <p:nvSpPr>
-          <p:cNvPr id="181" name="Google Shape;181;g3cd5945c579_0_106:notes"/>
+          <p:cNvPr id="181" name="Google Shape;181;g3cdd6918926_0_6:notes"/>
           <p:cNvSpPr txBox="1"/>
           <p:nvPr>
             <p:ph idx="12" type="sldNum"/>
@@ -2567,7 +5012,7 @@
   <p:cSld>
     <p:spTree>
       <p:nvGrpSpPr>
-        <p:cNvPr id="185" name="Shape 185"/>
+        <p:cNvPr id="186" name="Shape 186"/>
         <p:cNvGrpSpPr/>
         <p:nvPr/>
       </p:nvGrpSpPr>
@@ -2581,7 +5026,7 @@
       </p:grpSpPr>
       <p:sp>
         <p:nvSpPr>
-          <p:cNvPr id="186" name="Google Shape;186;g3cd5945c579_0_126:notes"/>
+          <p:cNvPr id="187" name="Google Shape;187;g3cdd6918926_0_16:notes"/>
           <p:cNvSpPr/>
           <p:nvPr>
             <p:ph idx="2" type="sldImg"/>
@@ -2626,7 +5071,7 @@
       </p:sp>
       <p:sp>
         <p:nvSpPr>
-          <p:cNvPr id="187" name="Google Shape;187;g3cd5945c579_0_126:notes"/>
+          <p:cNvPr id="188" name="Google Shape;188;g3cdd6918926_0_16:notes"/>
           <p:cNvSpPr txBox="1"/>
           <p:nvPr>
             <p:ph idx="1" type="body"/>
@@ -2665,7 +5110,12 @@
               <a:buNone/>
             </a:pPr>
             <a:r>
-              <a:t/>
+              <a:rPr lang="en-US"/>
+              <a:t>We extended a tool developed by Nick Gisolfi of the Auton Lab at Carnegie Mellon to search the open mycological literature for species descriptions. The SBERT embedding of descriptions from the literature can be </a:t>
+            </a:r>
+            <a:r>
+              <a:rPr lang="en-US"/>
+              <a:t>compared to a description provided by the user to find the most similar descriptions. Since the search is semantic, that is to say meaning-based, the exact vocabulary chosen by the user does not matter very much. We can say “stem” or “stipe” and get mostly the same matches. Even though I’ve yet to do anything special for languages-other-than-English, I’ve even gotten good matches with Latin and German results.</a:t>
             </a:r>
             <a:endParaRPr/>
           </a:p>
@@ -2673,7 +5123,7 @@
       </p:sp>
       <p:sp>
         <p:nvSpPr>
-          <p:cNvPr id="188" name="Google Shape;188;g3cd5945c579_0_126:notes"/>
+          <p:cNvPr id="189" name="Google Shape;189;g3cdd6918926_0_16:notes"/>
           <p:cNvSpPr txBox="1"/>
           <p:nvPr>
             <p:ph idx="12" type="sldNum"/>
@@ -2732,7 +5182,7 @@
   <p:cSld>
     <p:spTree>
       <p:nvGrpSpPr>
-        <p:cNvPr id="192" name="Shape 192"/>
+        <p:cNvPr id="194" name="Shape 194"/>
         <p:cNvGrpSpPr/>
         <p:nvPr/>
       </p:nvGrpSpPr>
@@ -2746,7 +5196,7 @@
       </p:grpSpPr>
       <p:sp>
         <p:nvSpPr>
-          <p:cNvPr id="193" name="Google Shape;193;g3cdd6918556_0_0:notes"/>
+          <p:cNvPr id="195" name="Google Shape;195;g3cdd6918926_0_12:notes"/>
           <p:cNvSpPr/>
           <p:nvPr>
             <p:ph idx="2" type="sldImg"/>
@@ -2791,7 +5241,7 @@
       </p:sp>
       <p:sp>
         <p:nvSpPr>
-          <p:cNvPr id="194" name="Google Shape;194;g3cdd6918556_0_0:notes"/>
+          <p:cNvPr id="196" name="Google Shape;196;g3cdd6918926_0_12:notes"/>
           <p:cNvSpPr txBox="1"/>
           <p:nvPr>
             <p:ph idx="1" type="body"/>
@@ -2830,6 +5280,26 @@
               <a:buNone/>
             </a:pPr>
             <a:r>
+              <a:rPr lang="en-US"/>
+              <a:t>Here we have a typical prose description. We use Mistral 7b to translate prose descriptions into a hierarchy of feature, subfeature, and value. This hierarchical form allows further manipulation of the descriptions for making menus and feature selection tools.</a:t>
+            </a:r>
+            <a:endParaRPr/>
+          </a:p>
+          <a:p>
+            <a:pPr indent="0" lvl="0" marL="0" rtl="0" algn="l">
+              <a:lnSpc>
+                <a:spcPct val="100000"/>
+              </a:lnSpc>
+              <a:spcBef>
+                <a:spcPts val="0"/>
+              </a:spcBef>
+              <a:spcAft>
+                <a:spcPts val="0"/>
+              </a:spcAft>
+              <a:buSzPts val="1400"/>
+              <a:buNone/>
+            </a:pPr>
+            <a:r>
               <a:t/>
             </a:r>
             <a:endParaRPr/>
@@ -2838,7 +5308,7 @@
       </p:sp>
       <p:sp>
         <p:nvSpPr>
-          <p:cNvPr id="195" name="Google Shape;195;g3cdd6918556_0_0:notes"/>
+          <p:cNvPr id="197" name="Google Shape;197;g3cdd6918926_0_12:notes"/>
           <p:cNvSpPr txBox="1"/>
           <p:nvPr>
             <p:ph idx="12" type="sldNum"/>
@@ -2897,7 +5367,7 @@
   <p:cSld>
     <p:spTree>
       <p:nvGrpSpPr>
-        <p:cNvPr id="199" name="Shape 199"/>
+        <p:cNvPr id="203" name="Shape 203"/>
         <p:cNvGrpSpPr/>
         <p:nvPr/>
       </p:nvGrpSpPr>
@@ -2911,7 +5381,7 @@
       </p:grpSpPr>
       <p:sp>
         <p:nvSpPr>
-          <p:cNvPr id="200" name="Google Shape;200;g3cd5945c579_0_130:notes"/>
+          <p:cNvPr id="204" name="Google Shape;204;g3cdd6918926_0_24:notes"/>
           <p:cNvSpPr/>
           <p:nvPr>
             <p:ph idx="2" type="sldImg"/>
@@ -2956,7 +5426,7 @@
       </p:sp>
       <p:sp>
         <p:nvSpPr>
-          <p:cNvPr id="201" name="Google Shape;201;g3cd5945c579_0_130:notes"/>
+          <p:cNvPr id="205" name="Google Shape;205;g3cdd6918926_0_24:notes"/>
           <p:cNvSpPr txBox="1"/>
           <p:nvPr>
             <p:ph idx="1" type="body"/>
@@ -2995,7 +5465,128 @@
               <a:buNone/>
             </a:pPr>
             <a:r>
+              <a:rPr lang="en-US"/>
+              <a:t>One of the subprojects concentrated on storage technologies. This was the start of integrating pieces from the other projects into a single deployable system. This project was the first I did after learning to use Claude Code, an AI coding agent. Claude really enabled the rest of the work, allowing me to concentrate on behaviors and design, with only light review of code produced by Claude.</a:t>
+            </a:r>
+            <a:endParaRPr/>
+          </a:p>
+          <a:p>
+            <a:pPr indent="0" lvl="0" marL="0" rtl="0" algn="l">
+              <a:lnSpc>
+                <a:spcPct val="100000"/>
+              </a:lnSpc>
+              <a:spcBef>
+                <a:spcPts val="0"/>
+              </a:spcBef>
+              <a:spcAft>
+                <a:spcPts val="0"/>
+              </a:spcAft>
+              <a:buSzPts val="1400"/>
+              <a:buNone/>
+            </a:pPr>
+            <a:r>
               <a:t/>
+            </a:r>
+            <a:endParaRPr/>
+          </a:p>
+          <a:p>
+            <a:pPr indent="0" lvl="0" marL="0" rtl="0" algn="l">
+              <a:spcBef>
+                <a:spcPts val="0"/>
+              </a:spcBef>
+              <a:spcAft>
+                <a:spcPts val="0"/>
+              </a:spcAft>
+              <a:buClr>
+                <a:schemeClr val="dk1"/>
+              </a:buClr>
+              <a:buSzPts val="1100"/>
+              <a:buFont typeface="Arial"/>
+              <a:buNone/>
+            </a:pPr>
+            <a:r>
+              <a:rPr lang="en-US"/>
+              <a:t>I used </a:t>
+            </a:r>
+            <a:r>
+              <a:rPr lang="en-US"/>
+              <a:t>pypaperretriever and paperscraper for web ingestion.</a:t>
+            </a:r>
+            <a:endParaRPr/>
+          </a:p>
+          <a:p>
+            <a:pPr indent="0" lvl="0" marL="0" rtl="0" algn="l">
+              <a:spcBef>
+                <a:spcPts val="0"/>
+              </a:spcBef>
+              <a:spcAft>
+                <a:spcPts val="0"/>
+              </a:spcAft>
+              <a:buSzPts val="1100"/>
+              <a:buNone/>
+            </a:pPr>
+            <a:r>
+              <a:rPr lang="en-US"/>
+              <a:t>A CouchDB JSON database holds a lot of the core data: Scraped journals and books, metadata, taxa records, JSON descriptions.</a:t>
+            </a:r>
+            <a:endParaRPr/>
+          </a:p>
+          <a:p>
+            <a:pPr indent="0" lvl="0" marL="0" rtl="0" algn="l">
+              <a:spcBef>
+                <a:spcPts val="0"/>
+              </a:spcBef>
+              <a:spcAft>
+                <a:spcPts val="0"/>
+              </a:spcAft>
+              <a:buClr>
+                <a:schemeClr val="dk1"/>
+              </a:buClr>
+              <a:buSzPts val="1100"/>
+              <a:buFont typeface="Arial"/>
+              <a:buNone/>
+            </a:pPr>
+            <a:r>
+              <a:rPr lang="en-US"/>
+              <a:t>A Redis in-memory dictionary holds various generated structures needed by the web site including: Models, Fungaria records, and Generated menus.</a:t>
+            </a:r>
+            <a:endParaRPr/>
+          </a:p>
+          <a:p>
+            <a:pPr indent="0" lvl="0" marL="0" rtl="0" algn="l">
+              <a:spcBef>
+                <a:spcPts val="0"/>
+              </a:spcBef>
+              <a:spcAft>
+                <a:spcPts val="0"/>
+              </a:spcAft>
+              <a:buClr>
+                <a:schemeClr val="dk1"/>
+              </a:buClr>
+              <a:buSzPts val="1100"/>
+              <a:buFont typeface="Arial"/>
+              <a:buNone/>
+            </a:pPr>
+            <a:r>
+              <a:rPr lang="en-US"/>
+              <a:t>A PostgreSQL SQL database holds the Django ORM for user accounts, collections, metadata.</a:t>
+            </a:r>
+            <a:endParaRPr/>
+          </a:p>
+          <a:p>
+            <a:pPr indent="0" lvl="0" marL="0" rtl="0" algn="l">
+              <a:spcBef>
+                <a:spcPts val="0"/>
+              </a:spcBef>
+              <a:spcAft>
+                <a:spcPts val="0"/>
+              </a:spcAft>
+              <a:buSzPts val="1400"/>
+              <a:buNone/>
+            </a:pPr>
+            <a:r>
+              <a:rPr lang="en-US"/>
+              <a:t>I used Neo4j to visualize the SBERT embeddings.</a:t>
             </a:r>
             <a:endParaRPr/>
           </a:p>
@@ -3003,7 +5594,7 @@
       </p:sp>
       <p:sp>
         <p:nvSpPr>
-          <p:cNvPr id="202" name="Google Shape;202;g3cd5945c579_0_130:notes"/>
+          <p:cNvPr id="206" name="Google Shape;206;g3cdd6918926_0_24:notes"/>
           <p:cNvSpPr txBox="1"/>
           <p:nvPr>
             <p:ph idx="12" type="sldNum"/>
@@ -3062,7 +5653,7 @@
   <p:cSld>
     <p:spTree>
       <p:nvGrpSpPr>
-        <p:cNvPr id="207" name="Shape 207"/>
+        <p:cNvPr id="211" name="Shape 211"/>
         <p:cNvGrpSpPr/>
         <p:nvPr/>
       </p:nvGrpSpPr>
@@ -3076,7 +5667,7 @@
       </p:grpSpPr>
       <p:sp>
         <p:nvSpPr>
-          <p:cNvPr id="208" name="Google Shape;208;g3cd5945c579_0_121:notes"/>
+          <p:cNvPr id="212" name="Google Shape;212;g3d18e836f13_0_37:notes"/>
           <p:cNvSpPr/>
           <p:nvPr>
             <p:ph idx="2" type="sldImg"/>
@@ -3121,7 +5712,7 @@
       </p:sp>
       <p:sp>
         <p:nvSpPr>
-          <p:cNvPr id="209" name="Google Shape;209;g3cd5945c579_0_121:notes"/>
+          <p:cNvPr id="213" name="Google Shape;213;g3d18e836f13_0_37:notes"/>
           <p:cNvSpPr txBox="1"/>
           <p:nvPr>
             <p:ph idx="1" type="body"/>
@@ -3147,9 +5738,60 @@
           <a:lstStyle/>
           <a:p>
             <a:pPr indent="0" lvl="0" marL="0" rtl="0" algn="l">
-              <a:lnSpc>
-                <a:spcPct val="100000"/>
-              </a:lnSpc>
+              <a:spcBef>
+                <a:spcPts val="0"/>
+              </a:spcBef>
+              <a:spcAft>
+                <a:spcPts val="0"/>
+              </a:spcAft>
+              <a:buSzPts val="1100"/>
+              <a:buNone/>
+            </a:pPr>
+            <a:r>
+              <a:rPr lang="en-US"/>
+              <a:t>Here is a visualization with Neo4j of pseudoclades based on similarity distance in SBERT embeddings.</a:t>
+            </a:r>
+            <a:endParaRPr/>
+          </a:p>
+          <a:p>
+            <a:pPr indent="0" lvl="0" marL="0" rtl="0" algn="l">
+              <a:spcBef>
+                <a:spcPts val="0"/>
+              </a:spcBef>
+              <a:spcAft>
+                <a:spcPts val="0"/>
+              </a:spcAft>
+              <a:buSzPts val="1100"/>
+              <a:buNone/>
+            </a:pPr>
+            <a:r>
+              <a:t/>
+            </a:r>
+            <a:endParaRPr/>
+          </a:p>
+          <a:p>
+            <a:pPr indent="0" lvl="0" marL="0" rtl="0" algn="l">
+              <a:spcBef>
+                <a:spcPts val="0"/>
+              </a:spcBef>
+              <a:spcAft>
+                <a:spcPts val="0"/>
+              </a:spcAft>
+              <a:buClr>
+                <a:schemeClr val="dk1"/>
+              </a:buClr>
+              <a:buSzPts val="1400"/>
+              <a:buFont typeface="Arial"/>
+              <a:buNone/>
+            </a:pPr>
+            <a:r>
+              <a:rPr lang="en-US"/>
+              <a:t>The next few slides give more detail on the web site.</a:t>
+            </a:r>
+            <a:endParaRPr/>
+          </a:p>
+          <a:p>
+            <a:pPr indent="0" lvl="0" marL="0" rtl="0" algn="l">
               <a:spcBef>
                 <a:spcPts val="0"/>
               </a:spcBef>
@@ -3168,7 +5810,7 @@
       </p:sp>
       <p:sp>
         <p:nvSpPr>
-          <p:cNvPr id="210" name="Google Shape;210;g3cd5945c579_0_121:notes"/>
+          <p:cNvPr id="214" name="Google Shape;214;g3d18e836f13_0_37:notes"/>
           <p:cNvSpPr txBox="1"/>
           <p:nvPr>
             <p:ph idx="12" type="sldNum"/>
@@ -3227,7 +5869,7 @@
   <p:cSld>
     <p:spTree>
       <p:nvGrpSpPr>
-        <p:cNvPr id="214" name="Shape 214"/>
+        <p:cNvPr id="219" name="Shape 219"/>
         <p:cNvGrpSpPr/>
         <p:nvPr/>
       </p:nvGrpSpPr>
@@ -3241,7 +5883,7 @@
       </p:grpSpPr>
       <p:sp>
         <p:nvSpPr>
-          <p:cNvPr id="215" name="Google Shape;215;g3cdd6918556_0_6:notes"/>
+          <p:cNvPr id="220" name="Google Shape;220;g3cd5945c579_0_106:notes"/>
           <p:cNvSpPr/>
           <p:nvPr>
             <p:ph idx="2" type="sldImg"/>
@@ -3286,7 +5928,7 @@
       </p:sp>
       <p:sp>
         <p:nvSpPr>
-          <p:cNvPr id="216" name="Google Shape;216;g3cdd6918556_0_6:notes"/>
+          <p:cNvPr id="221" name="Google Shape;221;g3cd5945c579_0_106:notes"/>
           <p:cNvSpPr txBox="1"/>
           <p:nvPr>
             <p:ph idx="1" type="body"/>
@@ -3312,6 +5954,27 @@
           <a:lstStyle/>
           <a:p>
             <a:pPr indent="0" lvl="0" marL="0" rtl="0" algn="l">
+              <a:spcBef>
+                <a:spcPts val="0"/>
+              </a:spcBef>
+              <a:spcAft>
+                <a:spcPts val="0"/>
+              </a:spcAft>
+              <a:buClr>
+                <a:schemeClr val="dk1"/>
+              </a:buClr>
+              <a:buSzPts val="1100"/>
+              <a:buFont typeface="Arial"/>
+              <a:buNone/>
+            </a:pPr>
+            <a:r>
+              <a:rPr lang="en-US"/>
+              <a:t>Here is the Search Page from the web site. Here we have the in-progress description built by the user. On the right, we have a set of tools for refining the description.</a:t>
+            </a:r>
+            <a:endParaRPr/>
+          </a:p>
+          <a:p>
+            <a:pPr indent="0" lvl="0" marL="0" rtl="0" algn="l">
               <a:lnSpc>
                 <a:spcPct val="100000"/>
               </a:lnSpc>
@@ -3326,6 +5989,65 @@
             </a:pPr>
             <a:r>
               <a:t/>
+            </a:r>
+            <a:endParaRPr/>
+          </a:p>
+          <a:p>
+            <a:pPr indent="0" lvl="0" marL="0" rtl="0" algn="l">
+              <a:lnSpc>
+                <a:spcPct val="100000"/>
+              </a:lnSpc>
+              <a:spcBef>
+                <a:spcPts val="0"/>
+              </a:spcBef>
+              <a:spcAft>
+                <a:spcPts val="0"/>
+              </a:spcAft>
+              <a:buSzPts val="1400"/>
+              <a:buNone/>
+            </a:pPr>
+            <a:r>
+              <a:rPr lang="en-US"/>
+              <a:t>Each collection can have a descriptive name, and the taxonomist’s best guess on a name.</a:t>
+            </a:r>
+            <a:endParaRPr/>
+          </a:p>
+          <a:p>
+            <a:pPr indent="0" lvl="0" marL="0" rtl="0" algn="l">
+              <a:lnSpc>
+                <a:spcPct val="100000"/>
+              </a:lnSpc>
+              <a:spcBef>
+                <a:spcPts val="0"/>
+              </a:spcBef>
+              <a:spcAft>
+                <a:spcPts val="0"/>
+              </a:spcAft>
+              <a:buSzPts val="1400"/>
+              <a:buNone/>
+            </a:pPr>
+            <a:r>
+              <a:t/>
+            </a:r>
+            <a:endParaRPr/>
+          </a:p>
+          <a:p>
+            <a:pPr indent="0" lvl="0" marL="0" rtl="0" algn="l">
+              <a:lnSpc>
+                <a:spcPct val="100000"/>
+              </a:lnSpc>
+              <a:spcBef>
+                <a:spcPts val="0"/>
+              </a:spcBef>
+              <a:spcAft>
+                <a:spcPts val="0"/>
+              </a:spcAft>
+              <a:buSzPts val="1400"/>
+              <a:buNone/>
+            </a:pPr>
+            <a:r>
+              <a:rPr lang="en-US"/>
+              <a:t>Every change is automatically tracked.</a:t>
             </a:r>
             <a:endParaRPr/>
           </a:p>
@@ -3333,7 +6055,7 @@
       </p:sp>
       <p:sp>
         <p:nvSpPr>
-          <p:cNvPr id="217" name="Google Shape;217;g3cdd6918556_0_6:notes"/>
+          <p:cNvPr id="222" name="Google Shape;222;g3cd5945c579_0_106:notes"/>
           <p:cNvSpPr txBox="1"/>
           <p:nvPr>
             <p:ph idx="12" type="sldNum"/>
@@ -25232,6 +27954,790 @@
 <file path=ppt/slides/slide10.xml><?xml version="1.0" encoding="utf-8"?>
 <p:sld xmlns:a="http://schemas.openxmlformats.org/drawingml/2006/main" xmlns:r="http://schemas.openxmlformats.org/officeDocument/2006/relationships" xmlns:mc="http://schemas.openxmlformats.org/markup-compatibility/2006" xmlns:mv="urn:schemas-microsoft-com:mac:vml" xmlns:p="http://schemas.openxmlformats.org/presentationml/2006/main" xmlns:c="http://schemas.openxmlformats.org/drawingml/2006/chart" xmlns:dgm="http://schemas.openxmlformats.org/drawingml/2006/diagram" xmlns:o="urn:schemas-microsoft-com:office:office" xmlns:v="urn:schemas-microsoft-com:vml" xmlns:pvml="urn:schemas-microsoft-com:office:powerpoint" xmlns:com="http://schemas.openxmlformats.org/drawingml/2006/compatibility" xmlns:p14="http://schemas.microsoft.com/office/powerpoint/2010/main" xmlns:p15="http://schemas.microsoft.com/office/powerpoint/2012/main" xmlns:ahyp="http://schemas.microsoft.com/office/drawing/2018/hyperlinkcolor">
   <p:cSld>
+    <p:spTree>
+      <p:nvGrpSpPr>
+        <p:cNvPr id="231" name="Shape 231"/>
+        <p:cNvGrpSpPr/>
+        <p:nvPr/>
+      </p:nvGrpSpPr>
+      <p:grpSpPr>
+        <a:xfrm>
+          <a:off x="0" y="0"/>
+          <a:ext cx="0" cy="0"/>
+          <a:chOff x="0" y="0"/>
+          <a:chExt cx="0" cy="0"/>
+        </a:xfrm>
+      </p:grpSpPr>
+      <p:pic>
+        <p:nvPicPr>
+          <p:cNvPr id="232" name="Google Shape;232;g3cd5945c579_0_126" title="skol_search_results.png"/>
+          <p:cNvPicPr preferRelativeResize="0"/>
+          <p:nvPr/>
+        </p:nvPicPr>
+        <p:blipFill rotWithShape="1">
+          <a:blip r:embed="rId3">
+            <a:alphaModFix/>
+          </a:blip>
+          <a:srcRect b="0" l="0" r="0" t="0"/>
+          <a:stretch/>
+        </p:blipFill>
+        <p:spPr>
+          <a:xfrm>
+            <a:off x="2325902" y="951075"/>
+            <a:ext cx="6849627" cy="5621076"/>
+          </a:xfrm>
+          <a:prstGeom prst="rect">
+            <a:avLst/>
+          </a:prstGeom>
+          <a:noFill/>
+          <a:ln>
+            <a:noFill/>
+          </a:ln>
+        </p:spPr>
+      </p:pic>
+      <p:sp>
+        <p:nvSpPr>
+          <p:cNvPr id="233" name="Google Shape;233;g3cd5945c579_0_126"/>
+          <p:cNvSpPr txBox="1"/>
+          <p:nvPr/>
+        </p:nvSpPr>
+        <p:spPr>
+          <a:xfrm>
+            <a:off x="1104400" y="210100"/>
+            <a:ext cx="5484000" cy="624600"/>
+          </a:xfrm>
+          <a:prstGeom prst="rect">
+            <a:avLst/>
+          </a:prstGeom>
+          <a:noFill/>
+          <a:ln>
+            <a:noFill/>
+          </a:ln>
+        </p:spPr>
+        <p:txBody>
+          <a:bodyPr anchorCtr="0" anchor="t" bIns="91425" lIns="91425" spcFirstLastPara="1" rIns="91425" wrap="square" tIns="91425">
+            <a:noAutofit/>
+          </a:bodyPr>
+          <a:lstStyle/>
+          <a:p>
+            <a:pPr indent="0" lvl="0" marL="0" marR="0" rtl="0" algn="l">
+              <a:lnSpc>
+                <a:spcPct val="100000"/>
+              </a:lnSpc>
+              <a:spcBef>
+                <a:spcPts val="0"/>
+              </a:spcBef>
+              <a:spcAft>
+                <a:spcPts val="0"/>
+              </a:spcAft>
+              <a:buClr>
+                <a:srgbClr val="000000"/>
+              </a:buClr>
+              <a:buSzPts val="3000"/>
+              <a:buFont typeface="Arial"/>
+              <a:buNone/>
+            </a:pPr>
+            <a:r>
+              <a:rPr b="0" i="0" lang="en-US" sz="3000" u="none" cap="none" strike="noStrike">
+                <a:solidFill>
+                  <a:schemeClr val="lt1"/>
+                </a:solidFill>
+                <a:latin typeface="Century Gothic"/>
+                <a:ea typeface="Century Gothic"/>
+                <a:cs typeface="Century Gothic"/>
+                <a:sym typeface="Century Gothic"/>
+              </a:rPr>
+              <a:t>Search Results</a:t>
+            </a:r>
+            <a:endParaRPr b="0" i="0" sz="3000" u="none" cap="none" strike="noStrike">
+              <a:solidFill>
+                <a:schemeClr val="lt1"/>
+              </a:solidFill>
+              <a:latin typeface="Century Gothic"/>
+              <a:ea typeface="Century Gothic"/>
+              <a:cs typeface="Century Gothic"/>
+              <a:sym typeface="Century Gothic"/>
+            </a:endParaRPr>
+          </a:p>
+        </p:txBody>
+      </p:sp>
+      <p:pic>
+        <p:nvPicPr>
+          <p:cNvPr id="234" name="Google Shape;234;g3cd5945c579_0_126" title="UI_Web_Site.png"/>
+          <p:cNvPicPr preferRelativeResize="0"/>
+          <p:nvPr/>
+        </p:nvPicPr>
+        <p:blipFill>
+          <a:blip r:embed="rId4">
+            <a:alphaModFix/>
+          </a:blip>
+          <a:stretch>
+            <a:fillRect/>
+          </a:stretch>
+        </p:blipFill>
+        <p:spPr>
+          <a:xfrm>
+            <a:off x="10436875" y="5952450"/>
+            <a:ext cx="1571625" cy="619125"/>
+          </a:xfrm>
+          <a:prstGeom prst="rect">
+            <a:avLst/>
+          </a:prstGeom>
+          <a:noFill/>
+          <a:ln>
+            <a:noFill/>
+          </a:ln>
+        </p:spPr>
+      </p:pic>
+    </p:spTree>
+  </p:cSld>
+  <p:clrMapOvr>
+    <a:masterClrMapping/>
+  </p:clrMapOvr>
+</p:sld>
+</file>
+
+<file path=ppt/slides/slide11.xml><?xml version="1.0" encoding="utf-8"?>
+<p:sld xmlns:a="http://schemas.openxmlformats.org/drawingml/2006/main" xmlns:r="http://schemas.openxmlformats.org/officeDocument/2006/relationships" xmlns:mc="http://schemas.openxmlformats.org/markup-compatibility/2006" xmlns:mv="urn:schemas-microsoft-com:mac:vml" xmlns:p="http://schemas.openxmlformats.org/presentationml/2006/main" xmlns:c="http://schemas.openxmlformats.org/drawingml/2006/chart" xmlns:dgm="http://schemas.openxmlformats.org/drawingml/2006/diagram" xmlns:o="urn:schemas-microsoft-com:office:office" xmlns:v="urn:schemas-microsoft-com:vml" xmlns:pvml="urn:schemas-microsoft-com:office:powerpoint" xmlns:com="http://schemas.openxmlformats.org/drawingml/2006/compatibility" xmlns:p14="http://schemas.microsoft.com/office/powerpoint/2010/main" xmlns:p15="http://schemas.microsoft.com/office/powerpoint/2012/main" xmlns:ahyp="http://schemas.microsoft.com/office/drawing/2018/hyperlinkcolor">
+  <p:cSld>
+    <p:spTree>
+      <p:nvGrpSpPr>
+        <p:cNvPr id="239" name="Shape 239"/>
+        <p:cNvGrpSpPr/>
+        <p:nvPr/>
+      </p:nvGrpSpPr>
+      <p:grpSpPr>
+        <a:xfrm>
+          <a:off x="0" y="0"/>
+          <a:ext cx="0" cy="0"/>
+          <a:chOff x="0" y="0"/>
+          <a:chExt cx="0" cy="0"/>
+        </a:xfrm>
+      </p:grpSpPr>
+      <p:pic>
+        <p:nvPicPr>
+          <p:cNvPr id="240" name="Google Shape;240;g3cdd6918556_0_0" title="skol_vocabulary_features_tool.png"/>
+          <p:cNvPicPr preferRelativeResize="0"/>
+          <p:nvPr/>
+        </p:nvPicPr>
+        <p:blipFill rotWithShape="1">
+          <a:blip r:embed="rId3">
+            <a:alphaModFix/>
+          </a:blip>
+          <a:srcRect b="0" l="0" r="0" t="0"/>
+          <a:stretch/>
+        </p:blipFill>
+        <p:spPr>
+          <a:xfrm>
+            <a:off x="3216600" y="1076325"/>
+            <a:ext cx="4657725" cy="4705350"/>
+          </a:xfrm>
+          <a:prstGeom prst="rect">
+            <a:avLst/>
+          </a:prstGeom>
+          <a:noFill/>
+          <a:ln>
+            <a:noFill/>
+          </a:ln>
+        </p:spPr>
+      </p:pic>
+      <p:sp>
+        <p:nvSpPr>
+          <p:cNvPr id="241" name="Google Shape;241;g3cdd6918556_0_0"/>
+          <p:cNvSpPr txBox="1"/>
+          <p:nvPr/>
+        </p:nvSpPr>
+        <p:spPr>
+          <a:xfrm>
+            <a:off x="1215950" y="243200"/>
+            <a:ext cx="7636200" cy="534900"/>
+          </a:xfrm>
+          <a:prstGeom prst="rect">
+            <a:avLst/>
+          </a:prstGeom>
+          <a:noFill/>
+          <a:ln>
+            <a:noFill/>
+          </a:ln>
+        </p:spPr>
+        <p:txBody>
+          <a:bodyPr anchorCtr="0" anchor="t" bIns="91425" lIns="91425" spcFirstLastPara="1" rIns="91425" wrap="square" tIns="91425">
+            <a:noAutofit/>
+          </a:bodyPr>
+          <a:lstStyle/>
+          <a:p>
+            <a:pPr indent="0" lvl="0" marL="0" marR="0" rtl="0" algn="l">
+              <a:lnSpc>
+                <a:spcPct val="100000"/>
+              </a:lnSpc>
+              <a:spcBef>
+                <a:spcPts val="0"/>
+              </a:spcBef>
+              <a:spcAft>
+                <a:spcPts val="0"/>
+              </a:spcAft>
+              <a:buClr>
+                <a:srgbClr val="000000"/>
+              </a:buClr>
+              <a:buSzPts val="3000"/>
+              <a:buFont typeface="Arial"/>
+              <a:buNone/>
+            </a:pPr>
+            <a:r>
+              <a:rPr b="0" i="0" lang="en-US" sz="3000" u="none" cap="none" strike="noStrike">
+                <a:solidFill>
+                  <a:schemeClr val="lt1"/>
+                </a:solidFill>
+                <a:latin typeface="Century Gothic"/>
+                <a:ea typeface="Century Gothic"/>
+                <a:cs typeface="Century Gothic"/>
+                <a:sym typeface="Century Gothic"/>
+              </a:rPr>
+              <a:t>Vocabulary Feature Tool</a:t>
+            </a:r>
+            <a:endParaRPr b="0" i="0" sz="3000" u="none" cap="none" strike="noStrike">
+              <a:solidFill>
+                <a:schemeClr val="lt1"/>
+              </a:solidFill>
+              <a:latin typeface="Century Gothic"/>
+              <a:ea typeface="Century Gothic"/>
+              <a:cs typeface="Century Gothic"/>
+              <a:sym typeface="Century Gothic"/>
+            </a:endParaRPr>
+          </a:p>
+        </p:txBody>
+      </p:sp>
+      <p:pic>
+        <p:nvPicPr>
+          <p:cNvPr id="242" name="Google Shape;242;g3cdd6918556_0_0" title="UI_Web_Site.png"/>
+          <p:cNvPicPr preferRelativeResize="0"/>
+          <p:nvPr/>
+        </p:nvPicPr>
+        <p:blipFill>
+          <a:blip r:embed="rId4">
+            <a:alphaModFix/>
+          </a:blip>
+          <a:stretch>
+            <a:fillRect/>
+          </a:stretch>
+        </p:blipFill>
+        <p:spPr>
+          <a:xfrm>
+            <a:off x="10436875" y="5952450"/>
+            <a:ext cx="1571625" cy="619125"/>
+          </a:xfrm>
+          <a:prstGeom prst="rect">
+            <a:avLst/>
+          </a:prstGeom>
+          <a:noFill/>
+          <a:ln>
+            <a:noFill/>
+          </a:ln>
+        </p:spPr>
+      </p:pic>
+    </p:spTree>
+  </p:cSld>
+  <p:clrMapOvr>
+    <a:masterClrMapping/>
+  </p:clrMapOvr>
+</p:sld>
+</file>
+
+<file path=ppt/slides/slide12.xml><?xml version="1.0" encoding="utf-8"?>
+<p:sld xmlns:a="http://schemas.openxmlformats.org/drawingml/2006/main" xmlns:r="http://schemas.openxmlformats.org/officeDocument/2006/relationships" xmlns:mc="http://schemas.openxmlformats.org/markup-compatibility/2006" xmlns:mv="urn:schemas-microsoft-com:mac:vml" xmlns:p="http://schemas.openxmlformats.org/presentationml/2006/main" xmlns:c="http://schemas.openxmlformats.org/drawingml/2006/chart" xmlns:dgm="http://schemas.openxmlformats.org/drawingml/2006/diagram" xmlns:o="urn:schemas-microsoft-com:office:office" xmlns:v="urn:schemas-microsoft-com:vml" xmlns:pvml="urn:schemas-microsoft-com:office:powerpoint" xmlns:com="http://schemas.openxmlformats.org/drawingml/2006/compatibility" xmlns:p14="http://schemas.microsoft.com/office/powerpoint/2010/main" xmlns:p15="http://schemas.microsoft.com/office/powerpoint/2012/main" xmlns:ahyp="http://schemas.microsoft.com/office/drawing/2018/hyperlinkcolor">
+  <p:cSld>
+    <p:spTree>
+      <p:nvGrpSpPr>
+        <p:cNvPr id="247" name="Shape 247"/>
+        <p:cNvGrpSpPr/>
+        <p:nvPr/>
+      </p:nvGrpSpPr>
+      <p:grpSpPr>
+        <a:xfrm>
+          <a:off x="0" y="0"/>
+          <a:ext cx="0" cy="0"/>
+          <a:chOff x="0" y="0"/>
+          <a:chExt cx="0" cy="0"/>
+        </a:xfrm>
+      </p:grpSpPr>
+      <p:pic>
+        <p:nvPicPr>
+          <p:cNvPr id="248" name="Google Shape;248;g3cd5945c579_0_130" title="skol_json_features_tool.png"/>
+          <p:cNvPicPr preferRelativeResize="0"/>
+          <p:nvPr/>
+        </p:nvPicPr>
+        <p:blipFill rotWithShape="1">
+          <a:blip r:embed="rId3">
+            <a:alphaModFix/>
+          </a:blip>
+          <a:srcRect b="0" l="0" r="0" t="0"/>
+          <a:stretch/>
+        </p:blipFill>
+        <p:spPr>
+          <a:xfrm>
+            <a:off x="5259425" y="1323975"/>
+            <a:ext cx="5343525" cy="5372100"/>
+          </a:xfrm>
+          <a:prstGeom prst="rect">
+            <a:avLst/>
+          </a:prstGeom>
+          <a:noFill/>
+          <a:ln>
+            <a:noFill/>
+          </a:ln>
+        </p:spPr>
+      </p:pic>
+      <p:pic>
+        <p:nvPicPr>
+          <p:cNvPr id="249" name="Google Shape;249;g3cd5945c579_0_130" title="skol_text_features_tool.png"/>
+          <p:cNvPicPr preferRelativeResize="0"/>
+          <p:nvPr/>
+        </p:nvPicPr>
+        <p:blipFill rotWithShape="1">
+          <a:blip r:embed="rId4">
+            <a:alphaModFix/>
+          </a:blip>
+          <a:srcRect b="0" l="0" r="0" t="0"/>
+          <a:stretch/>
+        </p:blipFill>
+        <p:spPr>
+          <a:xfrm>
+            <a:off x="103750" y="161925"/>
+            <a:ext cx="4572000" cy="6534150"/>
+          </a:xfrm>
+          <a:prstGeom prst="rect">
+            <a:avLst/>
+          </a:prstGeom>
+          <a:noFill/>
+          <a:ln>
+            <a:noFill/>
+          </a:ln>
+        </p:spPr>
+      </p:pic>
+      <p:sp>
+        <p:nvSpPr>
+          <p:cNvPr id="250" name="Google Shape;250;g3cd5945c579_0_130"/>
+          <p:cNvSpPr txBox="1"/>
+          <p:nvPr/>
+        </p:nvSpPr>
+        <p:spPr>
+          <a:xfrm>
+            <a:off x="4967900" y="243200"/>
+            <a:ext cx="5343600" cy="778200"/>
+          </a:xfrm>
+          <a:prstGeom prst="rect">
+            <a:avLst/>
+          </a:prstGeom>
+          <a:noFill/>
+          <a:ln>
+            <a:noFill/>
+          </a:ln>
+        </p:spPr>
+        <p:txBody>
+          <a:bodyPr anchorCtr="0" anchor="t" bIns="91425" lIns="91425" spcFirstLastPara="1" rIns="91425" wrap="square" tIns="91425">
+            <a:noAutofit/>
+          </a:bodyPr>
+          <a:lstStyle/>
+          <a:p>
+            <a:pPr indent="0" lvl="0" marL="0" marR="0" rtl="0" algn="l">
+              <a:lnSpc>
+                <a:spcPct val="100000"/>
+              </a:lnSpc>
+              <a:spcBef>
+                <a:spcPts val="0"/>
+              </a:spcBef>
+              <a:spcAft>
+                <a:spcPts val="0"/>
+              </a:spcAft>
+              <a:buClr>
+                <a:srgbClr val="000000"/>
+              </a:buClr>
+              <a:buSzPts val="3000"/>
+              <a:buFont typeface="Arial"/>
+              <a:buNone/>
+            </a:pPr>
+            <a:r>
+              <a:rPr b="0" i="0" lang="en-US" sz="3000" u="none" cap="none" strike="noStrike">
+                <a:solidFill>
+                  <a:schemeClr val="lt1"/>
+                </a:solidFill>
+                <a:latin typeface="Century Gothic"/>
+                <a:ea typeface="Century Gothic"/>
+                <a:cs typeface="Century Gothic"/>
+                <a:sym typeface="Century Gothic"/>
+              </a:rPr>
+              <a:t>Text and JSON Feature tools</a:t>
+            </a:r>
+            <a:endParaRPr b="0" i="0" sz="3000" u="none" cap="none" strike="noStrike">
+              <a:solidFill>
+                <a:schemeClr val="lt1"/>
+              </a:solidFill>
+              <a:latin typeface="Century Gothic"/>
+              <a:ea typeface="Century Gothic"/>
+              <a:cs typeface="Century Gothic"/>
+              <a:sym typeface="Century Gothic"/>
+            </a:endParaRPr>
+          </a:p>
+        </p:txBody>
+      </p:sp>
+      <p:pic>
+        <p:nvPicPr>
+          <p:cNvPr id="251" name="Google Shape;251;g3cd5945c579_0_130" title="UI_Web_Site.png"/>
+          <p:cNvPicPr preferRelativeResize="0"/>
+          <p:nvPr/>
+        </p:nvPicPr>
+        <p:blipFill>
+          <a:blip r:embed="rId5">
+            <a:alphaModFix/>
+          </a:blip>
+          <a:stretch>
+            <a:fillRect/>
+          </a:stretch>
+        </p:blipFill>
+        <p:spPr>
+          <a:xfrm>
+            <a:off x="10436875" y="5952450"/>
+            <a:ext cx="1571625" cy="619125"/>
+          </a:xfrm>
+          <a:prstGeom prst="rect">
+            <a:avLst/>
+          </a:prstGeom>
+          <a:noFill/>
+          <a:ln>
+            <a:noFill/>
+          </a:ln>
+        </p:spPr>
+      </p:pic>
+    </p:spTree>
+  </p:cSld>
+  <p:clrMapOvr>
+    <a:masterClrMapping/>
+  </p:clrMapOvr>
+</p:sld>
+</file>
+
+<file path=ppt/slides/slide13.xml><?xml version="1.0" encoding="utf-8"?>
+<p:sld xmlns:a="http://schemas.openxmlformats.org/drawingml/2006/main" xmlns:r="http://schemas.openxmlformats.org/officeDocument/2006/relationships" xmlns:mc="http://schemas.openxmlformats.org/markup-compatibility/2006" xmlns:mv="urn:schemas-microsoft-com:mac:vml" xmlns:p="http://schemas.openxmlformats.org/presentationml/2006/main" xmlns:c="http://schemas.openxmlformats.org/drawingml/2006/chart" xmlns:dgm="http://schemas.openxmlformats.org/drawingml/2006/diagram" xmlns:o="urn:schemas-microsoft-com:office:office" xmlns:v="urn:schemas-microsoft-com:vml" xmlns:pvml="urn:schemas-microsoft-com:office:powerpoint" xmlns:com="http://schemas.openxmlformats.org/drawingml/2006/compatibility" xmlns:p14="http://schemas.microsoft.com/office/powerpoint/2010/main" xmlns:p15="http://schemas.microsoft.com/office/powerpoint/2012/main" xmlns:ahyp="http://schemas.microsoft.com/office/drawing/2018/hyperlinkcolor">
+  <p:cSld>
+    <p:spTree>
+      <p:nvGrpSpPr>
+        <p:cNvPr id="256" name="Shape 256"/>
+        <p:cNvGrpSpPr/>
+        <p:nvPr/>
+      </p:nvGrpSpPr>
+      <p:grpSpPr>
+        <a:xfrm>
+          <a:off x="0" y="0"/>
+          <a:ext cx="0" cy="0"/>
+          <a:chOff x="0" y="0"/>
+          <a:chExt cx="0" cy="0"/>
+        </a:xfrm>
+      </p:grpSpPr>
+      <p:pic>
+        <p:nvPicPr>
+          <p:cNvPr id="257" name="Google Shape;257;g3cd5945c579_0_121" title="skol_metrics.png"/>
+          <p:cNvPicPr preferRelativeResize="0"/>
+          <p:nvPr/>
+        </p:nvPicPr>
+        <p:blipFill rotWithShape="1">
+          <a:blip r:embed="rId3">
+            <a:alphaModFix/>
+          </a:blip>
+          <a:srcRect b="0" l="0" r="0" t="0"/>
+          <a:stretch/>
+        </p:blipFill>
+        <p:spPr>
+          <a:xfrm>
+            <a:off x="3907388" y="1459275"/>
+            <a:ext cx="4377225" cy="4934175"/>
+          </a:xfrm>
+          <a:prstGeom prst="rect">
+            <a:avLst/>
+          </a:prstGeom>
+          <a:noFill/>
+          <a:ln>
+            <a:noFill/>
+          </a:ln>
+        </p:spPr>
+      </p:pic>
+      <p:sp>
+        <p:nvSpPr>
+          <p:cNvPr id="258" name="Google Shape;258;g3cd5945c579_0_121"/>
+          <p:cNvSpPr txBox="1"/>
+          <p:nvPr/>
+        </p:nvSpPr>
+        <p:spPr>
+          <a:xfrm>
+            <a:off x="1616550" y="210100"/>
+            <a:ext cx="7132800" cy="837000"/>
+          </a:xfrm>
+          <a:prstGeom prst="rect">
+            <a:avLst/>
+          </a:prstGeom>
+          <a:noFill/>
+          <a:ln>
+            <a:noFill/>
+          </a:ln>
+        </p:spPr>
+        <p:txBody>
+          <a:bodyPr anchorCtr="0" anchor="t" bIns="91425" lIns="91425" spcFirstLastPara="1" rIns="91425" wrap="square" tIns="91425">
+            <a:noAutofit/>
+          </a:bodyPr>
+          <a:lstStyle/>
+          <a:p>
+            <a:pPr indent="0" lvl="0" marL="0" marR="0" rtl="0" algn="l">
+              <a:lnSpc>
+                <a:spcPct val="100000"/>
+              </a:lnSpc>
+              <a:spcBef>
+                <a:spcPts val="0"/>
+              </a:spcBef>
+              <a:spcAft>
+                <a:spcPts val="0"/>
+              </a:spcAft>
+              <a:buClr>
+                <a:srgbClr val="000000"/>
+              </a:buClr>
+              <a:buSzPts val="3000"/>
+              <a:buFont typeface="Arial"/>
+              <a:buNone/>
+            </a:pPr>
+            <a:r>
+              <a:rPr b="0" i="0" lang="en-US" sz="3000" u="none" cap="none" strike="noStrike">
+                <a:solidFill>
+                  <a:schemeClr val="lt1"/>
+                </a:solidFill>
+                <a:latin typeface="Century Gothic"/>
+                <a:ea typeface="Century Gothic"/>
+                <a:cs typeface="Century Gothic"/>
+                <a:sym typeface="Century Gothic"/>
+              </a:rPr>
+              <a:t>Metrics Description Tool</a:t>
+            </a:r>
+            <a:endParaRPr b="0" i="0" sz="3000" u="none" cap="none" strike="noStrike">
+              <a:solidFill>
+                <a:schemeClr val="lt1"/>
+              </a:solidFill>
+              <a:latin typeface="Century Gothic"/>
+              <a:ea typeface="Century Gothic"/>
+              <a:cs typeface="Century Gothic"/>
+              <a:sym typeface="Century Gothic"/>
+            </a:endParaRPr>
+          </a:p>
+        </p:txBody>
+      </p:sp>
+      <p:pic>
+        <p:nvPicPr>
+          <p:cNvPr id="259" name="Google Shape;259;g3cd5945c579_0_121" title="UI_Web_Site.png"/>
+          <p:cNvPicPr preferRelativeResize="0"/>
+          <p:nvPr/>
+        </p:nvPicPr>
+        <p:blipFill>
+          <a:blip r:embed="rId4">
+            <a:alphaModFix/>
+          </a:blip>
+          <a:stretch>
+            <a:fillRect/>
+          </a:stretch>
+        </p:blipFill>
+        <p:spPr>
+          <a:xfrm>
+            <a:off x="10436875" y="5952450"/>
+            <a:ext cx="1571625" cy="619125"/>
+          </a:xfrm>
+          <a:prstGeom prst="rect">
+            <a:avLst/>
+          </a:prstGeom>
+          <a:noFill/>
+          <a:ln>
+            <a:noFill/>
+          </a:ln>
+        </p:spPr>
+      </p:pic>
+    </p:spTree>
+  </p:cSld>
+  <p:clrMapOvr>
+    <a:masterClrMapping/>
+  </p:clrMapOvr>
+</p:sld>
+</file>
+
+<file path=ppt/slides/slide14.xml><?xml version="1.0" encoding="utf-8"?>
+<p:sld xmlns:a="http://schemas.openxmlformats.org/drawingml/2006/main" xmlns:r="http://schemas.openxmlformats.org/officeDocument/2006/relationships" xmlns:mc="http://schemas.openxmlformats.org/markup-compatibility/2006" xmlns:mv="urn:schemas-microsoft-com:mac:vml" xmlns:p="http://schemas.openxmlformats.org/presentationml/2006/main" xmlns:c="http://schemas.openxmlformats.org/drawingml/2006/chart" xmlns:dgm="http://schemas.openxmlformats.org/drawingml/2006/diagram" xmlns:o="urn:schemas-microsoft-com:office:office" xmlns:v="urn:schemas-microsoft-com:vml" xmlns:pvml="urn:schemas-microsoft-com:office:powerpoint" xmlns:com="http://schemas.openxmlformats.org/drawingml/2006/compatibility" xmlns:p14="http://schemas.microsoft.com/office/powerpoint/2010/main" xmlns:p15="http://schemas.microsoft.com/office/powerpoint/2012/main" xmlns:ahyp="http://schemas.microsoft.com/office/drawing/2018/hyperlinkcolor">
+  <p:cSld>
+    <p:spTree>
+      <p:nvGrpSpPr>
+        <p:cNvPr id="264" name="Shape 264"/>
+        <p:cNvGrpSpPr/>
+        <p:nvPr/>
+      </p:nvGrpSpPr>
+      <p:grpSpPr>
+        <a:xfrm>
+          <a:off x="0" y="0"/>
+          <a:ext cx="0" cy="0"/>
+          <a:chOff x="0" y="0"/>
+          <a:chExt cx="0" cy="0"/>
+        </a:xfrm>
+      </p:grpSpPr>
+      <p:pic>
+        <p:nvPicPr>
+          <p:cNvPr id="265" name="Google Shape;265;g3cdd6918556_0_6" title="skol_settings.png"/>
+          <p:cNvPicPr preferRelativeResize="0"/>
+          <p:nvPr/>
+        </p:nvPicPr>
+        <p:blipFill rotWithShape="1">
+          <a:blip r:embed="rId3">
+            <a:alphaModFix/>
+          </a:blip>
+          <a:srcRect b="0" l="0" r="0" t="0"/>
+          <a:stretch/>
+        </p:blipFill>
+        <p:spPr>
+          <a:xfrm>
+            <a:off x="7334650" y="152400"/>
+            <a:ext cx="2358932" cy="6553200"/>
+          </a:xfrm>
+          <a:prstGeom prst="rect">
+            <a:avLst/>
+          </a:prstGeom>
+          <a:noFill/>
+          <a:ln>
+            <a:noFill/>
+          </a:ln>
+        </p:spPr>
+      </p:pic>
+      <p:sp>
+        <p:nvSpPr>
+          <p:cNvPr id="266" name="Google Shape;266;g3cdd6918556_0_6"/>
+          <p:cNvSpPr txBox="1"/>
+          <p:nvPr/>
+        </p:nvSpPr>
+        <p:spPr>
+          <a:xfrm>
+            <a:off x="1021400" y="405325"/>
+            <a:ext cx="6079800" cy="859200"/>
+          </a:xfrm>
+          <a:prstGeom prst="rect">
+            <a:avLst/>
+          </a:prstGeom>
+          <a:noFill/>
+          <a:ln>
+            <a:noFill/>
+          </a:ln>
+        </p:spPr>
+        <p:txBody>
+          <a:bodyPr anchorCtr="0" anchor="t" bIns="91425" lIns="91425" spcFirstLastPara="1" rIns="91425" wrap="square" tIns="91425">
+            <a:noAutofit/>
+          </a:bodyPr>
+          <a:lstStyle/>
+          <a:p>
+            <a:pPr indent="0" lvl="0" marL="0" marR="0" rtl="0" algn="l">
+              <a:lnSpc>
+                <a:spcPct val="100000"/>
+              </a:lnSpc>
+              <a:spcBef>
+                <a:spcPts val="0"/>
+              </a:spcBef>
+              <a:spcAft>
+                <a:spcPts val="0"/>
+              </a:spcAft>
+              <a:buClr>
+                <a:srgbClr val="000000"/>
+              </a:buClr>
+              <a:buSzPts val="3000"/>
+              <a:buFont typeface="Arial"/>
+              <a:buNone/>
+            </a:pPr>
+            <a:r>
+              <a:rPr b="0" i="0" lang="en-US" sz="3000" u="none" cap="none" strike="noStrike">
+                <a:solidFill>
+                  <a:schemeClr val="lt1"/>
+                </a:solidFill>
+                <a:latin typeface="Century Gothic"/>
+                <a:ea typeface="Century Gothic"/>
+                <a:cs typeface="Century Gothic"/>
+                <a:sym typeface="Century Gothic"/>
+              </a:rPr>
+              <a:t>Account and Settings</a:t>
+            </a:r>
+            <a:endParaRPr b="0" i="0" sz="3000" u="none" cap="none" strike="noStrike">
+              <a:solidFill>
+                <a:schemeClr val="lt1"/>
+              </a:solidFill>
+              <a:latin typeface="Century Gothic"/>
+              <a:ea typeface="Century Gothic"/>
+              <a:cs typeface="Century Gothic"/>
+              <a:sym typeface="Century Gothic"/>
+            </a:endParaRPr>
+          </a:p>
+        </p:txBody>
+      </p:sp>
+      <p:pic>
+        <p:nvPicPr>
+          <p:cNvPr id="267" name="Google Shape;267;g3cdd6918556_0_6" title="skol_accounts.png"/>
+          <p:cNvPicPr preferRelativeResize="0"/>
+          <p:nvPr/>
+        </p:nvPicPr>
+        <p:blipFill rotWithShape="1">
+          <a:blip r:embed="rId4">
+            <a:alphaModFix/>
+          </a:blip>
+          <a:srcRect b="0" l="0" r="0" t="0"/>
+          <a:stretch/>
+        </p:blipFill>
+        <p:spPr>
+          <a:xfrm>
+            <a:off x="2519475" y="1264525"/>
+            <a:ext cx="3244443" cy="5288674"/>
+          </a:xfrm>
+          <a:prstGeom prst="rect">
+            <a:avLst/>
+          </a:prstGeom>
+          <a:noFill/>
+          <a:ln>
+            <a:noFill/>
+          </a:ln>
+        </p:spPr>
+      </p:pic>
+      <p:pic>
+        <p:nvPicPr>
+          <p:cNvPr id="268" name="Google Shape;268;g3cdd6918556_0_6" title="UI_Web_Site.png"/>
+          <p:cNvPicPr preferRelativeResize="0"/>
+          <p:nvPr/>
+        </p:nvPicPr>
+        <p:blipFill>
+          <a:blip r:embed="rId5">
+            <a:alphaModFix/>
+          </a:blip>
+          <a:stretch>
+            <a:fillRect/>
+          </a:stretch>
+        </p:blipFill>
+        <p:spPr>
+          <a:xfrm>
+            <a:off x="10436875" y="5952450"/>
+            <a:ext cx="1571625" cy="619125"/>
+          </a:xfrm>
+          <a:prstGeom prst="rect">
+            <a:avLst/>
+          </a:prstGeom>
+          <a:noFill/>
+          <a:ln>
+            <a:noFill/>
+          </a:ln>
+        </p:spPr>
+      </p:pic>
+    </p:spTree>
+  </p:cSld>
+  <p:clrMapOvr>
+    <a:masterClrMapping/>
+  </p:clrMapOvr>
+</p:sld>
+</file>
+
+<file path=ppt/slides/slide15.xml><?xml version="1.0" encoding="utf-8"?>
+<p:sld xmlns:a="http://schemas.openxmlformats.org/drawingml/2006/main" xmlns:r="http://schemas.openxmlformats.org/officeDocument/2006/relationships" xmlns:mc="http://schemas.openxmlformats.org/markup-compatibility/2006" xmlns:mv="urn:schemas-microsoft-com:mac:vml" xmlns:p="http://schemas.openxmlformats.org/presentationml/2006/main" xmlns:c="http://schemas.openxmlformats.org/drawingml/2006/chart" xmlns:dgm="http://schemas.openxmlformats.org/drawingml/2006/diagram" xmlns:o="urn:schemas-microsoft-com:office:office" xmlns:v="urn:schemas-microsoft-com:vml" xmlns:pvml="urn:schemas-microsoft-com:office:powerpoint" xmlns:com="http://schemas.openxmlformats.org/drawingml/2006/compatibility" xmlns:p14="http://schemas.microsoft.com/office/powerpoint/2010/main" xmlns:p15="http://schemas.microsoft.com/office/powerpoint/2012/main" xmlns:ahyp="http://schemas.microsoft.com/office/drawing/2018/hyperlinkcolor">
+  <p:cSld>
     <p:bg>
       <p:bgPr>
         <a:blipFill>
@@ -25246,7 +28752,7 @@
     </p:bg>
     <p:spTree>
       <p:nvGrpSpPr>
-        <p:cNvPr id="226" name="Shape 226"/>
+        <p:cNvPr id="273" name="Shape 273"/>
         <p:cNvGrpSpPr/>
         <p:nvPr/>
       </p:nvGrpSpPr>
@@ -25260,7 +28766,7 @@
       </p:grpSpPr>
       <p:pic>
         <p:nvPicPr>
-          <p:cNvPr id="227" name="Google Shape;227;g3cd5945c579_0_79"/>
+          <p:cNvPr id="274" name="Google Shape;274;g3cd5945c579_0_79"/>
           <p:cNvPicPr preferRelativeResize="0"/>
           <p:nvPr/>
         </p:nvPicPr>
@@ -25287,7 +28793,7 @@
       </p:pic>
       <p:pic>
         <p:nvPicPr>
-          <p:cNvPr id="228" name="Google Shape;228;g3cd5945c579_0_79"/>
+          <p:cNvPr id="275" name="Google Shape;275;g3cd5945c579_0_79"/>
           <p:cNvPicPr preferRelativeResize="0"/>
           <p:nvPr/>
         </p:nvPicPr>
@@ -25314,7 +28820,7 @@
       </p:pic>
       <p:sp>
         <p:nvSpPr>
-          <p:cNvPr id="229" name="Google Shape;229;g3cd5945c579_0_79"/>
+          <p:cNvPr id="276" name="Google Shape;276;g3cd5945c579_0_79"/>
           <p:cNvSpPr/>
           <p:nvPr/>
         </p:nvSpPr>
@@ -25398,7 +28904,7 @@
       </p:sp>
       <p:pic>
         <p:nvPicPr>
-          <p:cNvPr id="230" name="Google Shape;230;g3cd5945c579_0_79"/>
+          <p:cNvPr id="277" name="Google Shape;277;g3cd5945c579_0_79"/>
           <p:cNvPicPr preferRelativeResize="0"/>
           <p:nvPr/>
         </p:nvPicPr>
@@ -25425,7 +28931,7 @@
       </p:pic>
       <p:pic>
         <p:nvPicPr>
-          <p:cNvPr id="231" name="Google Shape;231;g3cd5945c579_0_79"/>
+          <p:cNvPr id="278" name="Google Shape;278;g3cd5945c579_0_79"/>
           <p:cNvPicPr preferRelativeResize="0"/>
           <p:nvPr/>
         </p:nvPicPr>
@@ -25452,7 +28958,7 @@
       </p:pic>
       <p:sp>
         <p:nvSpPr>
-          <p:cNvPr id="232" name="Google Shape;232;g3cd5945c579_0_79"/>
+          <p:cNvPr id="279" name="Google Shape;279;g3cd5945c579_0_79"/>
           <p:cNvSpPr/>
           <p:nvPr/>
         </p:nvSpPr>
@@ -25518,7 +29024,1117 @@
       </p:sp>
       <p:sp>
         <p:nvSpPr>
-          <p:cNvPr id="233" name="Google Shape;233;g3cd5945c579_0_79"/>
+          <p:cNvPr id="280" name="Google Shape;280;g3cd5945c579_0_79"/>
+          <p:cNvSpPr/>
+          <p:nvPr/>
+        </p:nvSpPr>
+        <p:spPr>
+          <a:xfrm>
+            <a:off x="0" y="-165200"/>
+            <a:ext cx="12192000" cy="6858000"/>
+          </a:xfrm>
+          <a:prstGeom prst="rect">
+            <a:avLst/>
+          </a:prstGeom>
+          <a:blipFill rotWithShape="1">
+            <a:blip r:embed="rId3">
+              <a:alphaModFix/>
+            </a:blip>
+            <a:stretch>
+              <a:fillRect b="0" l="0" r="0" t="0"/>
+            </a:stretch>
+          </a:blipFill>
+          <a:ln>
+            <a:noFill/>
+          </a:ln>
+        </p:spPr>
+        <p:txBody>
+          <a:bodyPr anchorCtr="0" anchor="ctr" bIns="45700" lIns="91425" spcFirstLastPara="1" rIns="91425" wrap="square" tIns="45700">
+            <a:noAutofit/>
+          </a:bodyPr>
+          <a:lstStyle/>
+          <a:p>
+            <a:pPr indent="0" lvl="0" marL="0" marR="0" rtl="0" algn="ctr">
+              <a:lnSpc>
+                <a:spcPct val="100000"/>
+              </a:lnSpc>
+              <a:spcBef>
+                <a:spcPts val="0"/>
+              </a:spcBef>
+              <a:spcAft>
+                <a:spcPts val="0"/>
+              </a:spcAft>
+              <a:buClr>
+                <a:schemeClr val="lt1"/>
+              </a:buClr>
+              <a:buSzPts val="1800"/>
+              <a:buFont typeface="Century Gothic"/>
+              <a:buNone/>
+            </a:pPr>
+            <a:r>
+              <a:t/>
+            </a:r>
+            <a:endParaRPr b="0" i="0" sz="1800" u="none" cap="none" strike="noStrike">
+              <a:solidFill>
+                <a:srgbClr val="FFFFFF"/>
+              </a:solidFill>
+              <a:latin typeface="Century Gothic"/>
+              <a:ea typeface="Century Gothic"/>
+              <a:cs typeface="Century Gothic"/>
+              <a:sym typeface="Century Gothic"/>
+            </a:endParaRPr>
+          </a:p>
+        </p:txBody>
+      </p:sp>
+      <p:sp>
+        <p:nvSpPr>
+          <p:cNvPr id="281" name="Google Shape;281;g3cd5945c579_0_79"/>
+          <p:cNvSpPr txBox="1"/>
+          <p:nvPr>
+            <p:ph type="ctrTitle"/>
+          </p:nvPr>
+        </p:nvSpPr>
+        <p:spPr>
+          <a:xfrm>
+            <a:off x="648925" y="629275"/>
+            <a:ext cx="11202600" cy="1429800"/>
+          </a:xfrm>
+          <a:prstGeom prst="rect">
+            <a:avLst/>
+          </a:prstGeom>
+          <a:noFill/>
+          <a:ln>
+            <a:noFill/>
+          </a:ln>
+        </p:spPr>
+        <p:txBody>
+          <a:bodyPr anchorCtr="0" anchor="t" bIns="45700" lIns="91425" spcFirstLastPara="1" rIns="91425" wrap="square" tIns="45700">
+            <a:normAutofit fontScale="90000"/>
+          </a:bodyPr>
+          <a:lstStyle/>
+          <a:p>
+            <a:pPr indent="0" lvl="0" marL="0" rtl="0" algn="l">
+              <a:lnSpc>
+                <a:spcPct val="100000"/>
+              </a:lnSpc>
+              <a:spcBef>
+                <a:spcPts val="0"/>
+              </a:spcBef>
+              <a:spcAft>
+                <a:spcPts val="0"/>
+              </a:spcAft>
+              <a:buClr>
+                <a:srgbClr val="EBEBEB"/>
+              </a:buClr>
+              <a:buSzPct val="67741"/>
+              <a:buFont typeface="Century Gothic"/>
+              <a:buNone/>
+            </a:pPr>
+            <a:r>
+              <a:rPr lang="en-US" sz="5580"/>
+              <a:t>Future</a:t>
+            </a:r>
+            <a:endParaRPr sz="5280"/>
+          </a:p>
+          <a:p>
+            <a:pPr indent="0" lvl="0" marL="0" rtl="0" algn="l">
+              <a:lnSpc>
+                <a:spcPct val="100000"/>
+              </a:lnSpc>
+              <a:spcBef>
+                <a:spcPts val="0"/>
+              </a:spcBef>
+              <a:spcAft>
+                <a:spcPts val="0"/>
+              </a:spcAft>
+              <a:buClr>
+                <a:srgbClr val="EBEBEB"/>
+              </a:buClr>
+              <a:buSzPct val="58333"/>
+              <a:buFont typeface="Century Gothic"/>
+              <a:buNone/>
+            </a:pPr>
+            <a:r>
+              <a:t/>
+            </a:r>
+            <a:endParaRPr sz="6480"/>
+          </a:p>
+        </p:txBody>
+      </p:sp>
+      <p:sp>
+        <p:nvSpPr>
+          <p:cNvPr id="282" name="Google Shape;282;g3cd5945c579_0_79"/>
+          <p:cNvSpPr/>
+          <p:nvPr/>
+        </p:nvSpPr>
+        <p:spPr>
+          <a:xfrm>
+            <a:off x="7015974" y="-1"/>
+            <a:ext cx="559472" cy="3709642"/>
+          </a:xfrm>
+          <a:custGeom>
+            <a:rect b="b" l="l" r="r" t="t"/>
+            <a:pathLst>
+              <a:path extrusionOk="0" h="3709642" w="559472">
+                <a:moveTo>
+                  <a:pt x="0" y="0"/>
+                </a:moveTo>
+                <a:lnTo>
+                  <a:pt x="473952" y="0"/>
+                </a:lnTo>
+                <a:lnTo>
+                  <a:pt x="485840" y="161194"/>
+                </a:lnTo>
+                <a:cubicBezTo>
+                  <a:pt x="552063" y="1147770"/>
+                  <a:pt x="592441" y="3086737"/>
+                  <a:pt x="523949" y="3672197"/>
+                </a:cubicBezTo>
+                <a:cubicBezTo>
+                  <a:pt x="500842" y="3684557"/>
+                  <a:pt x="477855" y="3697282"/>
+                  <a:pt x="454748" y="3709642"/>
+                </a:cubicBezTo>
+                <a:lnTo>
+                  <a:pt x="448224" y="3510471"/>
+                </a:lnTo>
+                <a:lnTo>
+                  <a:pt x="443564" y="3408563"/>
+                </a:lnTo>
+                <a:lnTo>
+                  <a:pt x="438902" y="3304407"/>
+                </a:lnTo>
+                <a:lnTo>
+                  <a:pt x="433941" y="3198777"/>
+                </a:lnTo>
+                <a:lnTo>
+                  <a:pt x="427584" y="3092510"/>
+                </a:lnTo>
+                <a:lnTo>
+                  <a:pt x="420988" y="2984390"/>
+                </a:lnTo>
+                <a:lnTo>
+                  <a:pt x="414330" y="2874401"/>
+                </a:lnTo>
+                <a:lnTo>
+                  <a:pt x="406840" y="2762980"/>
+                </a:lnTo>
+                <a:lnTo>
+                  <a:pt x="397745" y="2650566"/>
+                </a:lnTo>
+                <a:lnTo>
+                  <a:pt x="389154" y="2536612"/>
+                </a:lnTo>
+                <a:lnTo>
+                  <a:pt x="379225" y="2421642"/>
+                </a:lnTo>
+                <a:lnTo>
+                  <a:pt x="368316" y="2305627"/>
+                </a:lnTo>
+                <a:lnTo>
+                  <a:pt x="357466" y="2189233"/>
+                </a:lnTo>
+                <a:lnTo>
+                  <a:pt x="344982" y="2071473"/>
+                </a:lnTo>
+                <a:lnTo>
+                  <a:pt x="332466" y="1952216"/>
+                </a:lnTo>
+                <a:lnTo>
+                  <a:pt x="319121" y="1833776"/>
+                </a:lnTo>
+                <a:lnTo>
+                  <a:pt x="304408" y="1713948"/>
+                </a:lnTo>
+                <a:lnTo>
+                  <a:pt x="288685" y="1592703"/>
+                </a:lnTo>
+                <a:lnTo>
+                  <a:pt x="273050" y="1471451"/>
+                </a:lnTo>
+                <a:lnTo>
+                  <a:pt x="255813" y="1350328"/>
+                </a:lnTo>
+                <a:lnTo>
+                  <a:pt x="237060" y="1227080"/>
+                </a:lnTo>
+                <a:lnTo>
+                  <a:pt x="218488" y="1106065"/>
+                </a:lnTo>
+                <a:lnTo>
+                  <a:pt x="198221" y="982940"/>
+                </a:lnTo>
+                <a:lnTo>
+                  <a:pt x="177152" y="858755"/>
+                </a:lnTo>
+                <a:lnTo>
+                  <a:pt x="155551" y="736861"/>
+                </a:lnTo>
+                <a:lnTo>
+                  <a:pt x="131782" y="613645"/>
+                </a:lnTo>
+                <a:lnTo>
+                  <a:pt x="107123" y="490500"/>
+                </a:lnTo>
+                <a:lnTo>
+                  <a:pt x="82552" y="367348"/>
+                </a:lnTo>
+                <a:lnTo>
+                  <a:pt x="55608" y="244762"/>
+                </a:lnTo>
+                <a:lnTo>
+                  <a:pt x="28130" y="122220"/>
+                </a:lnTo>
+                <a:lnTo>
+                  <a:pt x="0" y="0"/>
+                </a:lnTo>
+                <a:close/>
+              </a:path>
+            </a:pathLst>
+          </a:custGeom>
+          <a:solidFill>
+            <a:schemeClr val="lt1">
+              <a:alpha val="20000"/>
+            </a:schemeClr>
+          </a:solidFill>
+          <a:ln>
+            <a:noFill/>
+          </a:ln>
+        </p:spPr>
+        <p:txBody>
+          <a:bodyPr anchorCtr="0" anchor="ctr" bIns="45700" lIns="91425" spcFirstLastPara="1" rIns="91425" wrap="square" tIns="45700">
+            <a:noAutofit/>
+          </a:bodyPr>
+          <a:lstStyle/>
+          <a:p>
+            <a:pPr indent="0" lvl="0" marL="0" marR="0" rtl="0" algn="ctr">
+              <a:lnSpc>
+                <a:spcPct val="100000"/>
+              </a:lnSpc>
+              <a:spcBef>
+                <a:spcPts val="0"/>
+              </a:spcBef>
+              <a:spcAft>
+                <a:spcPts val="0"/>
+              </a:spcAft>
+              <a:buClr>
+                <a:schemeClr val="lt1"/>
+              </a:buClr>
+              <a:buSzPts val="1800"/>
+              <a:buFont typeface="Century Gothic"/>
+              <a:buNone/>
+            </a:pPr>
+            <a:r>
+              <a:t/>
+            </a:r>
+            <a:endParaRPr b="0" i="0" sz="1800" u="none" cap="none" strike="noStrike">
+              <a:solidFill>
+                <a:srgbClr val="FFFFFF"/>
+              </a:solidFill>
+              <a:latin typeface="Century Gothic"/>
+              <a:ea typeface="Century Gothic"/>
+              <a:cs typeface="Century Gothic"/>
+              <a:sym typeface="Century Gothic"/>
+            </a:endParaRPr>
+          </a:p>
+        </p:txBody>
+      </p:sp>
+      <p:pic>
+        <p:nvPicPr>
+          <p:cNvPr id="283" name="Google Shape;283;g3cd5945c579_0_79"/>
+          <p:cNvPicPr preferRelativeResize="0"/>
+          <p:nvPr/>
+        </p:nvPicPr>
+        <p:blipFill rotWithShape="1">
+          <a:blip r:embed="rId8">
+            <a:alphaModFix/>
+          </a:blip>
+          <a:srcRect b="0" l="27006" r="32286" t="0"/>
+          <a:stretch/>
+        </p:blipFill>
+        <p:spPr>
+          <a:xfrm>
+            <a:off x="7229175" y="1"/>
+            <a:ext cx="4963245" cy="6858001"/>
+          </a:xfrm>
+          <a:custGeom>
+            <a:rect b="b" l="l" r="r" t="t"/>
+            <a:pathLst>
+              <a:path extrusionOk="0" h="6858001" w="4963245">
+                <a:moveTo>
+                  <a:pt x="1177" y="0"/>
+                </a:moveTo>
+                <a:lnTo>
+                  <a:pt x="1344715" y="0"/>
+                </a:lnTo>
+                <a:lnTo>
+                  <a:pt x="1344715" y="1"/>
+                </a:lnTo>
+                <a:lnTo>
+                  <a:pt x="4963245" y="1"/>
+                </a:lnTo>
+                <a:lnTo>
+                  <a:pt x="4963244" y="6858001"/>
+                </a:lnTo>
+                <a:lnTo>
+                  <a:pt x="900697" y="6858001"/>
+                </a:lnTo>
+                <a:lnTo>
+                  <a:pt x="900697" y="6858000"/>
+                </a:lnTo>
+                <a:lnTo>
+                  <a:pt x="0" y="6858000"/>
+                </a:lnTo>
+                <a:lnTo>
+                  <a:pt x="5883" y="6817538"/>
+                </a:lnTo>
+                <a:lnTo>
+                  <a:pt x="23196" y="6698894"/>
+                </a:lnTo>
+                <a:lnTo>
+                  <a:pt x="35299" y="6612483"/>
+                </a:lnTo>
+                <a:lnTo>
+                  <a:pt x="48073" y="6509613"/>
+                </a:lnTo>
+                <a:lnTo>
+                  <a:pt x="63369" y="6387541"/>
+                </a:lnTo>
+                <a:lnTo>
+                  <a:pt x="79506" y="6252438"/>
+                </a:lnTo>
+                <a:lnTo>
+                  <a:pt x="96483" y="6100191"/>
+                </a:lnTo>
+                <a:lnTo>
+                  <a:pt x="114469" y="5934227"/>
+                </a:lnTo>
+                <a:lnTo>
+                  <a:pt x="132454" y="5753862"/>
+                </a:lnTo>
+                <a:lnTo>
+                  <a:pt x="150776" y="5561838"/>
+                </a:lnTo>
+                <a:lnTo>
+                  <a:pt x="167753" y="5354726"/>
+                </a:lnTo>
+                <a:lnTo>
+                  <a:pt x="184058" y="5138013"/>
+                </a:lnTo>
+                <a:lnTo>
+                  <a:pt x="198849" y="4908956"/>
+                </a:lnTo>
+                <a:lnTo>
+                  <a:pt x="212969" y="4670298"/>
+                </a:lnTo>
+                <a:lnTo>
+                  <a:pt x="226248" y="4421352"/>
+                </a:lnTo>
+                <a:lnTo>
+                  <a:pt x="230955" y="4293793"/>
+                </a:lnTo>
+                <a:lnTo>
+                  <a:pt x="236165" y="4163492"/>
+                </a:lnTo>
+                <a:lnTo>
+                  <a:pt x="241040" y="4031133"/>
+                </a:lnTo>
+                <a:lnTo>
+                  <a:pt x="244234" y="3898087"/>
+                </a:lnTo>
+                <a:lnTo>
+                  <a:pt x="247091" y="3762299"/>
+                </a:lnTo>
+                <a:lnTo>
+                  <a:pt x="250117" y="3625139"/>
+                </a:lnTo>
+                <a:lnTo>
+                  <a:pt x="252134" y="3485236"/>
+                </a:lnTo>
+                <a:lnTo>
+                  <a:pt x="252134" y="3343961"/>
+                </a:lnTo>
+                <a:lnTo>
+                  <a:pt x="253142" y="3201315"/>
+                </a:lnTo>
+                <a:lnTo>
+                  <a:pt x="252134" y="3057297"/>
+                </a:lnTo>
+                <a:lnTo>
+                  <a:pt x="250117" y="2911221"/>
+                </a:lnTo>
+                <a:lnTo>
+                  <a:pt x="248268" y="2765146"/>
+                </a:lnTo>
+                <a:lnTo>
+                  <a:pt x="244234" y="2617013"/>
+                </a:lnTo>
+                <a:lnTo>
+                  <a:pt x="240032" y="2467509"/>
+                </a:lnTo>
+                <a:lnTo>
+                  <a:pt x="235157" y="2318004"/>
+                </a:lnTo>
+                <a:lnTo>
+                  <a:pt x="228266" y="2167128"/>
+                </a:lnTo>
+                <a:lnTo>
+                  <a:pt x="220029" y="2014881"/>
+                </a:lnTo>
+                <a:lnTo>
+                  <a:pt x="212129" y="1861947"/>
+                </a:lnTo>
+                <a:lnTo>
+                  <a:pt x="202044" y="1709014"/>
+                </a:lnTo>
+                <a:lnTo>
+                  <a:pt x="189941" y="1554023"/>
+                </a:lnTo>
+                <a:lnTo>
+                  <a:pt x="177839" y="1401090"/>
+                </a:lnTo>
+                <a:lnTo>
+                  <a:pt x="163887" y="1245413"/>
+                </a:lnTo>
+                <a:lnTo>
+                  <a:pt x="148591" y="1089051"/>
+                </a:lnTo>
+                <a:lnTo>
+                  <a:pt x="132455" y="934746"/>
+                </a:lnTo>
+                <a:lnTo>
+                  <a:pt x="113629" y="778383"/>
+                </a:lnTo>
+                <a:lnTo>
+                  <a:pt x="93458" y="622707"/>
+                </a:lnTo>
+                <a:lnTo>
+                  <a:pt x="73455" y="466344"/>
+                </a:lnTo>
+                <a:lnTo>
+                  <a:pt x="50091" y="310668"/>
+                </a:lnTo>
+                <a:lnTo>
+                  <a:pt x="26222" y="155677"/>
+                </a:lnTo>
+                <a:close/>
+              </a:path>
+            </a:pathLst>
+          </a:custGeom>
+          <a:noFill/>
+          <a:ln>
+            <a:noFill/>
+          </a:ln>
+        </p:spPr>
+      </p:pic>
+      <p:sp>
+        <p:nvSpPr>
+          <p:cNvPr id="284" name="Google Shape;284;g3cd5945c579_0_79"/>
+          <p:cNvSpPr txBox="1"/>
+          <p:nvPr/>
+        </p:nvSpPr>
+        <p:spPr>
+          <a:xfrm>
+            <a:off x="779600" y="1770575"/>
+            <a:ext cx="6449700" cy="3509400"/>
+          </a:xfrm>
+          <a:prstGeom prst="rect">
+            <a:avLst/>
+          </a:prstGeom>
+          <a:noFill/>
+          <a:ln>
+            <a:noFill/>
+          </a:ln>
+        </p:spPr>
+        <p:txBody>
+          <a:bodyPr anchorCtr="0" anchor="t" bIns="91425" lIns="91425" spcFirstLastPara="1" rIns="91425" wrap="square" tIns="91425">
+            <a:spAutoFit/>
+          </a:bodyPr>
+          <a:lstStyle/>
+          <a:p>
+            <a:pPr indent="-381000" lvl="0" marL="457200" rtl="0" algn="l">
+              <a:spcBef>
+                <a:spcPts val="0"/>
+              </a:spcBef>
+              <a:spcAft>
+                <a:spcPts val="0"/>
+              </a:spcAft>
+              <a:buClr>
+                <a:schemeClr val="lt1"/>
+              </a:buClr>
+              <a:buSzPts val="2400"/>
+              <a:buFont typeface="Century Gothic"/>
+              <a:buChar char="●"/>
+            </a:pPr>
+            <a:r>
+              <a:rPr lang="en-US" sz="2400">
+                <a:solidFill>
+                  <a:schemeClr val="lt1"/>
+                </a:solidFill>
+                <a:latin typeface="Century Gothic"/>
+                <a:ea typeface="Century Gothic"/>
+                <a:cs typeface="Century Gothic"/>
+                <a:sym typeface="Century Gothic"/>
+              </a:rPr>
+              <a:t>Currently in alpha-test</a:t>
+            </a:r>
+            <a:endParaRPr sz="2400">
+              <a:solidFill>
+                <a:schemeClr val="lt1"/>
+              </a:solidFill>
+              <a:latin typeface="Century Gothic"/>
+              <a:ea typeface="Century Gothic"/>
+              <a:cs typeface="Century Gothic"/>
+              <a:sym typeface="Century Gothic"/>
+            </a:endParaRPr>
+          </a:p>
+          <a:p>
+            <a:pPr indent="-381000" lvl="0" marL="457200" rtl="0" algn="l">
+              <a:spcBef>
+                <a:spcPts val="0"/>
+              </a:spcBef>
+              <a:spcAft>
+                <a:spcPts val="0"/>
+              </a:spcAft>
+              <a:buClr>
+                <a:schemeClr val="lt1"/>
+              </a:buClr>
+              <a:buSzPts val="2400"/>
+              <a:buFont typeface="Century Gothic"/>
+              <a:buChar char="●"/>
+            </a:pPr>
+            <a:r>
+              <a:rPr lang="en-US" sz="2400">
+                <a:solidFill>
+                  <a:schemeClr val="lt1"/>
+                </a:solidFill>
+                <a:latin typeface="Century Gothic"/>
+                <a:ea typeface="Century Gothic"/>
+                <a:cs typeface="Century Gothic"/>
+                <a:sym typeface="Century Gothic"/>
+              </a:rPr>
+              <a:t>Data quality project, especially for older material</a:t>
+            </a:r>
+            <a:endParaRPr sz="2400">
+              <a:solidFill>
+                <a:schemeClr val="lt1"/>
+              </a:solidFill>
+              <a:latin typeface="Century Gothic"/>
+              <a:ea typeface="Century Gothic"/>
+              <a:cs typeface="Century Gothic"/>
+              <a:sym typeface="Century Gothic"/>
+            </a:endParaRPr>
+          </a:p>
+          <a:p>
+            <a:pPr indent="-381000" lvl="0" marL="457200" rtl="0" algn="l">
+              <a:spcBef>
+                <a:spcPts val="0"/>
+              </a:spcBef>
+              <a:spcAft>
+                <a:spcPts val="0"/>
+              </a:spcAft>
+              <a:buClr>
+                <a:schemeClr val="lt1"/>
+              </a:buClr>
+              <a:buSzPts val="2400"/>
+              <a:buFont typeface="Century Gothic"/>
+              <a:buChar char="●"/>
+            </a:pPr>
+            <a:r>
+              <a:rPr lang="en-US" sz="2400">
+                <a:solidFill>
+                  <a:schemeClr val="lt1"/>
+                </a:solidFill>
+                <a:latin typeface="Century Gothic"/>
+                <a:ea typeface="Century Gothic"/>
+                <a:cs typeface="Century Gothic"/>
+                <a:sym typeface="Century Gothic"/>
+              </a:rPr>
+              <a:t>Glossary tools</a:t>
+            </a:r>
+            <a:endParaRPr sz="2400">
+              <a:solidFill>
+                <a:schemeClr val="lt1"/>
+              </a:solidFill>
+              <a:latin typeface="Century Gothic"/>
+              <a:ea typeface="Century Gothic"/>
+              <a:cs typeface="Century Gothic"/>
+              <a:sym typeface="Century Gothic"/>
+            </a:endParaRPr>
+          </a:p>
+          <a:p>
+            <a:pPr indent="-381000" lvl="0" marL="457200" rtl="0" algn="l">
+              <a:spcBef>
+                <a:spcPts val="0"/>
+              </a:spcBef>
+              <a:spcAft>
+                <a:spcPts val="0"/>
+              </a:spcAft>
+              <a:buClr>
+                <a:schemeClr val="lt1"/>
+              </a:buClr>
+              <a:buSzPts val="2400"/>
+              <a:buFont typeface="Century Gothic"/>
+              <a:buChar char="●"/>
+            </a:pPr>
+            <a:r>
+              <a:rPr lang="en-US" sz="2400">
+                <a:solidFill>
+                  <a:schemeClr val="lt1"/>
+                </a:solidFill>
+                <a:latin typeface="Century Gothic"/>
+                <a:ea typeface="Century Gothic"/>
+                <a:cs typeface="Century Gothic"/>
+                <a:sym typeface="Century Gothic"/>
+              </a:rPr>
+              <a:t>Better multi-language support</a:t>
+            </a:r>
+            <a:endParaRPr sz="2400">
+              <a:solidFill>
+                <a:schemeClr val="lt1"/>
+              </a:solidFill>
+              <a:latin typeface="Century Gothic"/>
+              <a:ea typeface="Century Gothic"/>
+              <a:cs typeface="Century Gothic"/>
+              <a:sym typeface="Century Gothic"/>
+            </a:endParaRPr>
+          </a:p>
+          <a:p>
+            <a:pPr indent="-381000" lvl="0" marL="457200" rtl="0" algn="l">
+              <a:spcBef>
+                <a:spcPts val="0"/>
+              </a:spcBef>
+              <a:spcAft>
+                <a:spcPts val="0"/>
+              </a:spcAft>
+              <a:buClr>
+                <a:schemeClr val="lt1"/>
+              </a:buClr>
+              <a:buSzPts val="2400"/>
+              <a:buFont typeface="Century Gothic"/>
+              <a:buChar char="●"/>
+            </a:pPr>
+            <a:r>
+              <a:rPr lang="en-US" sz="2400">
+                <a:solidFill>
+                  <a:schemeClr val="lt1"/>
+                </a:solidFill>
+                <a:latin typeface="Century Gothic"/>
+                <a:ea typeface="Century Gothic"/>
+                <a:cs typeface="Century Gothic"/>
+                <a:sym typeface="Century Gothic"/>
+              </a:rPr>
+              <a:t>More journals and books</a:t>
+            </a:r>
+            <a:endParaRPr sz="2400">
+              <a:solidFill>
+                <a:schemeClr val="lt1"/>
+              </a:solidFill>
+              <a:latin typeface="Century Gothic"/>
+              <a:ea typeface="Century Gothic"/>
+              <a:cs typeface="Century Gothic"/>
+              <a:sym typeface="Century Gothic"/>
+            </a:endParaRPr>
+          </a:p>
+          <a:p>
+            <a:pPr indent="-381000" lvl="0" marL="457200" rtl="0" algn="l">
+              <a:spcBef>
+                <a:spcPts val="0"/>
+              </a:spcBef>
+              <a:spcAft>
+                <a:spcPts val="0"/>
+              </a:spcAft>
+              <a:buClr>
+                <a:schemeClr val="lt1"/>
+              </a:buClr>
+              <a:buSzPts val="2400"/>
+              <a:buFont typeface="Century Gothic"/>
+              <a:buChar char="●"/>
+            </a:pPr>
+            <a:r>
+              <a:rPr lang="en-US" sz="2400">
+                <a:solidFill>
+                  <a:schemeClr val="lt1"/>
+                </a:solidFill>
+                <a:latin typeface="Century Gothic"/>
+                <a:ea typeface="Century Gothic"/>
+                <a:cs typeface="Century Gothic"/>
+                <a:sym typeface="Century Gothic"/>
+              </a:rPr>
+              <a:t>Expand to other groups of organisms</a:t>
+            </a:r>
+            <a:endParaRPr sz="2400">
+              <a:solidFill>
+                <a:schemeClr val="lt1"/>
+              </a:solidFill>
+              <a:latin typeface="Century Gothic"/>
+              <a:ea typeface="Century Gothic"/>
+              <a:cs typeface="Century Gothic"/>
+              <a:sym typeface="Century Gothic"/>
+            </a:endParaRPr>
+          </a:p>
+          <a:p>
+            <a:pPr indent="-381000" lvl="0" marL="457200" rtl="0" algn="l">
+              <a:spcBef>
+                <a:spcPts val="0"/>
+              </a:spcBef>
+              <a:spcAft>
+                <a:spcPts val="0"/>
+              </a:spcAft>
+              <a:buClr>
+                <a:schemeClr val="lt1"/>
+              </a:buClr>
+              <a:buSzPts val="2400"/>
+              <a:buFont typeface="Century Gothic"/>
+              <a:buChar char="●"/>
+            </a:pPr>
+            <a:r>
+              <a:rPr lang="en-US" sz="2400">
+                <a:solidFill>
+                  <a:schemeClr val="lt1"/>
+                </a:solidFill>
+                <a:latin typeface="Century Gothic"/>
+                <a:ea typeface="Century Gothic"/>
+                <a:cs typeface="Century Gothic"/>
+                <a:sym typeface="Century Gothic"/>
+              </a:rPr>
+              <a:t>See </a:t>
+            </a:r>
+            <a:r>
+              <a:rPr lang="en-US" sz="2400" u="sng">
+                <a:solidFill>
+                  <a:schemeClr val="hlink"/>
+                </a:solidFill>
+                <a:latin typeface="Century Gothic"/>
+                <a:ea typeface="Century Gothic"/>
+                <a:cs typeface="Century Gothic"/>
+                <a:sym typeface="Century Gothic"/>
+                <a:hlinkClick r:id="rId9"/>
+              </a:rPr>
+              <a:t>https://trello.com/b/jUkRE6zv/skol</a:t>
+            </a:r>
+            <a:r>
+              <a:rPr lang="en-US" sz="2400">
+                <a:solidFill>
+                  <a:schemeClr val="lt1"/>
+                </a:solidFill>
+                <a:latin typeface="Century Gothic"/>
+                <a:ea typeface="Century Gothic"/>
+                <a:cs typeface="Century Gothic"/>
+                <a:sym typeface="Century Gothic"/>
+              </a:rPr>
+              <a:t> for a complete backlog.</a:t>
+            </a:r>
+            <a:endParaRPr sz="2400">
+              <a:solidFill>
+                <a:schemeClr val="lt1"/>
+              </a:solidFill>
+              <a:latin typeface="Century Gothic"/>
+              <a:ea typeface="Century Gothic"/>
+              <a:cs typeface="Century Gothic"/>
+              <a:sym typeface="Century Gothic"/>
+            </a:endParaRPr>
+          </a:p>
+        </p:txBody>
+      </p:sp>
+    </p:spTree>
+  </p:cSld>
+  <p:clrMapOvr>
+    <a:masterClrMapping/>
+  </p:clrMapOvr>
+</p:sld>
+</file>
+
+<file path=ppt/slides/slide16.xml><?xml version="1.0" encoding="utf-8"?>
+<p:sld xmlns:a="http://schemas.openxmlformats.org/drawingml/2006/main" xmlns:r="http://schemas.openxmlformats.org/officeDocument/2006/relationships" xmlns:mc="http://schemas.openxmlformats.org/markup-compatibility/2006" xmlns:mv="urn:schemas-microsoft-com:mac:vml" xmlns:p="http://schemas.openxmlformats.org/presentationml/2006/main" xmlns:c="http://schemas.openxmlformats.org/drawingml/2006/chart" xmlns:dgm="http://schemas.openxmlformats.org/drawingml/2006/diagram" xmlns:o="urn:schemas-microsoft-com:office:office" xmlns:v="urn:schemas-microsoft-com:vml" xmlns:pvml="urn:schemas-microsoft-com:office:powerpoint" xmlns:com="http://schemas.openxmlformats.org/drawingml/2006/compatibility" xmlns:p14="http://schemas.microsoft.com/office/powerpoint/2010/main" xmlns:p15="http://schemas.microsoft.com/office/powerpoint/2012/main" xmlns:ahyp="http://schemas.microsoft.com/office/drawing/2018/hyperlinkcolor">
+  <p:cSld>
+    <p:bg>
+      <p:bgPr>
+        <a:blipFill>
+          <a:blip r:embed="rId3">
+            <a:alphaModFix/>
+          </a:blip>
+          <a:stretch>
+            <a:fillRect/>
+          </a:stretch>
+        </a:blipFill>
+      </p:bgPr>
+    </p:bg>
+    <p:spTree>
+      <p:nvGrpSpPr>
+        <p:cNvPr id="289" name="Shape 289"/>
+        <p:cNvGrpSpPr/>
+        <p:nvPr/>
+      </p:nvGrpSpPr>
+      <p:grpSpPr>
+        <a:xfrm>
+          <a:off x="0" y="0"/>
+          <a:ext cx="0" cy="0"/>
+          <a:chOff x="0" y="0"/>
+          <a:chExt cx="0" cy="0"/>
+        </a:xfrm>
+      </p:grpSpPr>
+      <p:pic>
+        <p:nvPicPr>
+          <p:cNvPr id="290" name="Google Shape;290;g3d18e836f13_0_0"/>
+          <p:cNvPicPr preferRelativeResize="0"/>
+          <p:nvPr/>
+        </p:nvPicPr>
+        <p:blipFill rotWithShape="1">
+          <a:blip r:embed="rId4">
+            <a:alphaModFix/>
+          </a:blip>
+          <a:srcRect b="0" l="3614" r="0" t="0"/>
+          <a:stretch/>
+        </p:blipFill>
+        <p:spPr>
+          <a:xfrm>
+            <a:off x="0" y="2669685"/>
+            <a:ext cx="4037011" cy="4188314"/>
+          </a:xfrm>
+          <a:prstGeom prst="rect">
+            <a:avLst/>
+          </a:prstGeom>
+          <a:noFill/>
+          <a:ln>
+            <a:noFill/>
+          </a:ln>
+        </p:spPr>
+      </p:pic>
+      <p:pic>
+        <p:nvPicPr>
+          <p:cNvPr id="291" name="Google Shape;291;g3d18e836f13_0_0"/>
+          <p:cNvPicPr preferRelativeResize="0"/>
+          <p:nvPr/>
+        </p:nvPicPr>
+        <p:blipFill rotWithShape="1">
+          <a:blip r:embed="rId5">
+            <a:alphaModFix/>
+          </a:blip>
+          <a:srcRect b="0" l="35642" r="0" t="0"/>
+          <a:stretch/>
+        </p:blipFill>
+        <p:spPr>
+          <a:xfrm>
+            <a:off x="0" y="2892347"/>
+            <a:ext cx="1522412" cy="2365453"/>
+          </a:xfrm>
+          <a:prstGeom prst="rect">
+            <a:avLst/>
+          </a:prstGeom>
+          <a:noFill/>
+          <a:ln>
+            <a:noFill/>
+          </a:ln>
+        </p:spPr>
+      </p:pic>
+      <p:sp>
+        <p:nvSpPr>
+          <p:cNvPr id="292" name="Google Shape;292;g3d18e836f13_0_0"/>
+          <p:cNvSpPr/>
+          <p:nvPr/>
+        </p:nvSpPr>
+        <p:spPr>
+          <a:xfrm>
+            <a:off x="8609012" y="1676400"/>
+            <a:ext cx="2819400" cy="2819400"/>
+          </a:xfrm>
+          <a:prstGeom prst="ellipse">
+            <a:avLst/>
+          </a:prstGeom>
+          <a:gradFill>
+            <a:gsLst>
+              <a:gs pos="0">
+                <a:srgbClr val="4CB9C3">
+                  <a:alpha val="6274"/>
+                </a:srgbClr>
+              </a:gs>
+              <a:gs pos="36000">
+                <a:srgbClr val="4CB9C3">
+                  <a:alpha val="5490"/>
+                </a:srgbClr>
+              </a:gs>
+              <a:gs pos="69000">
+                <a:srgbClr val="4CB9C3">
+                  <a:alpha val="0"/>
+                </a:srgbClr>
+              </a:gs>
+              <a:gs pos="100000">
+                <a:srgbClr val="4CB9C3">
+                  <a:alpha val="0"/>
+                </a:srgbClr>
+              </a:gs>
+            </a:gsLst>
+            <a:path path="circle">
+              <a:fillToRect b="50%" l="50%" r="50%" t="50%"/>
+            </a:path>
+            <a:tileRect/>
+          </a:gradFill>
+          <a:ln>
+            <a:noFill/>
+          </a:ln>
+        </p:spPr>
+        <p:txBody>
+          <a:bodyPr anchorCtr="0" anchor="t" bIns="45700" lIns="91425" spcFirstLastPara="1" rIns="91425" wrap="square" tIns="45700">
+            <a:noAutofit/>
+          </a:bodyPr>
+          <a:lstStyle/>
+          <a:p>
+            <a:pPr indent="0" lvl="0" marL="0" marR="0" rtl="0" algn="l">
+              <a:lnSpc>
+                <a:spcPct val="100000"/>
+              </a:lnSpc>
+              <a:spcBef>
+                <a:spcPts val="0"/>
+              </a:spcBef>
+              <a:spcAft>
+                <a:spcPts val="0"/>
+              </a:spcAft>
+              <a:buClr>
+                <a:schemeClr val="lt1"/>
+              </a:buClr>
+              <a:buSzPts val="1800"/>
+              <a:buFont typeface="Century Gothic"/>
+              <a:buNone/>
+            </a:pPr>
+            <a:r>
+              <a:t/>
+            </a:r>
+            <a:endParaRPr b="0" i="0" sz="1800" u="none" cap="none" strike="noStrike">
+              <a:solidFill>
+                <a:srgbClr val="FFFFFF"/>
+              </a:solidFill>
+              <a:latin typeface="Century Gothic"/>
+              <a:ea typeface="Century Gothic"/>
+              <a:cs typeface="Century Gothic"/>
+              <a:sym typeface="Century Gothic"/>
+            </a:endParaRPr>
+          </a:p>
+        </p:txBody>
+      </p:sp>
+      <p:pic>
+        <p:nvPicPr>
+          <p:cNvPr id="293" name="Google Shape;293;g3d18e836f13_0_0"/>
+          <p:cNvPicPr preferRelativeResize="0"/>
+          <p:nvPr/>
+        </p:nvPicPr>
+        <p:blipFill rotWithShape="1">
+          <a:blip r:embed="rId6">
+            <a:alphaModFix/>
+          </a:blip>
+          <a:srcRect b="0" l="0" r="0" t="28810"/>
+          <a:stretch/>
+        </p:blipFill>
+        <p:spPr>
+          <a:xfrm>
+            <a:off x="7999412" y="0"/>
+            <a:ext cx="1603387" cy="1141407"/>
+          </a:xfrm>
+          <a:prstGeom prst="rect">
+            <a:avLst/>
+          </a:prstGeom>
+          <a:noFill/>
+          <a:ln>
+            <a:noFill/>
+          </a:ln>
+        </p:spPr>
+      </p:pic>
+      <p:pic>
+        <p:nvPicPr>
+          <p:cNvPr id="294" name="Google Shape;294;g3d18e836f13_0_0"/>
+          <p:cNvPicPr preferRelativeResize="0"/>
+          <p:nvPr/>
+        </p:nvPicPr>
+        <p:blipFill rotWithShape="1">
+          <a:blip r:embed="rId7">
+            <a:alphaModFix/>
+          </a:blip>
+          <a:srcRect b="23319" l="0" r="0" t="0"/>
+          <a:stretch/>
+        </p:blipFill>
+        <p:spPr>
+          <a:xfrm>
+            <a:off x="8605878" y="6096000"/>
+            <a:ext cx="993734" cy="762000"/>
+          </a:xfrm>
+          <a:prstGeom prst="rect">
+            <a:avLst/>
+          </a:prstGeom>
+          <a:noFill/>
+          <a:ln>
+            <a:noFill/>
+          </a:ln>
+        </p:spPr>
+      </p:pic>
+      <p:sp>
+        <p:nvSpPr>
+          <p:cNvPr id="295" name="Google Shape;295;g3d18e836f13_0_0"/>
+          <p:cNvSpPr/>
+          <p:nvPr/>
+        </p:nvSpPr>
+        <p:spPr>
+          <a:xfrm>
+            <a:off x="10437812" y="0"/>
+            <a:ext cx="685800" cy="1143000"/>
+          </a:xfrm>
+          <a:prstGeom prst="rect">
+            <a:avLst/>
+          </a:prstGeom>
+          <a:solidFill>
+            <a:schemeClr val="accent1"/>
+          </a:solidFill>
+          <a:ln>
+            <a:noFill/>
+          </a:ln>
+          <a:effectLst>
+            <a:outerShdw blurRad="38100" rotWithShape="0" dir="5400000" dist="25400">
+              <a:srgbClr val="000000">
+                <a:alpha val="44310"/>
+              </a:srgbClr>
+            </a:outerShdw>
+          </a:effectLst>
+        </p:spPr>
+        <p:txBody>
+          <a:bodyPr anchorCtr="0" anchor="t" bIns="45700" lIns="91425" spcFirstLastPara="1" rIns="91425" wrap="square" tIns="45700">
+            <a:noAutofit/>
+          </a:bodyPr>
+          <a:lstStyle/>
+          <a:p>
+            <a:pPr indent="0" lvl="0" marL="0" marR="0" rtl="0" algn="l">
+              <a:lnSpc>
+                <a:spcPct val="100000"/>
+              </a:lnSpc>
+              <a:spcBef>
+                <a:spcPts val="0"/>
+              </a:spcBef>
+              <a:spcAft>
+                <a:spcPts val="0"/>
+              </a:spcAft>
+              <a:buClr>
+                <a:schemeClr val="lt1"/>
+              </a:buClr>
+              <a:buSzPts val="1800"/>
+              <a:buFont typeface="Century Gothic"/>
+              <a:buNone/>
+            </a:pPr>
+            <a:r>
+              <a:t/>
+            </a:r>
+            <a:endParaRPr b="0" i="0" sz="1800" u="none" cap="none" strike="noStrike">
+              <a:solidFill>
+                <a:srgbClr val="FFFFFF"/>
+              </a:solidFill>
+              <a:latin typeface="Century Gothic"/>
+              <a:ea typeface="Century Gothic"/>
+              <a:cs typeface="Century Gothic"/>
+              <a:sym typeface="Century Gothic"/>
+            </a:endParaRPr>
+          </a:p>
+        </p:txBody>
+      </p:sp>
+      <p:sp>
+        <p:nvSpPr>
+          <p:cNvPr id="296" name="Google Shape;296;g3d18e836f13_0_0"/>
           <p:cNvSpPr/>
           <p:nvPr/>
         </p:nvSpPr>
@@ -25582,7 +30198,7 @@
       </p:sp>
       <p:sp>
         <p:nvSpPr>
-          <p:cNvPr id="234" name="Google Shape;234;g3cd5945c579_0_79"/>
+          <p:cNvPr id="297" name="Google Shape;297;g3d18e836f13_0_0"/>
           <p:cNvSpPr txBox="1"/>
           <p:nvPr>
             <p:ph type="ctrTitle"/>
@@ -25657,7 +30273,7 @@
       </p:sp>
       <p:sp>
         <p:nvSpPr>
-          <p:cNvPr id="235" name="Google Shape;235;g3cd5945c579_0_79"/>
+          <p:cNvPr id="298" name="Google Shape;298;g3d18e836f13_0_0"/>
           <p:cNvSpPr txBox="1"/>
           <p:nvPr>
             <p:ph idx="1" type="subTitle"/>
@@ -25665,8 +30281,8 @@
         </p:nvSpPr>
         <p:spPr>
           <a:xfrm>
-            <a:off x="648925" y="3527400"/>
-            <a:ext cx="6188100" cy="2696400"/>
+            <a:off x="581850" y="2236325"/>
+            <a:ext cx="6188100" cy="1989300"/>
           </a:xfrm>
           <a:prstGeom prst="rect">
             <a:avLst/>
@@ -25709,7 +30325,7 @@
                 <a:cs typeface="Arial"/>
                 <a:sym typeface="Arial"/>
               </a:rPr>
-              <a:t>Dr. Gregory Block</a:t>
+              <a:t>Dr. Gregory Block (Faculty advisor)</a:t>
             </a:r>
             <a:endParaRPr>
               <a:solidFill>
@@ -25992,7 +30608,7 @@
       </p:sp>
       <p:sp>
         <p:nvSpPr>
-          <p:cNvPr id="236" name="Google Shape;236;g3cd5945c579_0_79"/>
+          <p:cNvPr id="299" name="Google Shape;299;g3d18e836f13_0_0"/>
           <p:cNvSpPr/>
           <p:nvPr/>
         </p:nvSpPr>
@@ -26170,7 +30786,7 @@
       </p:sp>
       <p:pic>
         <p:nvPicPr>
-          <p:cNvPr id="237" name="Google Shape;237;g3cd5945c579_0_79"/>
+          <p:cNvPr id="300" name="Google Shape;300;g3d18e836f13_0_0"/>
           <p:cNvPicPr preferRelativeResize="0"/>
           <p:nvPr/>
         </p:nvPicPr>
@@ -26350,6 +30966,1284 @@
               </a:path>
             </a:pathLst>
           </a:custGeom>
+          <a:noFill/>
+          <a:ln>
+            <a:noFill/>
+          </a:ln>
+        </p:spPr>
+      </p:pic>
+      <p:sp>
+        <p:nvSpPr>
+          <p:cNvPr id="301" name="Google Shape;301;g3d18e836f13_0_0"/>
+          <p:cNvSpPr txBox="1"/>
+          <p:nvPr>
+            <p:ph idx="1" type="subTitle"/>
+          </p:nvPr>
+        </p:nvSpPr>
+        <p:spPr>
+          <a:xfrm>
+            <a:off x="648925" y="4862650"/>
+            <a:ext cx="6188100" cy="1509000"/>
+          </a:xfrm>
+          <a:prstGeom prst="rect">
+            <a:avLst/>
+          </a:prstGeom>
+          <a:noFill/>
+          <a:ln>
+            <a:noFill/>
+          </a:ln>
+        </p:spPr>
+        <p:txBody>
+          <a:bodyPr anchorCtr="0" anchor="t" bIns="45700" lIns="91425" spcFirstLastPara="1" rIns="91425" wrap="square" tIns="45700">
+            <a:noAutofit/>
+          </a:bodyPr>
+          <a:lstStyle/>
+          <a:p>
+            <a:pPr indent="-330200" lvl="0" marL="457200" rtl="0" algn="l">
+              <a:lnSpc>
+                <a:spcPct val="80000"/>
+              </a:lnSpc>
+              <a:spcBef>
+                <a:spcPts val="0"/>
+              </a:spcBef>
+              <a:spcAft>
+                <a:spcPts val="0"/>
+              </a:spcAft>
+              <a:buClr>
+                <a:schemeClr val="lt1"/>
+              </a:buClr>
+              <a:buSzPts val="1600"/>
+              <a:buFont typeface="Arial"/>
+              <a:buChar char="➢"/>
+            </a:pPr>
+            <a:r>
+              <a:rPr lang="en-US">
+                <a:solidFill>
+                  <a:schemeClr val="lt1"/>
+                </a:solidFill>
+                <a:latin typeface="Arial"/>
+                <a:ea typeface="Arial"/>
+                <a:cs typeface="Arial"/>
+                <a:sym typeface="Arial"/>
+              </a:rPr>
+              <a:t>Garrett Taylor</a:t>
+            </a:r>
+            <a:endParaRPr>
+              <a:solidFill>
+                <a:schemeClr val="lt1"/>
+              </a:solidFill>
+              <a:latin typeface="Arial"/>
+              <a:ea typeface="Arial"/>
+              <a:cs typeface="Arial"/>
+              <a:sym typeface="Arial"/>
+            </a:endParaRPr>
+          </a:p>
+          <a:p>
+            <a:pPr indent="-330200" lvl="0" marL="457200" rtl="0" algn="l">
+              <a:lnSpc>
+                <a:spcPct val="80000"/>
+              </a:lnSpc>
+              <a:spcBef>
+                <a:spcPts val="0"/>
+              </a:spcBef>
+              <a:spcAft>
+                <a:spcPts val="0"/>
+              </a:spcAft>
+              <a:buClr>
+                <a:schemeClr val="lt1"/>
+              </a:buClr>
+              <a:buSzPts val="1600"/>
+              <a:buFont typeface="Arial"/>
+              <a:buChar char="➢"/>
+            </a:pPr>
+            <a:r>
+              <a:rPr lang="en-US">
+                <a:solidFill>
+                  <a:schemeClr val="lt1"/>
+                </a:solidFill>
+                <a:latin typeface="Arial"/>
+                <a:ea typeface="Arial"/>
+                <a:cs typeface="Arial"/>
+                <a:sym typeface="Arial"/>
+              </a:rPr>
+              <a:t>Richard Jacob</a:t>
+            </a:r>
+            <a:endParaRPr>
+              <a:solidFill>
+                <a:schemeClr val="lt1"/>
+              </a:solidFill>
+              <a:latin typeface="Arial"/>
+              <a:ea typeface="Arial"/>
+              <a:cs typeface="Arial"/>
+              <a:sym typeface="Arial"/>
+            </a:endParaRPr>
+          </a:p>
+          <a:p>
+            <a:pPr indent="0" lvl="0" marL="0" rtl="0" algn="l">
+              <a:lnSpc>
+                <a:spcPct val="80000"/>
+              </a:lnSpc>
+              <a:spcBef>
+                <a:spcPts val="1000"/>
+              </a:spcBef>
+              <a:spcAft>
+                <a:spcPts val="0"/>
+              </a:spcAft>
+              <a:buSzPts val="1600"/>
+              <a:buNone/>
+            </a:pPr>
+            <a:r>
+              <a:t/>
+            </a:r>
+            <a:endParaRPr>
+              <a:solidFill>
+                <a:schemeClr val="lt1"/>
+              </a:solidFill>
+              <a:latin typeface="Arial"/>
+              <a:ea typeface="Arial"/>
+              <a:cs typeface="Arial"/>
+              <a:sym typeface="Arial"/>
+            </a:endParaRPr>
+          </a:p>
+        </p:txBody>
+      </p:sp>
+      <p:sp>
+        <p:nvSpPr>
+          <p:cNvPr id="302" name="Google Shape;302;g3d18e836f13_0_0"/>
+          <p:cNvSpPr txBox="1"/>
+          <p:nvPr/>
+        </p:nvSpPr>
+        <p:spPr>
+          <a:xfrm>
+            <a:off x="779600" y="1770575"/>
+            <a:ext cx="9658200" cy="492600"/>
+          </a:xfrm>
+          <a:prstGeom prst="rect">
+            <a:avLst/>
+          </a:prstGeom>
+          <a:noFill/>
+          <a:ln>
+            <a:noFill/>
+          </a:ln>
+        </p:spPr>
+        <p:txBody>
+          <a:bodyPr anchorCtr="0" anchor="t" bIns="91425" lIns="91425" spcFirstLastPara="1" rIns="91425" wrap="square" tIns="91425">
+            <a:spAutoFit/>
+          </a:bodyPr>
+          <a:lstStyle/>
+          <a:p>
+            <a:pPr indent="0" lvl="0" marL="0" rtl="0" algn="l">
+              <a:spcBef>
+                <a:spcPts val="0"/>
+              </a:spcBef>
+              <a:spcAft>
+                <a:spcPts val="0"/>
+              </a:spcAft>
+              <a:buNone/>
+            </a:pPr>
+            <a:r>
+              <a:rPr lang="en-US" sz="2000">
+                <a:solidFill>
+                  <a:schemeClr val="lt1"/>
+                </a:solidFill>
+                <a:latin typeface="Century Gothic"/>
+                <a:ea typeface="Century Gothic"/>
+                <a:cs typeface="Century Gothic"/>
+                <a:sym typeface="Century Gothic"/>
+              </a:rPr>
+              <a:t>Development team</a:t>
+            </a:r>
+            <a:endParaRPr sz="2000">
+              <a:solidFill>
+                <a:schemeClr val="lt1"/>
+              </a:solidFill>
+              <a:latin typeface="Century Gothic"/>
+              <a:ea typeface="Century Gothic"/>
+              <a:cs typeface="Century Gothic"/>
+              <a:sym typeface="Century Gothic"/>
+            </a:endParaRPr>
+          </a:p>
+        </p:txBody>
+      </p:sp>
+      <p:sp>
+        <p:nvSpPr>
+          <p:cNvPr id="303" name="Google Shape;303;g3d18e836f13_0_0"/>
+          <p:cNvSpPr txBox="1"/>
+          <p:nvPr/>
+        </p:nvSpPr>
+        <p:spPr>
+          <a:xfrm>
+            <a:off x="779600" y="4297838"/>
+            <a:ext cx="9658200" cy="492600"/>
+          </a:xfrm>
+          <a:prstGeom prst="rect">
+            <a:avLst/>
+          </a:prstGeom>
+          <a:noFill/>
+          <a:ln>
+            <a:noFill/>
+          </a:ln>
+        </p:spPr>
+        <p:txBody>
+          <a:bodyPr anchorCtr="0" anchor="t" bIns="91425" lIns="91425" spcFirstLastPara="1" rIns="91425" wrap="square" tIns="91425">
+            <a:spAutoFit/>
+          </a:bodyPr>
+          <a:lstStyle/>
+          <a:p>
+            <a:pPr indent="0" lvl="0" marL="0" rtl="0" algn="l">
+              <a:spcBef>
+                <a:spcPts val="0"/>
+              </a:spcBef>
+              <a:spcAft>
+                <a:spcPts val="0"/>
+              </a:spcAft>
+              <a:buNone/>
+            </a:pPr>
+            <a:r>
+              <a:rPr lang="en-US" sz="2000">
+                <a:solidFill>
+                  <a:schemeClr val="lt1"/>
+                </a:solidFill>
+                <a:latin typeface="Century Gothic"/>
+                <a:ea typeface="Century Gothic"/>
+                <a:cs typeface="Century Gothic"/>
+                <a:sym typeface="Century Gothic"/>
+              </a:rPr>
+              <a:t>Alpha testers</a:t>
+            </a:r>
+            <a:endParaRPr sz="2000">
+              <a:solidFill>
+                <a:schemeClr val="lt1"/>
+              </a:solidFill>
+              <a:latin typeface="Century Gothic"/>
+              <a:ea typeface="Century Gothic"/>
+              <a:cs typeface="Century Gothic"/>
+              <a:sym typeface="Century Gothic"/>
+            </a:endParaRPr>
+          </a:p>
+        </p:txBody>
+      </p:sp>
+    </p:spTree>
+  </p:cSld>
+  <p:clrMapOvr>
+    <a:masterClrMapping/>
+  </p:clrMapOvr>
+</p:sld>
+</file>
+
+<file path=ppt/slides/slide17.xml><?xml version="1.0" encoding="utf-8"?>
+<p:sld xmlns:a="http://schemas.openxmlformats.org/drawingml/2006/main" xmlns:r="http://schemas.openxmlformats.org/officeDocument/2006/relationships" xmlns:mc="http://schemas.openxmlformats.org/markup-compatibility/2006" xmlns:mv="urn:schemas-microsoft-com:mac:vml" xmlns:p="http://schemas.openxmlformats.org/presentationml/2006/main" xmlns:c="http://schemas.openxmlformats.org/drawingml/2006/chart" xmlns:dgm="http://schemas.openxmlformats.org/drawingml/2006/diagram" xmlns:o="urn:schemas-microsoft-com:office:office" xmlns:v="urn:schemas-microsoft-com:vml" xmlns:pvml="urn:schemas-microsoft-com:office:powerpoint" xmlns:com="http://schemas.openxmlformats.org/drawingml/2006/compatibility" xmlns:p14="http://schemas.microsoft.com/office/powerpoint/2010/main" xmlns:p15="http://schemas.microsoft.com/office/powerpoint/2012/main" xmlns:ahyp="http://schemas.microsoft.com/office/drawing/2018/hyperlinkcolor">
+  <p:cSld>
+    <p:spTree>
+      <p:nvGrpSpPr>
+        <p:cNvPr id="308" name="Shape 308"/>
+        <p:cNvGrpSpPr/>
+        <p:nvPr/>
+      </p:nvGrpSpPr>
+      <p:grpSpPr>
+        <a:xfrm>
+          <a:off x="0" y="0"/>
+          <a:ext cx="0" cy="0"/>
+          <a:chOff x="0" y="0"/>
+          <a:chExt cx="0" cy="0"/>
+        </a:xfrm>
+      </p:grpSpPr>
+      <p:sp>
+        <p:nvSpPr>
+          <p:cNvPr id="309" name="Google Shape;309;g3ce41fdc5fc_0_6"/>
+          <p:cNvSpPr txBox="1"/>
+          <p:nvPr/>
+        </p:nvSpPr>
+        <p:spPr>
+          <a:xfrm>
+            <a:off x="1264600" y="1297026"/>
+            <a:ext cx="9419700" cy="5155500"/>
+          </a:xfrm>
+          <a:prstGeom prst="rect">
+            <a:avLst/>
+          </a:prstGeom>
+          <a:noFill/>
+          <a:ln>
+            <a:noFill/>
+          </a:ln>
+        </p:spPr>
+        <p:txBody>
+          <a:bodyPr anchorCtr="0" anchor="t" bIns="91425" lIns="91425" spcFirstLastPara="1" rIns="91425" wrap="square" tIns="91425">
+            <a:noAutofit/>
+          </a:bodyPr>
+          <a:lstStyle/>
+          <a:p>
+            <a:pPr indent="0" lvl="0" marL="0" rtl="0" algn="l">
+              <a:spcBef>
+                <a:spcPts val="0"/>
+              </a:spcBef>
+              <a:spcAft>
+                <a:spcPts val="0"/>
+              </a:spcAft>
+              <a:buNone/>
+            </a:pPr>
+            <a:r>
+              <a:rPr lang="en-US" sz="2000">
+                <a:solidFill>
+                  <a:schemeClr val="lt1"/>
+                </a:solidFill>
+              </a:rPr>
+              <a:t>These slides:</a:t>
+            </a:r>
+            <a:endParaRPr sz="2000">
+              <a:solidFill>
+                <a:schemeClr val="lt1"/>
+              </a:solidFill>
+            </a:endParaRPr>
+          </a:p>
+          <a:p>
+            <a:pPr indent="0" lvl="0" marL="0" rtl="0" algn="l">
+              <a:spcBef>
+                <a:spcPts val="0"/>
+              </a:spcBef>
+              <a:spcAft>
+                <a:spcPts val="0"/>
+              </a:spcAft>
+              <a:buNone/>
+            </a:pPr>
+            <a:r>
+              <a:rPr lang="en-US" sz="2000" u="sng">
+                <a:solidFill>
+                  <a:schemeClr val="hlink"/>
+                </a:solidFill>
+                <a:hlinkClick r:id="rId3"/>
+              </a:rPr>
+              <a:t>https://tinyurl.com/ykwt8dkv</a:t>
+            </a:r>
+            <a:endParaRPr sz="2000">
+              <a:solidFill>
+                <a:schemeClr val="lt1"/>
+              </a:solidFill>
+            </a:endParaRPr>
+          </a:p>
+          <a:p>
+            <a:pPr indent="0" lvl="0" marL="0" rtl="0" algn="l">
+              <a:spcBef>
+                <a:spcPts val="0"/>
+              </a:spcBef>
+              <a:spcAft>
+                <a:spcPts val="0"/>
+              </a:spcAft>
+              <a:buNone/>
+            </a:pPr>
+            <a:r>
+              <a:rPr lang="en-US" sz="2000">
+                <a:solidFill>
+                  <a:schemeClr val="lt1"/>
+                </a:solidFill>
+              </a:rPr>
+              <a:t>The accompanying paper:</a:t>
+            </a:r>
+            <a:endParaRPr sz="2000">
+              <a:solidFill>
+                <a:schemeClr val="lt1"/>
+              </a:solidFill>
+            </a:endParaRPr>
+          </a:p>
+          <a:p>
+            <a:pPr indent="0" lvl="0" marL="0" rtl="0" algn="l">
+              <a:spcBef>
+                <a:spcPts val="0"/>
+              </a:spcBef>
+              <a:spcAft>
+                <a:spcPts val="0"/>
+              </a:spcAft>
+              <a:buNone/>
+            </a:pPr>
+            <a:r>
+              <a:rPr lang="en-US" sz="2000" u="sng">
+                <a:solidFill>
+                  <a:schemeClr val="hlink"/>
+                </a:solidFill>
+                <a:hlinkClick r:id="rId4"/>
+              </a:rPr>
+              <a:t>https://tinyurl.com/54paunua</a:t>
+            </a:r>
+            <a:endParaRPr sz="2000">
+              <a:solidFill>
+                <a:schemeClr val="lt1"/>
+              </a:solidFill>
+            </a:endParaRPr>
+          </a:p>
+          <a:p>
+            <a:pPr indent="0" lvl="0" marL="0" rtl="0" algn="l">
+              <a:spcBef>
+                <a:spcPts val="0"/>
+              </a:spcBef>
+              <a:spcAft>
+                <a:spcPts val="0"/>
+              </a:spcAft>
+              <a:buNone/>
+            </a:pPr>
+            <a:r>
+              <a:rPr lang="en-US" sz="2000">
+                <a:solidFill>
+                  <a:schemeClr val="lt1"/>
+                </a:solidFill>
+              </a:rPr>
+              <a:t>The SKOL web site</a:t>
+            </a:r>
+            <a:r>
+              <a:rPr lang="en-US" sz="2000">
+                <a:solidFill>
+                  <a:schemeClr val="lt1"/>
+                </a:solidFill>
+              </a:rPr>
+              <a:t>:</a:t>
+            </a:r>
+            <a:endParaRPr sz="2000">
+              <a:solidFill>
+                <a:schemeClr val="lt1"/>
+              </a:solidFill>
+            </a:endParaRPr>
+          </a:p>
+          <a:p>
+            <a:pPr indent="0" lvl="0" marL="0" rtl="0" algn="l">
+              <a:spcBef>
+                <a:spcPts val="0"/>
+              </a:spcBef>
+              <a:spcAft>
+                <a:spcPts val="0"/>
+              </a:spcAft>
+              <a:buNone/>
+            </a:pPr>
+            <a:r>
+              <a:rPr lang="en-US" sz="2000" u="sng">
+                <a:solidFill>
+                  <a:schemeClr val="hlink"/>
+                </a:solidFill>
+                <a:hlinkClick r:id="rId5"/>
+              </a:rPr>
+              <a:t>https://synoptickeyof.life/skol</a:t>
+            </a:r>
+            <a:endParaRPr sz="2000">
+              <a:solidFill>
+                <a:schemeClr val="lt1"/>
+              </a:solidFill>
+            </a:endParaRPr>
+          </a:p>
+          <a:p>
+            <a:pPr indent="0" lvl="0" marL="0" rtl="0" algn="l">
+              <a:spcBef>
+                <a:spcPts val="0"/>
+              </a:spcBef>
+              <a:spcAft>
+                <a:spcPts val="0"/>
+              </a:spcAft>
+              <a:buNone/>
+            </a:pPr>
+            <a:r>
+              <a:rPr lang="en-US" sz="2000">
+                <a:solidFill>
+                  <a:schemeClr val="lt1"/>
+                </a:solidFill>
+              </a:rPr>
+              <a:t>The SKOL source code:</a:t>
+            </a:r>
+            <a:endParaRPr sz="2000">
+              <a:solidFill>
+                <a:schemeClr val="lt1"/>
+              </a:solidFill>
+            </a:endParaRPr>
+          </a:p>
+          <a:p>
+            <a:pPr indent="0" lvl="0" marL="0" rtl="0" algn="l">
+              <a:spcBef>
+                <a:spcPts val="0"/>
+              </a:spcBef>
+              <a:spcAft>
+                <a:spcPts val="0"/>
+              </a:spcAft>
+              <a:buNone/>
+            </a:pPr>
+            <a:r>
+              <a:rPr lang="en-US" sz="2000" u="sng">
+                <a:solidFill>
+                  <a:schemeClr val="hlink"/>
+                </a:solidFill>
+                <a:hlinkClick r:id="rId6"/>
+              </a:rPr>
+              <a:t>https://github.com/piggyatbaqaqi/skol</a:t>
+            </a:r>
+            <a:endParaRPr sz="2000">
+              <a:solidFill>
+                <a:schemeClr val="lt1"/>
+              </a:solidFill>
+            </a:endParaRPr>
+          </a:p>
+          <a:p>
+            <a:pPr indent="0" lvl="0" marL="0" rtl="0" algn="l">
+              <a:spcBef>
+                <a:spcPts val="0"/>
+              </a:spcBef>
+              <a:spcAft>
+                <a:spcPts val="0"/>
+              </a:spcAft>
+              <a:buNone/>
+            </a:pPr>
+            <a:r>
+              <a:rPr lang="en-US" sz="2000">
+                <a:solidFill>
+                  <a:schemeClr val="lt1"/>
+                </a:solidFill>
+              </a:rPr>
+              <a:t>Dr Draft's state-of-the-art (SOTA) Literature Search</a:t>
+            </a:r>
+            <a:endParaRPr sz="2000">
+              <a:solidFill>
+                <a:schemeClr val="lt1"/>
+              </a:solidFill>
+            </a:endParaRPr>
+          </a:p>
+          <a:p>
+            <a:pPr indent="0" lvl="0" marL="0" rtl="0" algn="l">
+              <a:spcBef>
+                <a:spcPts val="0"/>
+              </a:spcBef>
+              <a:spcAft>
+                <a:spcPts val="0"/>
+              </a:spcAft>
+              <a:buNone/>
+            </a:pPr>
+            <a:r>
+              <a:rPr lang="en-US" sz="1700" u="sng">
+                <a:solidFill>
+                  <a:schemeClr val="hlink"/>
+                </a:solidFill>
+                <a:hlinkClick r:id="rId7"/>
+              </a:rPr>
+              <a:t>https://github.com/autonlab/dr-drafts-sota-literature-search</a:t>
+            </a:r>
+            <a:endParaRPr sz="1700">
+              <a:solidFill>
+                <a:schemeClr val="lt1"/>
+              </a:solidFill>
+            </a:endParaRPr>
+          </a:p>
+          <a:p>
+            <a:pPr indent="0" lvl="0" marL="0" rtl="0" algn="l">
+              <a:spcBef>
+                <a:spcPts val="0"/>
+              </a:spcBef>
+              <a:spcAft>
+                <a:spcPts val="0"/>
+              </a:spcAft>
+              <a:buNone/>
+            </a:pPr>
+            <a:r>
+              <a:rPr lang="en-US" sz="1700">
+                <a:solidFill>
+                  <a:schemeClr val="lt1"/>
+                </a:solidFill>
+              </a:rPr>
+              <a:t>SKOL fork of Dr Draft’s:</a:t>
+            </a:r>
+            <a:endParaRPr sz="1700">
+              <a:solidFill>
+                <a:schemeClr val="lt1"/>
+              </a:solidFill>
+            </a:endParaRPr>
+          </a:p>
+          <a:p>
+            <a:pPr indent="0" lvl="0" marL="0" rtl="0" algn="l">
+              <a:spcBef>
+                <a:spcPts val="0"/>
+              </a:spcBef>
+              <a:spcAft>
+                <a:spcPts val="0"/>
+              </a:spcAft>
+              <a:buNone/>
+            </a:pPr>
+            <a:r>
+              <a:rPr lang="en-US" sz="1700" u="sng">
+                <a:solidFill>
+                  <a:schemeClr val="hlink"/>
+                </a:solidFill>
+                <a:hlinkClick r:id="rId8"/>
+              </a:rPr>
+              <a:t>https://github.com/piggyatbaqaqi/dr-drafts-mycosearch</a:t>
+            </a:r>
+            <a:endParaRPr sz="1700">
+              <a:solidFill>
+                <a:schemeClr val="lt1"/>
+              </a:solidFill>
+            </a:endParaRPr>
+          </a:p>
+          <a:p>
+            <a:pPr indent="0" lvl="0" marL="0" rtl="0" algn="l">
+              <a:spcBef>
+                <a:spcPts val="0"/>
+              </a:spcBef>
+              <a:spcAft>
+                <a:spcPts val="0"/>
+              </a:spcAft>
+              <a:buClr>
+                <a:schemeClr val="dk1"/>
+              </a:buClr>
+              <a:buSzPts val="1100"/>
+              <a:buFont typeface="Arial"/>
+              <a:buNone/>
+            </a:pPr>
+            <a:r>
+              <a:rPr lang="en-US" sz="1800">
+                <a:solidFill>
+                  <a:schemeClr val="lt1"/>
+                </a:solidFill>
+                <a:latin typeface="Century Gothic"/>
+                <a:ea typeface="Century Gothic"/>
+                <a:cs typeface="Century Gothic"/>
+                <a:sym typeface="Century Gothic"/>
+              </a:rPr>
+              <a:t>A </a:t>
+            </a:r>
+            <a:r>
+              <a:rPr lang="en-US" sz="1800">
+                <a:solidFill>
+                  <a:schemeClr val="lt1"/>
+                </a:solidFill>
+                <a:latin typeface="Century Gothic"/>
+                <a:ea typeface="Century Gothic"/>
+                <a:cs typeface="Century Gothic"/>
+                <a:sym typeface="Century Gothic"/>
+              </a:rPr>
+              <a:t>complete summary of technologies integrated:</a:t>
+            </a:r>
+            <a:endParaRPr sz="1700">
+              <a:solidFill>
+                <a:schemeClr val="lt1"/>
+              </a:solidFill>
+            </a:endParaRPr>
+          </a:p>
+          <a:p>
+            <a:pPr indent="0" lvl="0" marL="0" rtl="0" algn="l">
+              <a:spcBef>
+                <a:spcPts val="0"/>
+              </a:spcBef>
+              <a:spcAft>
+                <a:spcPts val="0"/>
+              </a:spcAft>
+              <a:buClr>
+                <a:schemeClr val="dk1"/>
+              </a:buClr>
+              <a:buSzPts val="1100"/>
+              <a:buFont typeface="Arial"/>
+              <a:buNone/>
+            </a:pPr>
+            <a:r>
+              <a:rPr lang="en-US" sz="1800" u="sng">
+                <a:solidFill>
+                  <a:schemeClr val="hlink"/>
+                </a:solidFill>
+                <a:latin typeface="Century Gothic"/>
+                <a:ea typeface="Century Gothic"/>
+                <a:cs typeface="Century Gothic"/>
+                <a:sym typeface="Century Gothic"/>
+                <a:hlinkClick r:id="rId9"/>
+              </a:rPr>
+              <a:t>https://github.com/piggyatbaqaqi/skol/blob/main/docs/technologies.md</a:t>
+            </a:r>
+            <a:r>
+              <a:rPr lang="en-US" sz="1800">
+                <a:solidFill>
+                  <a:schemeClr val="lt1"/>
+                </a:solidFill>
+                <a:latin typeface="Century Gothic"/>
+                <a:ea typeface="Century Gothic"/>
+                <a:cs typeface="Century Gothic"/>
+                <a:sym typeface="Century Gothic"/>
+              </a:rPr>
+              <a:t> for.</a:t>
+            </a:r>
+            <a:endParaRPr sz="1800">
+              <a:solidFill>
+                <a:schemeClr val="lt1"/>
+              </a:solidFill>
+              <a:latin typeface="Century Gothic"/>
+              <a:ea typeface="Century Gothic"/>
+              <a:cs typeface="Century Gothic"/>
+              <a:sym typeface="Century Gothic"/>
+            </a:endParaRPr>
+          </a:p>
+          <a:p>
+            <a:pPr indent="0" lvl="0" marL="0" rtl="0" algn="l">
+              <a:spcBef>
+                <a:spcPts val="0"/>
+              </a:spcBef>
+              <a:spcAft>
+                <a:spcPts val="0"/>
+              </a:spcAft>
+              <a:buClr>
+                <a:schemeClr val="dk1"/>
+              </a:buClr>
+              <a:buSzPts val="1100"/>
+              <a:buFont typeface="Arial"/>
+              <a:buNone/>
+            </a:pPr>
+            <a:r>
+              <a:t/>
+            </a:r>
+            <a:endParaRPr sz="2000">
+              <a:solidFill>
+                <a:schemeClr val="lt1"/>
+              </a:solidFill>
+              <a:latin typeface="Century Gothic"/>
+              <a:ea typeface="Century Gothic"/>
+              <a:cs typeface="Century Gothic"/>
+              <a:sym typeface="Century Gothic"/>
+            </a:endParaRPr>
+          </a:p>
+          <a:p>
+            <a:pPr indent="0" lvl="0" marL="0" rtl="0" algn="l">
+              <a:spcBef>
+                <a:spcPts val="0"/>
+              </a:spcBef>
+              <a:spcAft>
+                <a:spcPts val="0"/>
+              </a:spcAft>
+              <a:buNone/>
+            </a:pPr>
+            <a:r>
+              <a:t/>
+            </a:r>
+            <a:endParaRPr sz="2000">
+              <a:solidFill>
+                <a:schemeClr val="lt1"/>
+              </a:solidFill>
+            </a:endParaRPr>
+          </a:p>
+        </p:txBody>
+      </p:sp>
+      <p:pic>
+        <p:nvPicPr>
+          <p:cNvPr id="310" name="Google Shape;310;g3ce41fdc5fc_0_6"/>
+          <p:cNvPicPr preferRelativeResize="0"/>
+          <p:nvPr/>
+        </p:nvPicPr>
+        <p:blipFill rotWithShape="1">
+          <a:blip r:embed="rId10">
+            <a:alphaModFix/>
+          </a:blip>
+          <a:srcRect b="0" l="27006" r="32286" t="0"/>
+          <a:stretch/>
+        </p:blipFill>
+        <p:spPr>
+          <a:xfrm>
+            <a:off x="7229175" y="1"/>
+            <a:ext cx="4963245" cy="6858001"/>
+          </a:xfrm>
+          <a:custGeom>
+            <a:rect b="b" l="l" r="r" t="t"/>
+            <a:pathLst>
+              <a:path extrusionOk="0" h="6858001" w="4963245">
+                <a:moveTo>
+                  <a:pt x="1177" y="0"/>
+                </a:moveTo>
+                <a:lnTo>
+                  <a:pt x="1344715" y="0"/>
+                </a:lnTo>
+                <a:lnTo>
+                  <a:pt x="1344715" y="1"/>
+                </a:lnTo>
+                <a:lnTo>
+                  <a:pt x="4963245" y="1"/>
+                </a:lnTo>
+                <a:lnTo>
+                  <a:pt x="4963244" y="6858001"/>
+                </a:lnTo>
+                <a:lnTo>
+                  <a:pt x="900697" y="6858001"/>
+                </a:lnTo>
+                <a:lnTo>
+                  <a:pt x="900697" y="6858000"/>
+                </a:lnTo>
+                <a:lnTo>
+                  <a:pt x="0" y="6858000"/>
+                </a:lnTo>
+                <a:lnTo>
+                  <a:pt x="5883" y="6817538"/>
+                </a:lnTo>
+                <a:lnTo>
+                  <a:pt x="23196" y="6698894"/>
+                </a:lnTo>
+                <a:lnTo>
+                  <a:pt x="35299" y="6612483"/>
+                </a:lnTo>
+                <a:lnTo>
+                  <a:pt x="48073" y="6509613"/>
+                </a:lnTo>
+                <a:lnTo>
+                  <a:pt x="63369" y="6387541"/>
+                </a:lnTo>
+                <a:lnTo>
+                  <a:pt x="79506" y="6252438"/>
+                </a:lnTo>
+                <a:lnTo>
+                  <a:pt x="96483" y="6100191"/>
+                </a:lnTo>
+                <a:lnTo>
+                  <a:pt x="114469" y="5934227"/>
+                </a:lnTo>
+                <a:lnTo>
+                  <a:pt x="132454" y="5753862"/>
+                </a:lnTo>
+                <a:lnTo>
+                  <a:pt x="150776" y="5561838"/>
+                </a:lnTo>
+                <a:lnTo>
+                  <a:pt x="167753" y="5354726"/>
+                </a:lnTo>
+                <a:lnTo>
+                  <a:pt x="184058" y="5138013"/>
+                </a:lnTo>
+                <a:lnTo>
+                  <a:pt x="198849" y="4908956"/>
+                </a:lnTo>
+                <a:lnTo>
+                  <a:pt x="212969" y="4670298"/>
+                </a:lnTo>
+                <a:lnTo>
+                  <a:pt x="226248" y="4421352"/>
+                </a:lnTo>
+                <a:lnTo>
+                  <a:pt x="230955" y="4293793"/>
+                </a:lnTo>
+                <a:lnTo>
+                  <a:pt x="236165" y="4163492"/>
+                </a:lnTo>
+                <a:lnTo>
+                  <a:pt x="241040" y="4031133"/>
+                </a:lnTo>
+                <a:lnTo>
+                  <a:pt x="244234" y="3898087"/>
+                </a:lnTo>
+                <a:lnTo>
+                  <a:pt x="247091" y="3762299"/>
+                </a:lnTo>
+                <a:lnTo>
+                  <a:pt x="250117" y="3625139"/>
+                </a:lnTo>
+                <a:lnTo>
+                  <a:pt x="252134" y="3485236"/>
+                </a:lnTo>
+                <a:lnTo>
+                  <a:pt x="252134" y="3343961"/>
+                </a:lnTo>
+                <a:lnTo>
+                  <a:pt x="253142" y="3201315"/>
+                </a:lnTo>
+                <a:lnTo>
+                  <a:pt x="252134" y="3057297"/>
+                </a:lnTo>
+                <a:lnTo>
+                  <a:pt x="250117" y="2911221"/>
+                </a:lnTo>
+                <a:lnTo>
+                  <a:pt x="248268" y="2765146"/>
+                </a:lnTo>
+                <a:lnTo>
+                  <a:pt x="244234" y="2617013"/>
+                </a:lnTo>
+                <a:lnTo>
+                  <a:pt x="240032" y="2467509"/>
+                </a:lnTo>
+                <a:lnTo>
+                  <a:pt x="235157" y="2318004"/>
+                </a:lnTo>
+                <a:lnTo>
+                  <a:pt x="228266" y="2167128"/>
+                </a:lnTo>
+                <a:lnTo>
+                  <a:pt x="220029" y="2014881"/>
+                </a:lnTo>
+                <a:lnTo>
+                  <a:pt x="212129" y="1861947"/>
+                </a:lnTo>
+                <a:lnTo>
+                  <a:pt x="202044" y="1709014"/>
+                </a:lnTo>
+                <a:lnTo>
+                  <a:pt x="189941" y="1554023"/>
+                </a:lnTo>
+                <a:lnTo>
+                  <a:pt x="177839" y="1401090"/>
+                </a:lnTo>
+                <a:lnTo>
+                  <a:pt x="163887" y="1245413"/>
+                </a:lnTo>
+                <a:lnTo>
+                  <a:pt x="148591" y="1089051"/>
+                </a:lnTo>
+                <a:lnTo>
+                  <a:pt x="132455" y="934746"/>
+                </a:lnTo>
+                <a:lnTo>
+                  <a:pt x="113629" y="778383"/>
+                </a:lnTo>
+                <a:lnTo>
+                  <a:pt x="93458" y="622707"/>
+                </a:lnTo>
+                <a:lnTo>
+                  <a:pt x="73455" y="466344"/>
+                </a:lnTo>
+                <a:lnTo>
+                  <a:pt x="50091" y="310668"/>
+                </a:lnTo>
+                <a:lnTo>
+                  <a:pt x="26222" y="155677"/>
+                </a:lnTo>
+                <a:close/>
+              </a:path>
+            </a:pathLst>
+          </a:custGeom>
+          <a:noFill/>
+          <a:ln>
+            <a:noFill/>
+          </a:ln>
+        </p:spPr>
+      </p:pic>
+    </p:spTree>
+  </p:cSld>
+  <p:clrMapOvr>
+    <a:masterClrMapping/>
+  </p:clrMapOvr>
+</p:sld>
+</file>
+
+<file path=ppt/slides/slide18.xml><?xml version="1.0" encoding="utf-8"?>
+<p:sld xmlns:a="http://schemas.openxmlformats.org/drawingml/2006/main" xmlns:r="http://schemas.openxmlformats.org/officeDocument/2006/relationships" xmlns:mc="http://schemas.openxmlformats.org/markup-compatibility/2006" xmlns:mv="urn:schemas-microsoft-com:mac:vml" xmlns:p="http://schemas.openxmlformats.org/presentationml/2006/main" xmlns:c="http://schemas.openxmlformats.org/drawingml/2006/chart" xmlns:dgm="http://schemas.openxmlformats.org/drawingml/2006/diagram" xmlns:o="urn:schemas-microsoft-com:office:office" xmlns:v="urn:schemas-microsoft-com:vml" xmlns:pvml="urn:schemas-microsoft-com:office:powerpoint" xmlns:com="http://schemas.openxmlformats.org/drawingml/2006/compatibility" xmlns:p14="http://schemas.microsoft.com/office/powerpoint/2010/main" xmlns:p15="http://schemas.microsoft.com/office/powerpoint/2012/main" xmlns:ahyp="http://schemas.microsoft.com/office/drawing/2018/hyperlinkcolor">
+  <p:cSld>
+    <p:spTree>
+      <p:nvGrpSpPr>
+        <p:cNvPr id="315" name="Shape 315"/>
+        <p:cNvGrpSpPr/>
+        <p:nvPr/>
+      </p:nvGrpSpPr>
+      <p:grpSpPr>
+        <a:xfrm>
+          <a:off x="0" y="0"/>
+          <a:ext cx="0" cy="0"/>
+          <a:chOff x="0" y="0"/>
+          <a:chExt cx="0" cy="0"/>
+        </a:xfrm>
+      </p:grpSpPr>
+      <p:sp>
+        <p:nvSpPr>
+          <p:cNvPr id="316" name="Google Shape;316;g3d18e836f13_0_19"/>
+          <p:cNvSpPr txBox="1"/>
+          <p:nvPr/>
+        </p:nvSpPr>
+        <p:spPr>
+          <a:xfrm>
+            <a:off x="1264600" y="1297026"/>
+            <a:ext cx="9419700" cy="5155500"/>
+          </a:xfrm>
+          <a:prstGeom prst="rect">
+            <a:avLst/>
+          </a:prstGeom>
+          <a:noFill/>
+          <a:ln>
+            <a:noFill/>
+          </a:ln>
+        </p:spPr>
+        <p:txBody>
+          <a:bodyPr anchorCtr="0" anchor="t" bIns="91425" lIns="91425" spcFirstLastPara="1" rIns="91425" wrap="square" tIns="91425">
+            <a:noAutofit/>
+          </a:bodyPr>
+          <a:lstStyle/>
+          <a:p>
+            <a:pPr indent="0" lvl="0" marL="0" rtl="0" algn="l">
+              <a:spcBef>
+                <a:spcPts val="0"/>
+              </a:spcBef>
+              <a:spcAft>
+                <a:spcPts val="0"/>
+              </a:spcAft>
+              <a:buNone/>
+            </a:pPr>
+            <a:r>
+              <a:t/>
+            </a:r>
+            <a:endParaRPr sz="2000">
+              <a:solidFill>
+                <a:schemeClr val="lt1"/>
+              </a:solidFill>
+            </a:endParaRPr>
+          </a:p>
+        </p:txBody>
+      </p:sp>
+      <p:pic>
+        <p:nvPicPr>
+          <p:cNvPr id="317" name="Google Shape;317;g3d18e836f13_0_19"/>
+          <p:cNvPicPr preferRelativeResize="0"/>
+          <p:nvPr/>
+        </p:nvPicPr>
+        <p:blipFill rotWithShape="1">
+          <a:blip r:embed="rId3">
+            <a:alphaModFix/>
+          </a:blip>
+          <a:srcRect b="0" l="27006" r="32286" t="0"/>
+          <a:stretch/>
+        </p:blipFill>
+        <p:spPr>
+          <a:xfrm>
+            <a:off x="7229175" y="1"/>
+            <a:ext cx="4963245" cy="6858001"/>
+          </a:xfrm>
+          <a:custGeom>
+            <a:rect b="b" l="l" r="r" t="t"/>
+            <a:pathLst>
+              <a:path extrusionOk="0" h="6858001" w="4963245">
+                <a:moveTo>
+                  <a:pt x="1177" y="0"/>
+                </a:moveTo>
+                <a:lnTo>
+                  <a:pt x="1344715" y="0"/>
+                </a:lnTo>
+                <a:lnTo>
+                  <a:pt x="1344715" y="1"/>
+                </a:lnTo>
+                <a:lnTo>
+                  <a:pt x="4963245" y="1"/>
+                </a:lnTo>
+                <a:lnTo>
+                  <a:pt x="4963244" y="6858001"/>
+                </a:lnTo>
+                <a:lnTo>
+                  <a:pt x="900697" y="6858001"/>
+                </a:lnTo>
+                <a:lnTo>
+                  <a:pt x="900697" y="6858000"/>
+                </a:lnTo>
+                <a:lnTo>
+                  <a:pt x="0" y="6858000"/>
+                </a:lnTo>
+                <a:lnTo>
+                  <a:pt x="5883" y="6817538"/>
+                </a:lnTo>
+                <a:lnTo>
+                  <a:pt x="23196" y="6698894"/>
+                </a:lnTo>
+                <a:lnTo>
+                  <a:pt x="35299" y="6612483"/>
+                </a:lnTo>
+                <a:lnTo>
+                  <a:pt x="48073" y="6509613"/>
+                </a:lnTo>
+                <a:lnTo>
+                  <a:pt x="63369" y="6387541"/>
+                </a:lnTo>
+                <a:lnTo>
+                  <a:pt x="79506" y="6252438"/>
+                </a:lnTo>
+                <a:lnTo>
+                  <a:pt x="96483" y="6100191"/>
+                </a:lnTo>
+                <a:lnTo>
+                  <a:pt x="114469" y="5934227"/>
+                </a:lnTo>
+                <a:lnTo>
+                  <a:pt x="132454" y="5753862"/>
+                </a:lnTo>
+                <a:lnTo>
+                  <a:pt x="150776" y="5561838"/>
+                </a:lnTo>
+                <a:lnTo>
+                  <a:pt x="167753" y="5354726"/>
+                </a:lnTo>
+                <a:lnTo>
+                  <a:pt x="184058" y="5138013"/>
+                </a:lnTo>
+                <a:lnTo>
+                  <a:pt x="198849" y="4908956"/>
+                </a:lnTo>
+                <a:lnTo>
+                  <a:pt x="212969" y="4670298"/>
+                </a:lnTo>
+                <a:lnTo>
+                  <a:pt x="226248" y="4421352"/>
+                </a:lnTo>
+                <a:lnTo>
+                  <a:pt x="230955" y="4293793"/>
+                </a:lnTo>
+                <a:lnTo>
+                  <a:pt x="236165" y="4163492"/>
+                </a:lnTo>
+                <a:lnTo>
+                  <a:pt x="241040" y="4031133"/>
+                </a:lnTo>
+                <a:lnTo>
+                  <a:pt x="244234" y="3898087"/>
+                </a:lnTo>
+                <a:lnTo>
+                  <a:pt x="247091" y="3762299"/>
+                </a:lnTo>
+                <a:lnTo>
+                  <a:pt x="250117" y="3625139"/>
+                </a:lnTo>
+                <a:lnTo>
+                  <a:pt x="252134" y="3485236"/>
+                </a:lnTo>
+                <a:lnTo>
+                  <a:pt x="252134" y="3343961"/>
+                </a:lnTo>
+                <a:lnTo>
+                  <a:pt x="253142" y="3201315"/>
+                </a:lnTo>
+                <a:lnTo>
+                  <a:pt x="252134" y="3057297"/>
+                </a:lnTo>
+                <a:lnTo>
+                  <a:pt x="250117" y="2911221"/>
+                </a:lnTo>
+                <a:lnTo>
+                  <a:pt x="248268" y="2765146"/>
+                </a:lnTo>
+                <a:lnTo>
+                  <a:pt x="244234" y="2617013"/>
+                </a:lnTo>
+                <a:lnTo>
+                  <a:pt x="240032" y="2467509"/>
+                </a:lnTo>
+                <a:lnTo>
+                  <a:pt x="235157" y="2318004"/>
+                </a:lnTo>
+                <a:lnTo>
+                  <a:pt x="228266" y="2167128"/>
+                </a:lnTo>
+                <a:lnTo>
+                  <a:pt x="220029" y="2014881"/>
+                </a:lnTo>
+                <a:lnTo>
+                  <a:pt x="212129" y="1861947"/>
+                </a:lnTo>
+                <a:lnTo>
+                  <a:pt x="202044" y="1709014"/>
+                </a:lnTo>
+                <a:lnTo>
+                  <a:pt x="189941" y="1554023"/>
+                </a:lnTo>
+                <a:lnTo>
+                  <a:pt x="177839" y="1401090"/>
+                </a:lnTo>
+                <a:lnTo>
+                  <a:pt x="163887" y="1245413"/>
+                </a:lnTo>
+                <a:lnTo>
+                  <a:pt x="148591" y="1089051"/>
+                </a:lnTo>
+                <a:lnTo>
+                  <a:pt x="132455" y="934746"/>
+                </a:lnTo>
+                <a:lnTo>
+                  <a:pt x="113629" y="778383"/>
+                </a:lnTo>
+                <a:lnTo>
+                  <a:pt x="93458" y="622707"/>
+                </a:lnTo>
+                <a:lnTo>
+                  <a:pt x="73455" y="466344"/>
+                </a:lnTo>
+                <a:lnTo>
+                  <a:pt x="50091" y="310668"/>
+                </a:lnTo>
+                <a:lnTo>
+                  <a:pt x="26222" y="155677"/>
+                </a:lnTo>
+                <a:close/>
+              </a:path>
+            </a:pathLst>
+          </a:custGeom>
+          <a:noFill/>
+          <a:ln>
+            <a:noFill/>
+          </a:ln>
+        </p:spPr>
+      </p:pic>
+      <p:sp>
+        <p:nvSpPr>
+          <p:cNvPr id="318" name="Google Shape;318;g3d18e836f13_0_19"/>
+          <p:cNvSpPr txBox="1"/>
+          <p:nvPr/>
+        </p:nvSpPr>
+        <p:spPr>
+          <a:xfrm>
+            <a:off x="210375" y="189325"/>
+            <a:ext cx="6437400" cy="862500"/>
+          </a:xfrm>
+          <a:prstGeom prst="rect">
+            <a:avLst/>
+          </a:prstGeom>
+          <a:noFill/>
+          <a:ln>
+            <a:noFill/>
+          </a:ln>
+        </p:spPr>
+        <p:txBody>
+          <a:bodyPr anchorCtr="0" anchor="t" bIns="91425" lIns="91425" spcFirstLastPara="1" rIns="91425" wrap="square" tIns="91425">
+            <a:noAutofit/>
+          </a:bodyPr>
+          <a:lstStyle/>
+          <a:p>
+            <a:pPr indent="0" lvl="0" marL="0" rtl="0" algn="l">
+              <a:spcBef>
+                <a:spcPts val="0"/>
+              </a:spcBef>
+              <a:spcAft>
+                <a:spcPts val="0"/>
+              </a:spcAft>
+              <a:buNone/>
+            </a:pPr>
+            <a:r>
+              <a:rPr lang="en-US" sz="2400">
+                <a:solidFill>
+                  <a:schemeClr val="lt1"/>
+                </a:solidFill>
+                <a:latin typeface="Century Gothic"/>
+                <a:ea typeface="Century Gothic"/>
+                <a:cs typeface="Century Gothic"/>
+                <a:sym typeface="Century Gothic"/>
+              </a:rPr>
+              <a:t>Appendix: Sources</a:t>
+            </a:r>
+            <a:endParaRPr sz="2800">
+              <a:solidFill>
+                <a:schemeClr val="lt1"/>
+              </a:solidFill>
+              <a:latin typeface="Century Gothic"/>
+              <a:ea typeface="Century Gothic"/>
+              <a:cs typeface="Century Gothic"/>
+              <a:sym typeface="Century Gothic"/>
+            </a:endParaRPr>
+          </a:p>
+        </p:txBody>
+      </p:sp>
+      <p:pic>
+        <p:nvPicPr>
+          <p:cNvPr id="319" name="Google Shape;319;g3d18e836f13_0_19" title="sources.png"/>
+          <p:cNvPicPr preferRelativeResize="0"/>
+          <p:nvPr/>
+        </p:nvPicPr>
+        <p:blipFill>
+          <a:blip r:embed="rId4">
+            <a:alphaModFix/>
+          </a:blip>
+          <a:stretch>
+            <a:fillRect/>
+          </a:stretch>
+        </p:blipFill>
+        <p:spPr>
+          <a:xfrm>
+            <a:off x="2324313" y="736275"/>
+            <a:ext cx="7300274" cy="5806174"/>
+          </a:xfrm>
+          <a:prstGeom prst="rect">
+            <a:avLst/>
+          </a:prstGeom>
           <a:noFill/>
           <a:ln>
             <a:noFill/>
@@ -26667,9 +32561,2056 @@
           <a:chExt cx="0" cy="0"/>
         </a:xfrm>
       </p:grpSpPr>
+      <p:sp>
+        <p:nvSpPr>
+          <p:cNvPr id="183" name="Google Shape;183;g3cdd6918926_0_6"/>
+          <p:cNvSpPr txBox="1"/>
+          <p:nvPr/>
+        </p:nvSpPr>
+        <p:spPr>
+          <a:xfrm>
+            <a:off x="2091475" y="2269800"/>
+            <a:ext cx="7506600" cy="3879000"/>
+          </a:xfrm>
+          <a:prstGeom prst="rect">
+            <a:avLst/>
+          </a:prstGeom>
+          <a:noFill/>
+          <a:ln>
+            <a:noFill/>
+          </a:ln>
+        </p:spPr>
+        <p:txBody>
+          <a:bodyPr anchorCtr="0" anchor="t" bIns="91425" lIns="91425" spcFirstLastPara="1" rIns="91425" wrap="square" tIns="91425">
+            <a:spAutoFit/>
+          </a:bodyPr>
+          <a:lstStyle/>
+          <a:p>
+            <a:pPr indent="0" lvl="0" marL="0" rtl="0" algn="l">
+              <a:spcBef>
+                <a:spcPts val="0"/>
+              </a:spcBef>
+              <a:spcAft>
+                <a:spcPts val="0"/>
+              </a:spcAft>
+              <a:buNone/>
+            </a:pPr>
+            <a:r>
+              <a:rPr lang="en-US" sz="2000">
+                <a:solidFill>
+                  <a:schemeClr val="lt1"/>
+                </a:solidFill>
+              </a:rPr>
+              <a:t>[@2. Vibrissea filisporia (Bonord.) Korf &amp; A. Sánchez f.</a:t>
+            </a:r>
+            <a:endParaRPr sz="2000">
+              <a:solidFill>
+                <a:schemeClr val="lt1"/>
+              </a:solidFill>
+            </a:endParaRPr>
+          </a:p>
+          <a:p>
+            <a:pPr indent="0" lvl="0" marL="0" rtl="0" algn="l">
+              <a:spcBef>
+                <a:spcPts val="0"/>
+              </a:spcBef>
+              <a:spcAft>
+                <a:spcPts val="0"/>
+              </a:spcAft>
+              <a:buNone/>
+            </a:pPr>
+            <a:r>
+              <a:rPr lang="en-US" sz="2000">
+                <a:solidFill>
+                  <a:schemeClr val="lt1"/>
+                </a:solidFill>
+              </a:rPr>
+              <a:t>boudieri A. Sánchez &amp; Korf in Sánchez, J. Agric.</a:t>
+            </a:r>
+            <a:endParaRPr sz="2000">
+              <a:solidFill>
+                <a:schemeClr val="lt1"/>
+              </a:solidFill>
+            </a:endParaRPr>
+          </a:p>
+          <a:p>
+            <a:pPr indent="0" lvl="0" marL="0" rtl="0" algn="l">
+              <a:spcBef>
+                <a:spcPts val="0"/>
+              </a:spcBef>
+              <a:spcAft>
+                <a:spcPts val="0"/>
+              </a:spcAft>
+              <a:buNone/>
+            </a:pPr>
+            <a:r>
+              <a:rPr lang="en-US" sz="2000">
+                <a:solidFill>
+                  <a:schemeClr val="lt1"/>
+                </a:solidFill>
+              </a:rPr>
+              <a:t>Univ. Puerto Rico 51: 83, 1967.</a:t>
+            </a:r>
+            <a:endParaRPr sz="2000">
+              <a:solidFill>
+                <a:schemeClr val="lt1"/>
+              </a:solidFill>
+            </a:endParaRPr>
+          </a:p>
+          <a:p>
+            <a:pPr indent="0" lvl="0" marL="0" rtl="0" algn="l">
+              <a:spcBef>
+                <a:spcPts val="0"/>
+              </a:spcBef>
+              <a:spcAft>
+                <a:spcPts val="0"/>
+              </a:spcAft>
+              <a:buNone/>
+            </a:pPr>
+            <a:r>
+              <a:rPr lang="en-US" sz="2000">
+                <a:solidFill>
+                  <a:schemeClr val="lt1"/>
+                </a:solidFill>
+              </a:rPr>
+              <a:t>FIGS. 3, 4 &amp; 5.#Nomenclature*]</a:t>
+            </a:r>
+            <a:endParaRPr sz="2000">
+              <a:solidFill>
+                <a:schemeClr val="lt1"/>
+              </a:solidFill>
+            </a:endParaRPr>
+          </a:p>
+          <a:p>
+            <a:pPr indent="0" lvl="0" marL="0" rtl="0" algn="l">
+              <a:spcBef>
+                <a:spcPts val="0"/>
+              </a:spcBef>
+              <a:spcAft>
+                <a:spcPts val="0"/>
+              </a:spcAft>
+              <a:buNone/>
+            </a:pPr>
+            <a:r>
+              <a:t/>
+            </a:r>
+            <a:endParaRPr sz="2000">
+              <a:solidFill>
+                <a:schemeClr val="lt1"/>
+              </a:solidFill>
+            </a:endParaRPr>
+          </a:p>
+          <a:p>
+            <a:pPr indent="0" lvl="0" marL="0" rtl="0" algn="l">
+              <a:spcBef>
+                <a:spcPts val="0"/>
+              </a:spcBef>
+              <a:spcAft>
+                <a:spcPts val="0"/>
+              </a:spcAft>
+              <a:buNone/>
+            </a:pPr>
+            <a:r>
+              <a:rPr lang="en-US" sz="2000">
+                <a:solidFill>
+                  <a:schemeClr val="lt1"/>
+                </a:solidFill>
+              </a:rPr>
+              <a:t>[@APOTHECIA sessile, discoid, 0.75-1 mm in diameter.</a:t>
+            </a:r>
+            <a:endParaRPr sz="2000">
+              <a:solidFill>
+                <a:schemeClr val="lt1"/>
+              </a:solidFill>
+            </a:endParaRPr>
+          </a:p>
+          <a:p>
+            <a:pPr indent="0" lvl="0" marL="0" rtl="0" algn="l">
+              <a:spcBef>
+                <a:spcPts val="0"/>
+              </a:spcBef>
+              <a:spcAft>
+                <a:spcPts val="0"/>
+              </a:spcAft>
+              <a:buNone/>
+            </a:pPr>
+            <a:r>
+              <a:rPr lang="en-US" sz="2000">
+                <a:solidFill>
+                  <a:schemeClr val="lt1"/>
+                </a:solidFill>
+              </a:rPr>
+              <a:t>RECEPTACLE brown. DISC convex, buff when rehydrated.</a:t>
+            </a:r>
+            <a:endParaRPr sz="2000">
+              <a:solidFill>
+                <a:schemeClr val="lt1"/>
+              </a:solidFill>
+            </a:endParaRPr>
+          </a:p>
+          <a:p>
+            <a:pPr indent="0" lvl="0" marL="0" rtl="0" algn="l">
+              <a:spcBef>
+                <a:spcPts val="0"/>
+              </a:spcBef>
+              <a:spcAft>
+                <a:spcPts val="0"/>
+              </a:spcAft>
+              <a:buNone/>
+            </a:pPr>
+            <a:r>
+              <a:rPr lang="en-US" sz="2000">
+                <a:solidFill>
+                  <a:schemeClr val="lt1"/>
+                </a:solidFill>
+              </a:rPr>
+              <a:t>HYMENIUM making up to 3/4 of the apothecium, asci taking up</a:t>
+            </a:r>
+            <a:endParaRPr sz="2000">
+              <a:solidFill>
+                <a:schemeClr val="lt1"/>
+              </a:solidFill>
+            </a:endParaRPr>
+          </a:p>
+          <a:p>
+            <a:pPr indent="0" lvl="0" marL="0" rtl="0" algn="l">
+              <a:spcBef>
+                <a:spcPts val="0"/>
+              </a:spcBef>
+              <a:spcAft>
+                <a:spcPts val="0"/>
+              </a:spcAft>
+              <a:buNone/>
+            </a:pPr>
+            <a:r>
+              <a:rPr lang="en-US" sz="2000">
+                <a:solidFill>
+                  <a:schemeClr val="lt1"/>
+                </a:solidFill>
+              </a:rPr>
+              <a:t>most of the height. ECTAL EXCIPULUM brown, 65.3-76.4 µm</a:t>
+            </a:r>
+            <a:endParaRPr sz="2000">
+              <a:solidFill>
+                <a:schemeClr val="lt1"/>
+              </a:solidFill>
+            </a:endParaRPr>
+          </a:p>
+          <a:p>
+            <a:pPr indent="0" lvl="0" marL="0" rtl="0" algn="l">
+              <a:spcBef>
+                <a:spcPts val="0"/>
+              </a:spcBef>
+              <a:spcAft>
+                <a:spcPts val="0"/>
+              </a:spcAft>
+              <a:buNone/>
+            </a:pPr>
+            <a:r>
+              <a:rPr lang="en-US" sz="2000">
+                <a:solidFill>
+                  <a:schemeClr val="lt1"/>
+                </a:solidFill>
+              </a:rPr>
+              <a:t>wide, of textura globulosa, with cells turning outwards#Description*]</a:t>
+            </a:r>
+            <a:endParaRPr sz="2000">
+              <a:solidFill>
+                <a:schemeClr val="lt1"/>
+              </a:solidFill>
+            </a:endParaRPr>
+          </a:p>
+          <a:p>
+            <a:pPr indent="0" lvl="0" marL="0" rtl="0" algn="l">
+              <a:spcBef>
+                <a:spcPts val="0"/>
+              </a:spcBef>
+              <a:spcAft>
+                <a:spcPts val="0"/>
+              </a:spcAft>
+              <a:buNone/>
+            </a:pPr>
+            <a:r>
+              <a:t/>
+            </a:r>
+            <a:endParaRPr sz="2000">
+              <a:solidFill>
+                <a:schemeClr val="lt1"/>
+              </a:solidFill>
+            </a:endParaRPr>
+          </a:p>
+        </p:txBody>
+      </p:sp>
+      <p:sp>
+        <p:nvSpPr>
+          <p:cNvPr id="184" name="Google Shape;184;g3cdd6918926_0_6"/>
+          <p:cNvSpPr txBox="1"/>
+          <p:nvPr/>
+        </p:nvSpPr>
+        <p:spPr>
+          <a:xfrm>
+            <a:off x="2010375" y="713350"/>
+            <a:ext cx="5501700" cy="859200"/>
+          </a:xfrm>
+          <a:prstGeom prst="rect">
+            <a:avLst/>
+          </a:prstGeom>
+          <a:noFill/>
+          <a:ln>
+            <a:noFill/>
+          </a:ln>
+        </p:spPr>
+        <p:txBody>
+          <a:bodyPr anchorCtr="0" anchor="t" bIns="91425" lIns="91425" spcFirstLastPara="1" rIns="91425" wrap="square" tIns="91425">
+            <a:noAutofit/>
+          </a:bodyPr>
+          <a:lstStyle/>
+          <a:p>
+            <a:pPr indent="0" lvl="0" marL="0" rtl="0" algn="l">
+              <a:spcBef>
+                <a:spcPts val="0"/>
+              </a:spcBef>
+              <a:spcAft>
+                <a:spcPts val="0"/>
+              </a:spcAft>
+              <a:buNone/>
+            </a:pPr>
+            <a:r>
+              <a:rPr lang="en-US" sz="3000">
+                <a:solidFill>
+                  <a:schemeClr val="lt1"/>
+                </a:solidFill>
+                <a:latin typeface="Century Gothic"/>
+                <a:ea typeface="Century Gothic"/>
+                <a:cs typeface="Century Gothic"/>
+                <a:sym typeface="Century Gothic"/>
+              </a:rPr>
+              <a:t>YEDDA Annotation (Classification)</a:t>
+            </a:r>
+            <a:endParaRPr sz="3000">
+              <a:solidFill>
+                <a:schemeClr val="lt1"/>
+              </a:solidFill>
+              <a:latin typeface="Century Gothic"/>
+              <a:ea typeface="Century Gothic"/>
+              <a:cs typeface="Century Gothic"/>
+              <a:sym typeface="Century Gothic"/>
+            </a:endParaRPr>
+          </a:p>
+        </p:txBody>
+      </p:sp>
       <p:pic>
         <p:nvPicPr>
-          <p:cNvPr id="183" name="Google Shape;183;g3cd5945c579_0_106" title="skol_ui.png"/>
+          <p:cNvPr id="185" name="Google Shape;185;g3cdd6918926_0_6" title="classification.png"/>
+          <p:cNvPicPr preferRelativeResize="0"/>
+          <p:nvPr/>
+        </p:nvPicPr>
+        <p:blipFill>
+          <a:blip r:embed="rId3">
+            <a:alphaModFix/>
+          </a:blip>
+          <a:stretch>
+            <a:fillRect/>
+          </a:stretch>
+        </p:blipFill>
+        <p:spPr>
+          <a:xfrm>
+            <a:off x="10328325" y="5871175"/>
+            <a:ext cx="1600200" cy="666750"/>
+          </a:xfrm>
+          <a:prstGeom prst="rect">
+            <a:avLst/>
+          </a:prstGeom>
+          <a:noFill/>
+          <a:ln>
+            <a:noFill/>
+          </a:ln>
+        </p:spPr>
+      </p:pic>
+    </p:spTree>
+  </p:cSld>
+  <p:clrMapOvr>
+    <a:masterClrMapping/>
+  </p:clrMapOvr>
+</p:sld>
+</file>
+
+<file path=ppt/slides/slide5.xml><?xml version="1.0" encoding="utf-8"?>
+<p:sld xmlns:a="http://schemas.openxmlformats.org/drawingml/2006/main" xmlns:r="http://schemas.openxmlformats.org/officeDocument/2006/relationships" xmlns:mc="http://schemas.openxmlformats.org/markup-compatibility/2006" xmlns:mv="urn:schemas-microsoft-com:mac:vml" xmlns:p="http://schemas.openxmlformats.org/presentationml/2006/main" xmlns:c="http://schemas.openxmlformats.org/drawingml/2006/chart" xmlns:dgm="http://schemas.openxmlformats.org/drawingml/2006/diagram" xmlns:o="urn:schemas-microsoft-com:office:office" xmlns:v="urn:schemas-microsoft-com:vml" xmlns:pvml="urn:schemas-microsoft-com:office:powerpoint" xmlns:com="http://schemas.openxmlformats.org/drawingml/2006/compatibility" xmlns:p14="http://schemas.microsoft.com/office/powerpoint/2010/main" xmlns:p15="http://schemas.microsoft.com/office/powerpoint/2012/main" xmlns:ahyp="http://schemas.microsoft.com/office/drawing/2018/hyperlinkcolor">
+  <p:cSld>
+    <p:spTree>
+      <p:nvGrpSpPr>
+        <p:cNvPr id="190" name="Shape 190"/>
+        <p:cNvGrpSpPr/>
+        <p:nvPr/>
+      </p:nvGrpSpPr>
+      <p:grpSpPr>
+        <a:xfrm>
+          <a:off x="0" y="0"/>
+          <a:ext cx="0" cy="0"/>
+          <a:chOff x="0" y="0"/>
+          <a:chExt cx="0" cy="0"/>
+        </a:xfrm>
+      </p:grpSpPr>
+      <p:pic>
+        <p:nvPicPr>
+          <p:cNvPr id="191" name="Google Shape;191;g3cdd6918926_0_16" title="Embedding.png"/>
+          <p:cNvPicPr preferRelativeResize="0"/>
+          <p:nvPr/>
+        </p:nvPicPr>
+        <p:blipFill>
+          <a:blip r:embed="rId3">
+            <a:alphaModFix/>
+          </a:blip>
+          <a:stretch>
+            <a:fillRect/>
+          </a:stretch>
+        </p:blipFill>
+        <p:spPr>
+          <a:xfrm>
+            <a:off x="10297225" y="5884475"/>
+            <a:ext cx="1466850" cy="638175"/>
+          </a:xfrm>
+          <a:prstGeom prst="rect">
+            <a:avLst/>
+          </a:prstGeom>
+          <a:noFill/>
+          <a:ln>
+            <a:noFill/>
+          </a:ln>
+        </p:spPr>
+      </p:pic>
+      <p:pic>
+        <p:nvPicPr>
+          <p:cNvPr id="192" name="Google Shape;192;g3cdd6918926_0_16" title="sbert_logo.png"/>
+          <p:cNvPicPr preferRelativeResize="0"/>
+          <p:nvPr/>
+        </p:nvPicPr>
+        <p:blipFill>
+          <a:blip r:embed="rId4">
+            <a:alphaModFix/>
+          </a:blip>
+          <a:stretch>
+            <a:fillRect/>
+          </a:stretch>
+        </p:blipFill>
+        <p:spPr>
+          <a:xfrm>
+            <a:off x="336825" y="2615400"/>
+            <a:ext cx="6973901" cy="3486950"/>
+          </a:xfrm>
+          <a:prstGeom prst="rect">
+            <a:avLst/>
+          </a:prstGeom>
+          <a:noFill/>
+          <a:ln>
+            <a:noFill/>
+          </a:ln>
+        </p:spPr>
+      </p:pic>
+      <p:sp>
+        <p:nvSpPr>
+          <p:cNvPr id="193" name="Google Shape;193;g3cdd6918926_0_16"/>
+          <p:cNvSpPr txBox="1"/>
+          <p:nvPr/>
+        </p:nvSpPr>
+        <p:spPr>
+          <a:xfrm>
+            <a:off x="955775" y="1307100"/>
+            <a:ext cx="9272700" cy="1308300"/>
+          </a:xfrm>
+          <a:prstGeom prst="rect">
+            <a:avLst/>
+          </a:prstGeom>
+          <a:noFill/>
+          <a:ln>
+            <a:noFill/>
+          </a:ln>
+        </p:spPr>
+        <p:txBody>
+          <a:bodyPr anchorCtr="0" anchor="t" bIns="91425" lIns="91425" spcFirstLastPara="1" rIns="91425" wrap="square" tIns="91425">
+            <a:spAutoFit/>
+          </a:bodyPr>
+          <a:lstStyle/>
+          <a:p>
+            <a:pPr indent="0" lvl="0" marL="0" rtl="0" algn="l">
+              <a:lnSpc>
+                <a:spcPct val="125000"/>
+              </a:lnSpc>
+              <a:spcBef>
+                <a:spcPts val="0"/>
+              </a:spcBef>
+              <a:spcAft>
+                <a:spcPts val="0"/>
+              </a:spcAft>
+              <a:buNone/>
+            </a:pPr>
+            <a:r>
+              <a:rPr b="1" lang="en-US" sz="2800">
+                <a:solidFill>
+                  <a:srgbClr val="1F2328"/>
+                </a:solidFill>
+                <a:highlight>
+                  <a:srgbClr val="FFFFFF"/>
+                </a:highlight>
+              </a:rPr>
+              <a:t>Dr Draft's state-of-the-art (SOTA) Literature Search</a:t>
+            </a:r>
+            <a:endParaRPr b="1" sz="2800">
+              <a:solidFill>
+                <a:srgbClr val="1F2328"/>
+              </a:solidFill>
+              <a:highlight>
+                <a:srgbClr val="FFFFFF"/>
+              </a:highlight>
+            </a:endParaRPr>
+          </a:p>
+          <a:p>
+            <a:pPr indent="0" lvl="0" marL="0" rtl="0" algn="l">
+              <a:lnSpc>
+                <a:spcPct val="115000"/>
+              </a:lnSpc>
+              <a:spcBef>
+                <a:spcPts val="1200"/>
+              </a:spcBef>
+              <a:spcAft>
+                <a:spcPts val="0"/>
+              </a:spcAft>
+              <a:buNone/>
+            </a:pPr>
+            <a:r>
+              <a:t/>
+            </a:r>
+            <a:endParaRPr sz="2800">
+              <a:solidFill>
+                <a:srgbClr val="1F2328"/>
+              </a:solidFill>
+              <a:highlight>
+                <a:srgbClr val="FFFFFF"/>
+              </a:highlight>
+            </a:endParaRPr>
+          </a:p>
+        </p:txBody>
+      </p:sp>
+    </p:spTree>
+  </p:cSld>
+  <p:clrMapOvr>
+    <a:masterClrMapping/>
+  </p:clrMapOvr>
+</p:sld>
+</file>
+
+<file path=ppt/slides/slide6.xml><?xml version="1.0" encoding="utf-8"?>
+<p:sld xmlns:a="http://schemas.openxmlformats.org/drawingml/2006/main" xmlns:r="http://schemas.openxmlformats.org/officeDocument/2006/relationships" xmlns:mc="http://schemas.openxmlformats.org/markup-compatibility/2006" xmlns:mv="urn:schemas-microsoft-com:mac:vml" xmlns:p="http://schemas.openxmlformats.org/presentationml/2006/main" xmlns:c="http://schemas.openxmlformats.org/drawingml/2006/chart" xmlns:dgm="http://schemas.openxmlformats.org/drawingml/2006/diagram" xmlns:o="urn:schemas-microsoft-com:office:office" xmlns:v="urn:schemas-microsoft-com:vml" xmlns:pvml="urn:schemas-microsoft-com:office:powerpoint" xmlns:com="http://schemas.openxmlformats.org/drawingml/2006/compatibility" xmlns:p14="http://schemas.microsoft.com/office/powerpoint/2010/main" xmlns:p15="http://schemas.microsoft.com/office/powerpoint/2012/main" xmlns:ahyp="http://schemas.microsoft.com/office/drawing/2018/hyperlinkcolor">
+  <p:cSld>
+    <p:spTree>
+      <p:nvGrpSpPr>
+        <p:cNvPr id="198" name="Shape 198"/>
+        <p:cNvGrpSpPr/>
+        <p:nvPr/>
+      </p:nvGrpSpPr>
+      <p:grpSpPr>
+        <a:xfrm>
+          <a:off x="0" y="0"/>
+          <a:ext cx="0" cy="0"/>
+          <a:chOff x="0" y="0"/>
+          <a:chExt cx="0" cy="0"/>
+        </a:xfrm>
+      </p:grpSpPr>
+      <p:pic>
+        <p:nvPicPr>
+          <p:cNvPr id="199" name="Google Shape;199;g3cdd6918926_0_12" title="Description_to_JSON.png"/>
+          <p:cNvPicPr preferRelativeResize="0"/>
+          <p:nvPr/>
+        </p:nvPicPr>
+        <p:blipFill>
+          <a:blip r:embed="rId3">
+            <a:alphaModFix/>
+          </a:blip>
+          <a:stretch>
+            <a:fillRect/>
+          </a:stretch>
+        </p:blipFill>
+        <p:spPr>
+          <a:xfrm>
+            <a:off x="9933300" y="5929975"/>
+            <a:ext cx="2076450" cy="695325"/>
+          </a:xfrm>
+          <a:prstGeom prst="rect">
+            <a:avLst/>
+          </a:prstGeom>
+          <a:noFill/>
+          <a:ln>
+            <a:noFill/>
+          </a:ln>
+        </p:spPr>
+      </p:pic>
+      <p:sp>
+        <p:nvSpPr>
+          <p:cNvPr id="200" name="Google Shape;200;g3cdd6918926_0_12"/>
+          <p:cNvSpPr txBox="1"/>
+          <p:nvPr/>
+        </p:nvSpPr>
+        <p:spPr>
+          <a:xfrm>
+            <a:off x="0" y="2367075"/>
+            <a:ext cx="6420300" cy="3201600"/>
+          </a:xfrm>
+          <a:prstGeom prst="rect">
+            <a:avLst/>
+          </a:prstGeom>
+          <a:noFill/>
+          <a:ln>
+            <a:noFill/>
+          </a:ln>
+        </p:spPr>
+        <p:txBody>
+          <a:bodyPr anchorCtr="0" anchor="t" bIns="91425" lIns="91425" spcFirstLastPara="1" rIns="91425" wrap="square" tIns="91425">
+            <a:spAutoFit/>
+          </a:bodyPr>
+          <a:lstStyle/>
+          <a:p>
+            <a:pPr indent="0" lvl="0" marL="0" rtl="0" algn="l">
+              <a:spcBef>
+                <a:spcPts val="0"/>
+              </a:spcBef>
+              <a:spcAft>
+                <a:spcPts val="0"/>
+              </a:spcAft>
+              <a:buNone/>
+            </a:pPr>
+            <a:r>
+              <a:rPr lang="en-US">
+                <a:solidFill>
+                  <a:schemeClr val="lt1"/>
+                </a:solidFill>
+              </a:rPr>
+              <a:t>Can you extract any attributes and their measurements from the</a:t>
+            </a:r>
+            <a:endParaRPr>
+              <a:solidFill>
+                <a:schemeClr val="lt1"/>
+              </a:solidFill>
+            </a:endParaRPr>
+          </a:p>
+          <a:p>
+            <a:pPr indent="0" lvl="0" marL="0" rtl="0" algn="l">
+              <a:spcBef>
+                <a:spcPts val="0"/>
+              </a:spcBef>
+              <a:spcAft>
+                <a:spcPts val="0"/>
+              </a:spcAft>
+              <a:buNone/>
+            </a:pPr>
+            <a:r>
+              <a:rPr lang="en-US">
+                <a:solidFill>
+                  <a:schemeClr val="lt1"/>
+                </a:solidFill>
+              </a:rPr>
+              <a:t>following description of an organism? Present the result as a json data</a:t>
+            </a:r>
+            <a:endParaRPr>
+              <a:solidFill>
+                <a:schemeClr val="lt1"/>
+              </a:solidFill>
+            </a:endParaRPr>
+          </a:p>
+          <a:p>
+            <a:pPr indent="0" lvl="0" marL="0" rtl="0" algn="l">
+              <a:spcBef>
+                <a:spcPts val="0"/>
+              </a:spcBef>
+              <a:spcAft>
+                <a:spcPts val="0"/>
+              </a:spcAft>
+              <a:buNone/>
+            </a:pPr>
+            <a:r>
+              <a:rPr lang="en-US">
+                <a:solidFill>
+                  <a:schemeClr val="lt1"/>
+                </a:solidFill>
+              </a:rPr>
+              <a:t>structure.</a:t>
+            </a:r>
+            <a:endParaRPr>
+              <a:solidFill>
+                <a:schemeClr val="lt1"/>
+              </a:solidFill>
+            </a:endParaRPr>
+          </a:p>
+          <a:p>
+            <a:pPr indent="0" lvl="0" marL="0" rtl="0" algn="l">
+              <a:spcBef>
+                <a:spcPts val="0"/>
+              </a:spcBef>
+              <a:spcAft>
+                <a:spcPts val="0"/>
+              </a:spcAft>
+              <a:buNone/>
+            </a:pPr>
+            <a:r>
+              <a:rPr lang="en-US">
+                <a:solidFill>
+                  <a:schemeClr val="lt1"/>
+                </a:solidFill>
+              </a:rPr>
+              <a:t>Mycelium on the substrate is medium orange-brown, septate, 3-4 µm</a:t>
+            </a:r>
+            <a:endParaRPr>
+              <a:solidFill>
+                <a:schemeClr val="lt1"/>
+              </a:solidFill>
+            </a:endParaRPr>
+          </a:p>
+          <a:p>
+            <a:pPr indent="0" lvl="0" marL="0" rtl="0" algn="l">
+              <a:spcBef>
+                <a:spcPts val="0"/>
+              </a:spcBef>
+              <a:spcAft>
+                <a:spcPts val="0"/>
+              </a:spcAft>
+              <a:buNone/>
+            </a:pPr>
+            <a:r>
+              <a:rPr lang="en-US">
+                <a:solidFill>
+                  <a:schemeClr val="lt1"/>
+                </a:solidFill>
+              </a:rPr>
+              <a:t>diam., often distinctly and coarsely rough; hyphae often run parallel to the</a:t>
+            </a:r>
+            <a:endParaRPr>
+              <a:solidFill>
+                <a:schemeClr val="lt1"/>
+              </a:solidFill>
+            </a:endParaRPr>
+          </a:p>
+          <a:p>
+            <a:pPr indent="0" lvl="0" marL="0" rtl="0" algn="l">
+              <a:spcBef>
+                <a:spcPts val="0"/>
+              </a:spcBef>
+              <a:spcAft>
+                <a:spcPts val="0"/>
+              </a:spcAft>
+              <a:buNone/>
+            </a:pPr>
+            <a:r>
+              <a:rPr lang="en-US">
+                <a:solidFill>
+                  <a:schemeClr val="lt1"/>
+                </a:solidFill>
+              </a:rPr>
+              <a:t>long axis of cells in substrate tissue but usually branch on the exterior and</a:t>
+            </a:r>
+            <a:endParaRPr>
+              <a:solidFill>
+                <a:schemeClr val="lt1"/>
+              </a:solidFill>
+            </a:endParaRPr>
+          </a:p>
+          <a:p>
+            <a:pPr indent="0" lvl="0" marL="0" rtl="0" algn="l">
+              <a:spcBef>
+                <a:spcPts val="0"/>
+              </a:spcBef>
+              <a:spcAft>
+                <a:spcPts val="0"/>
+              </a:spcAft>
+              <a:buNone/>
+            </a:pPr>
+            <a:r>
+              <a:rPr lang="en-US">
+                <a:solidFill>
+                  <a:schemeClr val="lt1"/>
+                </a:solidFill>
+              </a:rPr>
+              <a:t>appear as a non-patterned network. Sporulation units are produced as</a:t>
+            </a:r>
+            <a:endParaRPr>
+              <a:solidFill>
+                <a:schemeClr val="lt1"/>
+              </a:solidFill>
+            </a:endParaRPr>
+          </a:p>
+          <a:p>
+            <a:pPr indent="0" lvl="0" marL="0" rtl="0" algn="l">
+              <a:spcBef>
+                <a:spcPts val="0"/>
+              </a:spcBef>
+              <a:spcAft>
+                <a:spcPts val="0"/>
+              </a:spcAft>
+              <a:buNone/>
+            </a:pPr>
+            <a:r>
+              <a:rPr lang="en-US">
+                <a:solidFill>
+                  <a:schemeClr val="lt1"/>
+                </a:solidFill>
+              </a:rPr>
+              <a:t>enlarging tips of short branches, at first concolorous with surface</a:t>
+            </a:r>
+            <a:endParaRPr>
+              <a:solidFill>
+                <a:schemeClr val="lt1"/>
+              </a:solidFill>
+            </a:endParaRPr>
+          </a:p>
+          <a:p>
+            <a:pPr indent="0" lvl="0" marL="0" rtl="0" algn="l">
+              <a:spcBef>
+                <a:spcPts val="0"/>
+              </a:spcBef>
+              <a:spcAft>
+                <a:spcPts val="0"/>
+              </a:spcAft>
+              <a:buNone/>
+            </a:pPr>
+            <a:r>
+              <a:rPr lang="en-US">
+                <a:solidFill>
+                  <a:schemeClr val="lt1"/>
+                </a:solidFill>
+              </a:rPr>
+              <a:t>mycelium but soon dark orange-brown and finally black-brown and</a:t>
+            </a:r>
+            <a:endParaRPr>
+              <a:solidFill>
+                <a:schemeClr val="lt1"/>
+              </a:solidFill>
+            </a:endParaRPr>
+          </a:p>
+          <a:p>
+            <a:pPr indent="0" lvl="0" marL="0" rtl="0" algn="l">
+              <a:spcBef>
+                <a:spcPts val="0"/>
+              </a:spcBef>
+              <a:spcAft>
+                <a:spcPts val="0"/>
+              </a:spcAft>
+              <a:buNone/>
+            </a:pPr>
+            <a:r>
+              <a:rPr lang="en-US">
+                <a:solidFill>
+                  <a:schemeClr val="lt1"/>
+                </a:solidFill>
+              </a:rPr>
+              <a:t>opaque. In type material an occasional enlarging branch can be seen</a:t>
+            </a:r>
+            <a:endParaRPr>
+              <a:solidFill>
+                <a:schemeClr val="lt1"/>
+              </a:solidFill>
+            </a:endParaRPr>
+          </a:p>
+          <a:p>
+            <a:pPr indent="0" lvl="0" marL="0" rtl="0" algn="l">
+              <a:spcBef>
+                <a:spcPts val="0"/>
+              </a:spcBef>
+              <a:spcAft>
+                <a:spcPts val="0"/>
+              </a:spcAft>
+              <a:buNone/>
+            </a:pPr>
+            <a:r>
+              <a:rPr lang="en-US">
+                <a:solidFill>
+                  <a:schemeClr val="lt1"/>
+                </a:solidFill>
+              </a:rPr>
+              <a:t>attached to the hypha from which it developed; in most instances,</a:t>
+            </a:r>
+            <a:endParaRPr>
+              <a:solidFill>
+                <a:schemeClr val="lt1"/>
+              </a:solidFill>
+            </a:endParaRPr>
+          </a:p>
+          <a:p>
+            <a:pPr indent="0" lvl="0" marL="0" rtl="0" algn="l">
+              <a:spcBef>
+                <a:spcPts val="0"/>
+              </a:spcBef>
+              <a:spcAft>
+                <a:spcPts val="0"/>
+              </a:spcAft>
+              <a:buNone/>
+            </a:pPr>
+            <a:r>
+              <a:rPr lang="en-US">
+                <a:solidFill>
+                  <a:schemeClr val="lt1"/>
+                </a:solidFill>
+              </a:rPr>
+              <a:t>however, the enlarged branch elements have broken loose from the</a:t>
+            </a:r>
+            <a:endParaRPr>
+              <a:solidFill>
+                <a:schemeClr val="lt1"/>
+              </a:solidFill>
+            </a:endParaRPr>
+          </a:p>
+          <a:p>
+            <a:pPr indent="0" lvl="0" marL="0" rtl="0" algn="l">
+              <a:spcBef>
+                <a:spcPts val="0"/>
+              </a:spcBef>
+              <a:spcAft>
+                <a:spcPts val="0"/>
+              </a:spcAft>
+              <a:buNone/>
+            </a:pPr>
+            <a:r>
+              <a:rPr lang="en-US">
+                <a:solidFill>
+                  <a:schemeClr val="lt1"/>
+                </a:solidFill>
+              </a:rPr>
+              <a:t>mycelium or are so densely crowded on the substrate and so nearly opaque</a:t>
+            </a:r>
+            <a:endParaRPr>
+              <a:solidFill>
+                <a:schemeClr val="lt1"/>
+              </a:solidFill>
+            </a:endParaRPr>
+          </a:p>
+          <a:p>
+            <a:pPr indent="0" lvl="0" marL="0" rtl="0" algn="l">
+              <a:spcBef>
+                <a:spcPts val="0"/>
+              </a:spcBef>
+              <a:spcAft>
+                <a:spcPts val="0"/>
+              </a:spcAft>
+              <a:buNone/>
+            </a:pPr>
+            <a:r>
+              <a:rPr lang="en-US">
+                <a:solidFill>
+                  <a:schemeClr val="lt1"/>
+                </a:solidFill>
+              </a:rPr>
+              <a:t>that points of attachment cannot be traced</a:t>
+            </a:r>
+            <a:endParaRPr>
+              <a:solidFill>
+                <a:schemeClr val="lt1"/>
+              </a:solidFill>
+            </a:endParaRPr>
+          </a:p>
+        </p:txBody>
+      </p:sp>
+      <p:sp>
+        <p:nvSpPr>
+          <p:cNvPr id="201" name="Google Shape;201;g3cdd6918926_0_12"/>
+          <p:cNvSpPr txBox="1"/>
+          <p:nvPr/>
+        </p:nvSpPr>
+        <p:spPr>
+          <a:xfrm>
+            <a:off x="5869025" y="470100"/>
+            <a:ext cx="5771700" cy="6387900"/>
+          </a:xfrm>
+          <a:prstGeom prst="rect">
+            <a:avLst/>
+          </a:prstGeom>
+          <a:noFill/>
+          <a:ln>
+            <a:noFill/>
+          </a:ln>
+        </p:spPr>
+        <p:txBody>
+          <a:bodyPr anchorCtr="0" anchor="t" bIns="91425" lIns="91425" spcFirstLastPara="1" rIns="91425" wrap="square" tIns="91425">
+            <a:spAutoFit/>
+          </a:bodyPr>
+          <a:lstStyle/>
+          <a:p>
+            <a:pPr indent="0" lvl="0" marL="0" rtl="0" algn="l">
+              <a:spcBef>
+                <a:spcPts val="0"/>
+              </a:spcBef>
+              <a:spcAft>
+                <a:spcPts val="0"/>
+              </a:spcAft>
+              <a:buNone/>
+            </a:pPr>
+            <a:r>
+              <a:rPr lang="en-US" sz="1300">
+                <a:solidFill>
+                  <a:schemeClr val="lt1"/>
+                </a:solidFill>
+              </a:rPr>
+              <a:t>{</a:t>
+            </a:r>
+            <a:endParaRPr sz="1300">
+              <a:solidFill>
+                <a:schemeClr val="lt1"/>
+              </a:solidFill>
+            </a:endParaRPr>
+          </a:p>
+          <a:p>
+            <a:pPr indent="0" lvl="0" marL="0" rtl="0" algn="l">
+              <a:spcBef>
+                <a:spcPts val="0"/>
+              </a:spcBef>
+              <a:spcAft>
+                <a:spcPts val="0"/>
+              </a:spcAft>
+              <a:buNone/>
+            </a:pPr>
+            <a:r>
+              <a:rPr lang="en-US" sz="1300">
+                <a:solidFill>
+                  <a:schemeClr val="lt1"/>
+                </a:solidFill>
+              </a:rPr>
+              <a:t>    "mycelium": {</a:t>
+            </a:r>
+            <a:endParaRPr sz="1300">
+              <a:solidFill>
+                <a:schemeClr val="lt1"/>
+              </a:solidFill>
+            </a:endParaRPr>
+          </a:p>
+          <a:p>
+            <a:pPr indent="0" lvl="0" marL="0" rtl="0" algn="l">
+              <a:spcBef>
+                <a:spcPts val="0"/>
+              </a:spcBef>
+              <a:spcAft>
+                <a:spcPts val="0"/>
+              </a:spcAft>
+              <a:buNone/>
+            </a:pPr>
+            <a:r>
+              <a:rPr lang="en-US" sz="1300">
+                <a:solidFill>
+                  <a:schemeClr val="lt1"/>
+                </a:solidFill>
+              </a:rPr>
+              <a:t>         "location": "on substrate",</a:t>
+            </a:r>
+            <a:endParaRPr sz="1300">
+              <a:solidFill>
+                <a:schemeClr val="lt1"/>
+              </a:solidFill>
+            </a:endParaRPr>
+          </a:p>
+          <a:p>
+            <a:pPr indent="0" lvl="0" marL="0" rtl="0" algn="l">
+              <a:spcBef>
+                <a:spcPts val="0"/>
+              </a:spcBef>
+              <a:spcAft>
+                <a:spcPts val="0"/>
+              </a:spcAft>
+              <a:buNone/>
+            </a:pPr>
+            <a:r>
+              <a:rPr lang="en-US" sz="1300">
+                <a:solidFill>
+                  <a:schemeClr val="lt1"/>
+                </a:solidFill>
+              </a:rPr>
+              <a:t>         "color": "medium orange-brown"</a:t>
+            </a:r>
+            <a:endParaRPr sz="1300">
+              <a:solidFill>
+                <a:schemeClr val="lt1"/>
+              </a:solidFill>
+            </a:endParaRPr>
+          </a:p>
+          <a:p>
+            <a:pPr indent="0" lvl="0" marL="0" rtl="0" algn="l">
+              <a:spcBef>
+                <a:spcPts val="0"/>
+              </a:spcBef>
+              <a:spcAft>
+                <a:spcPts val="0"/>
+              </a:spcAft>
+              <a:buNone/>
+            </a:pPr>
+            <a:r>
+              <a:rPr lang="en-US" sz="1300">
+                <a:solidFill>
+                  <a:schemeClr val="lt1"/>
+                </a:solidFill>
+              </a:rPr>
+              <a:t>    },</a:t>
+            </a:r>
+            <a:endParaRPr sz="1300">
+              <a:solidFill>
+                <a:schemeClr val="lt1"/>
+              </a:solidFill>
+            </a:endParaRPr>
+          </a:p>
+          <a:p>
+            <a:pPr indent="0" lvl="0" marL="0" rtl="0" algn="l">
+              <a:spcBef>
+                <a:spcPts val="0"/>
+              </a:spcBef>
+              <a:spcAft>
+                <a:spcPts val="0"/>
+              </a:spcAft>
+              <a:buNone/>
+            </a:pPr>
+            <a:r>
+              <a:rPr lang="en-US" sz="1300">
+                <a:solidFill>
+                  <a:schemeClr val="lt1"/>
+                </a:solidFill>
+              </a:rPr>
+              <a:t>    "hyphae": {</a:t>
+            </a:r>
+            <a:endParaRPr sz="1300">
+              <a:solidFill>
+                <a:schemeClr val="lt1"/>
+              </a:solidFill>
+            </a:endParaRPr>
+          </a:p>
+          <a:p>
+            <a:pPr indent="0" lvl="0" marL="0" rtl="0" algn="l">
+              <a:spcBef>
+                <a:spcPts val="0"/>
+              </a:spcBef>
+              <a:spcAft>
+                <a:spcPts val="0"/>
+              </a:spcAft>
+              <a:buNone/>
+            </a:pPr>
+            <a:r>
+              <a:rPr lang="en-US" sz="1300">
+                <a:solidFill>
+                  <a:schemeClr val="lt1"/>
+                </a:solidFill>
+              </a:rPr>
+              <a:t>         "septate": true,</a:t>
+            </a:r>
+            <a:endParaRPr sz="1300">
+              <a:solidFill>
+                <a:schemeClr val="lt1"/>
+              </a:solidFill>
+            </a:endParaRPr>
+          </a:p>
+          <a:p>
+            <a:pPr indent="0" lvl="0" marL="0" rtl="0" algn="l">
+              <a:spcBef>
+                <a:spcPts val="0"/>
+              </a:spcBef>
+              <a:spcAft>
+                <a:spcPts val="0"/>
+              </a:spcAft>
+              <a:buNone/>
+            </a:pPr>
+            <a:r>
+              <a:rPr lang="en-US" sz="1300">
+                <a:solidFill>
+                  <a:schemeClr val="lt1"/>
+                </a:solidFill>
+              </a:rPr>
+              <a:t>         "diameter_um": {</a:t>
+            </a:r>
+            <a:endParaRPr sz="1300">
+              <a:solidFill>
+                <a:schemeClr val="lt1"/>
+              </a:solidFill>
+            </a:endParaRPr>
+          </a:p>
+          <a:p>
+            <a:pPr indent="0" lvl="0" marL="0" rtl="0" algn="l">
+              <a:spcBef>
+                <a:spcPts val="0"/>
+              </a:spcBef>
+              <a:spcAft>
+                <a:spcPts val="0"/>
+              </a:spcAft>
+              <a:buNone/>
+            </a:pPr>
+            <a:r>
+              <a:rPr lang="en-US" sz="1300">
+                <a:solidFill>
+                  <a:schemeClr val="lt1"/>
+                </a:solidFill>
+              </a:rPr>
+              <a:t>              "min": 3,</a:t>
+            </a:r>
+            <a:endParaRPr sz="1300">
+              <a:solidFill>
+                <a:schemeClr val="lt1"/>
+              </a:solidFill>
+            </a:endParaRPr>
+          </a:p>
+          <a:p>
+            <a:pPr indent="0" lvl="0" marL="0" rtl="0" algn="l">
+              <a:spcBef>
+                <a:spcPts val="0"/>
+              </a:spcBef>
+              <a:spcAft>
+                <a:spcPts val="0"/>
+              </a:spcAft>
+              <a:buNone/>
+            </a:pPr>
+            <a:r>
+              <a:rPr lang="en-US" sz="1300">
+                <a:solidFill>
+                  <a:schemeClr val="lt1"/>
+                </a:solidFill>
+              </a:rPr>
+              <a:t>              "max": 4</a:t>
+            </a:r>
+            <a:endParaRPr sz="1300">
+              <a:solidFill>
+                <a:schemeClr val="lt1"/>
+              </a:solidFill>
+            </a:endParaRPr>
+          </a:p>
+          <a:p>
+            <a:pPr indent="0" lvl="0" marL="0" rtl="0" algn="l">
+              <a:spcBef>
+                <a:spcPts val="0"/>
+              </a:spcBef>
+              <a:spcAft>
+                <a:spcPts val="0"/>
+              </a:spcAft>
+              <a:buNone/>
+            </a:pPr>
+            <a:r>
+              <a:rPr lang="en-US" sz="1300">
+                <a:solidFill>
+                  <a:schemeClr val="lt1"/>
+                </a:solidFill>
+              </a:rPr>
+              <a:t>         },</a:t>
+            </a:r>
+            <a:endParaRPr sz="1300">
+              <a:solidFill>
+                <a:schemeClr val="lt1"/>
+              </a:solidFill>
+            </a:endParaRPr>
+          </a:p>
+          <a:p>
+            <a:pPr indent="0" lvl="0" marL="0" rtl="0" algn="l">
+              <a:spcBef>
+                <a:spcPts val="0"/>
+              </a:spcBef>
+              <a:spcAft>
+                <a:spcPts val="0"/>
+              </a:spcAft>
+              <a:buNone/>
+            </a:pPr>
+            <a:r>
+              <a:rPr lang="en-US" sz="1300">
+                <a:solidFill>
+                  <a:schemeClr val="lt1"/>
+                </a:solidFill>
+              </a:rPr>
+              <a:t>        "surface": "distinctly and coarsely rough",</a:t>
+            </a:r>
+            <a:endParaRPr sz="1300">
+              <a:solidFill>
+                <a:schemeClr val="lt1"/>
+              </a:solidFill>
+            </a:endParaRPr>
+          </a:p>
+          <a:p>
+            <a:pPr indent="0" lvl="0" marL="0" rtl="0" algn="l">
+              <a:spcBef>
+                <a:spcPts val="0"/>
+              </a:spcBef>
+              <a:spcAft>
+                <a:spcPts val="0"/>
+              </a:spcAft>
+              <a:buNone/>
+            </a:pPr>
+            <a:r>
+              <a:rPr lang="en-US" sz="1300">
+                <a:solidFill>
+                  <a:schemeClr val="lt1"/>
+                </a:solidFill>
+              </a:rPr>
+              <a:t>        "orientation": "parallel to long axis of substrate tissue cells",</a:t>
+            </a:r>
+            <a:endParaRPr sz="1300">
+              <a:solidFill>
+                <a:schemeClr val="lt1"/>
+              </a:solidFill>
+            </a:endParaRPr>
+          </a:p>
+          <a:p>
+            <a:pPr indent="0" lvl="0" marL="0" rtl="0" algn="l">
+              <a:spcBef>
+                <a:spcPts val="0"/>
+              </a:spcBef>
+              <a:spcAft>
+                <a:spcPts val="0"/>
+              </a:spcAft>
+              <a:buNone/>
+            </a:pPr>
+            <a:r>
+              <a:rPr lang="en-US" sz="1300">
+                <a:solidFill>
+                  <a:schemeClr val="lt1"/>
+                </a:solidFill>
+              </a:rPr>
+              <a:t>        "branching": {</a:t>
+            </a:r>
+            <a:endParaRPr sz="1300">
+              <a:solidFill>
+                <a:schemeClr val="lt1"/>
+              </a:solidFill>
+            </a:endParaRPr>
+          </a:p>
+          <a:p>
+            <a:pPr indent="0" lvl="0" marL="0" rtl="0" algn="l">
+              <a:spcBef>
+                <a:spcPts val="0"/>
+              </a:spcBef>
+              <a:spcAft>
+                <a:spcPts val="0"/>
+              </a:spcAft>
+              <a:buNone/>
+            </a:pPr>
+            <a:r>
+              <a:rPr lang="en-US" sz="1300">
+                <a:solidFill>
+                  <a:schemeClr val="lt1"/>
+                </a:solidFill>
+              </a:rPr>
+              <a:t>            "location": "on exterior",</a:t>
+            </a:r>
+            <a:endParaRPr sz="1300">
+              <a:solidFill>
+                <a:schemeClr val="lt1"/>
+              </a:solidFill>
+            </a:endParaRPr>
+          </a:p>
+          <a:p>
+            <a:pPr indent="0" lvl="0" marL="0" rtl="0" algn="l">
+              <a:spcBef>
+                <a:spcPts val="0"/>
+              </a:spcBef>
+              <a:spcAft>
+                <a:spcPts val="0"/>
+              </a:spcAft>
+              <a:buNone/>
+            </a:pPr>
+            <a:r>
+              <a:rPr lang="en-US" sz="1300">
+                <a:solidFill>
+                  <a:schemeClr val="lt1"/>
+                </a:solidFill>
+              </a:rPr>
+              <a:t>            "pattern": "non-patterned network"</a:t>
+            </a:r>
+            <a:endParaRPr sz="1300">
+              <a:solidFill>
+                <a:schemeClr val="lt1"/>
+              </a:solidFill>
+            </a:endParaRPr>
+          </a:p>
+          <a:p>
+            <a:pPr indent="0" lvl="0" marL="0" rtl="0" algn="l">
+              <a:spcBef>
+                <a:spcPts val="0"/>
+              </a:spcBef>
+              <a:spcAft>
+                <a:spcPts val="0"/>
+              </a:spcAft>
+              <a:buNone/>
+            </a:pPr>
+            <a:r>
+              <a:rPr lang="en-US" sz="1300">
+                <a:solidFill>
+                  <a:schemeClr val="lt1"/>
+                </a:solidFill>
+              </a:rPr>
+              <a:t>        }</a:t>
+            </a:r>
+            <a:endParaRPr sz="1300">
+              <a:solidFill>
+                <a:schemeClr val="lt1"/>
+              </a:solidFill>
+            </a:endParaRPr>
+          </a:p>
+          <a:p>
+            <a:pPr indent="0" lvl="0" marL="0" rtl="0" algn="l">
+              <a:spcBef>
+                <a:spcPts val="0"/>
+              </a:spcBef>
+              <a:spcAft>
+                <a:spcPts val="0"/>
+              </a:spcAft>
+              <a:buNone/>
+            </a:pPr>
+            <a:r>
+              <a:rPr lang="en-US" sz="1300">
+                <a:solidFill>
+                  <a:schemeClr val="lt1"/>
+                </a:solidFill>
+              </a:rPr>
+              <a:t>    },</a:t>
+            </a:r>
+            <a:endParaRPr sz="1300">
+              <a:solidFill>
+                <a:schemeClr val="lt1"/>
+              </a:solidFill>
+            </a:endParaRPr>
+          </a:p>
+          <a:p>
+            <a:pPr indent="0" lvl="0" marL="0" rtl="0" algn="l">
+              <a:spcBef>
+                <a:spcPts val="0"/>
+              </a:spcBef>
+              <a:spcAft>
+                <a:spcPts val="0"/>
+              </a:spcAft>
+              <a:buNone/>
+            </a:pPr>
+            <a:r>
+              <a:rPr lang="en-US" sz="1300">
+                <a:solidFill>
+                  <a:schemeClr val="lt1"/>
+                </a:solidFill>
+              </a:rPr>
+              <a:t>    "sporulation_units": {</a:t>
+            </a:r>
+            <a:endParaRPr sz="1300">
+              <a:solidFill>
+                <a:schemeClr val="lt1"/>
+              </a:solidFill>
+            </a:endParaRPr>
+          </a:p>
+          <a:p>
+            <a:pPr indent="0" lvl="0" marL="0" rtl="0" algn="l">
+              <a:spcBef>
+                <a:spcPts val="0"/>
+              </a:spcBef>
+              <a:spcAft>
+                <a:spcPts val="0"/>
+              </a:spcAft>
+              <a:buNone/>
+            </a:pPr>
+            <a:r>
+              <a:rPr lang="en-US" sz="1300">
+                <a:solidFill>
+                  <a:schemeClr val="lt1"/>
+                </a:solidFill>
+              </a:rPr>
+              <a:t>        "origin": "enlarging tips of short branches",</a:t>
+            </a:r>
+            <a:endParaRPr sz="1300">
+              <a:solidFill>
+                <a:schemeClr val="lt1"/>
+              </a:solidFill>
+            </a:endParaRPr>
+          </a:p>
+          <a:p>
+            <a:pPr indent="0" lvl="0" marL="0" rtl="0" algn="l">
+              <a:spcBef>
+                <a:spcPts val="0"/>
+              </a:spcBef>
+              <a:spcAft>
+                <a:spcPts val="0"/>
+              </a:spcAft>
+              <a:buNone/>
+            </a:pPr>
+            <a:r>
+              <a:rPr lang="en-US" sz="1300">
+                <a:solidFill>
+                  <a:schemeClr val="lt1"/>
+                </a:solidFill>
+              </a:rPr>
+              <a:t>        "color_progression": [</a:t>
+            </a:r>
+            <a:endParaRPr sz="1300">
+              <a:solidFill>
+                <a:schemeClr val="lt1"/>
+              </a:solidFill>
+            </a:endParaRPr>
+          </a:p>
+          <a:p>
+            <a:pPr indent="0" lvl="0" marL="0" rtl="0" algn="l">
+              <a:spcBef>
+                <a:spcPts val="0"/>
+              </a:spcBef>
+              <a:spcAft>
+                <a:spcPts val="0"/>
+              </a:spcAft>
+              <a:buNone/>
+            </a:pPr>
+            <a:r>
+              <a:rPr lang="en-US" sz="1300">
+                <a:solidFill>
+                  <a:schemeClr val="lt1"/>
+                </a:solidFill>
+              </a:rPr>
+              <a:t>             "concolorous with surface mycelium",</a:t>
+            </a:r>
+            <a:endParaRPr sz="1300">
+              <a:solidFill>
+                <a:schemeClr val="lt1"/>
+              </a:solidFill>
+            </a:endParaRPr>
+          </a:p>
+          <a:p>
+            <a:pPr indent="0" lvl="0" marL="0" rtl="0" algn="l">
+              <a:spcBef>
+                <a:spcPts val="0"/>
+              </a:spcBef>
+              <a:spcAft>
+                <a:spcPts val="0"/>
+              </a:spcAft>
+              <a:buNone/>
+            </a:pPr>
+            <a:r>
+              <a:rPr lang="en-US" sz="1300">
+                <a:solidFill>
+                  <a:schemeClr val="lt1"/>
+                </a:solidFill>
+              </a:rPr>
+              <a:t>             "dark orange-brown",</a:t>
+            </a:r>
+            <a:endParaRPr sz="1300">
+              <a:solidFill>
+                <a:schemeClr val="lt1"/>
+              </a:solidFill>
+            </a:endParaRPr>
+          </a:p>
+          <a:p>
+            <a:pPr indent="0" lvl="0" marL="0" rtl="0" algn="l">
+              <a:spcBef>
+                <a:spcPts val="0"/>
+              </a:spcBef>
+              <a:spcAft>
+                <a:spcPts val="0"/>
+              </a:spcAft>
+              <a:buNone/>
+            </a:pPr>
+            <a:r>
+              <a:rPr lang="en-US" sz="1300">
+                <a:solidFill>
+                  <a:schemeClr val="lt1"/>
+                </a:solidFill>
+              </a:rPr>
+              <a:t>             "black-brown and opaque"</a:t>
+            </a:r>
+            <a:endParaRPr sz="1300">
+              <a:solidFill>
+                <a:schemeClr val="lt1"/>
+              </a:solidFill>
+            </a:endParaRPr>
+          </a:p>
+          <a:p>
+            <a:pPr indent="0" lvl="0" marL="0" rtl="0" algn="l">
+              <a:spcBef>
+                <a:spcPts val="0"/>
+              </a:spcBef>
+              <a:spcAft>
+                <a:spcPts val="0"/>
+              </a:spcAft>
+              <a:buNone/>
+            </a:pPr>
+            <a:r>
+              <a:rPr lang="en-US" sz="1300">
+                <a:solidFill>
+                  <a:schemeClr val="lt1"/>
+                </a:solidFill>
+              </a:rPr>
+              <a:t>        ],</a:t>
+            </a:r>
+            <a:endParaRPr sz="1300">
+              <a:solidFill>
+                <a:schemeClr val="lt1"/>
+              </a:solidFill>
+            </a:endParaRPr>
+          </a:p>
+          <a:p>
+            <a:pPr indent="0" lvl="0" marL="0" rtl="0" algn="l">
+              <a:spcBef>
+                <a:spcPts val="0"/>
+              </a:spcBef>
+              <a:spcAft>
+                <a:spcPts val="0"/>
+              </a:spcAft>
+              <a:buNone/>
+            </a:pPr>
+            <a:r>
+              <a:rPr lang="en-US" sz="1300">
+                <a:solidFill>
+                  <a:schemeClr val="lt1"/>
+                </a:solidFill>
+              </a:rPr>
+              <a:t>        "attachment": {</a:t>
+            </a:r>
+            <a:endParaRPr sz="1300">
+              <a:solidFill>
+                <a:schemeClr val="lt1"/>
+              </a:solidFill>
+            </a:endParaRPr>
+          </a:p>
+          <a:p>
+            <a:pPr indent="0" lvl="0" marL="0" rtl="0" algn="l">
+              <a:spcBef>
+                <a:spcPts val="0"/>
+              </a:spcBef>
+              <a:spcAft>
+                <a:spcPts val="0"/>
+              </a:spcAft>
+              <a:buNone/>
+            </a:pPr>
+            <a:r>
+              <a:rPr lang="en-US" sz="1300">
+                <a:solidFill>
+                  <a:schemeClr val="lt1"/>
+                </a:solidFill>
+              </a:rPr>
+              <a:t>            "occasional": "attached to hypha",</a:t>
+            </a:r>
+            <a:endParaRPr sz="1300">
+              <a:solidFill>
+                <a:schemeClr val="lt1"/>
+              </a:solidFill>
+            </a:endParaRPr>
+          </a:p>
+          <a:p>
+            <a:pPr indent="0" lvl="0" marL="0" rtl="0" algn="l">
+              <a:spcBef>
+                <a:spcPts val="0"/>
+              </a:spcBef>
+              <a:spcAft>
+                <a:spcPts val="0"/>
+              </a:spcAft>
+              <a:buNone/>
+            </a:pPr>
+            <a:r>
+              <a:rPr lang="en-US" sz="1300">
+                <a:solidFill>
+                  <a:schemeClr val="lt1"/>
+                </a:solidFill>
+              </a:rPr>
+              <a:t>            "typical": "broken loose or obscured by crowding and opacity"</a:t>
+            </a:r>
+            <a:endParaRPr sz="1300">
+              <a:solidFill>
+                <a:schemeClr val="lt1"/>
+              </a:solidFill>
+            </a:endParaRPr>
+          </a:p>
+          <a:p>
+            <a:pPr indent="0" lvl="0" marL="0" rtl="0" algn="l">
+              <a:spcBef>
+                <a:spcPts val="0"/>
+              </a:spcBef>
+              <a:spcAft>
+                <a:spcPts val="0"/>
+              </a:spcAft>
+              <a:buNone/>
+            </a:pPr>
+            <a:r>
+              <a:rPr lang="en-US" sz="1300">
+                <a:solidFill>
+                  <a:schemeClr val="lt1"/>
+                </a:solidFill>
+              </a:rPr>
+              <a:t>        }</a:t>
+            </a:r>
+            <a:endParaRPr sz="1300">
+              <a:solidFill>
+                <a:schemeClr val="lt1"/>
+              </a:solidFill>
+            </a:endParaRPr>
+          </a:p>
+          <a:p>
+            <a:pPr indent="0" lvl="0" marL="0" rtl="0" algn="l">
+              <a:spcBef>
+                <a:spcPts val="0"/>
+              </a:spcBef>
+              <a:spcAft>
+                <a:spcPts val="0"/>
+              </a:spcAft>
+              <a:buNone/>
+            </a:pPr>
+            <a:r>
+              <a:rPr lang="en-US" sz="1300">
+                <a:solidFill>
+                  <a:schemeClr val="lt1"/>
+                </a:solidFill>
+              </a:rPr>
+              <a:t>    }</a:t>
+            </a:r>
+            <a:endParaRPr sz="1300">
+              <a:solidFill>
+                <a:schemeClr val="lt1"/>
+              </a:solidFill>
+            </a:endParaRPr>
+          </a:p>
+          <a:p>
+            <a:pPr indent="0" lvl="0" marL="0" rtl="0" algn="l">
+              <a:spcBef>
+                <a:spcPts val="0"/>
+              </a:spcBef>
+              <a:spcAft>
+                <a:spcPts val="0"/>
+              </a:spcAft>
+              <a:buNone/>
+            </a:pPr>
+            <a:r>
+              <a:rPr lang="en-US" sz="1300">
+                <a:solidFill>
+                  <a:schemeClr val="lt1"/>
+                </a:solidFill>
+              </a:rPr>
+              <a:t>}</a:t>
+            </a:r>
+            <a:endParaRPr sz="1300">
+              <a:solidFill>
+                <a:schemeClr val="lt1"/>
+              </a:solidFill>
+            </a:endParaRPr>
+          </a:p>
+        </p:txBody>
+      </p:sp>
+      <p:sp>
+        <p:nvSpPr>
+          <p:cNvPr id="202" name="Google Shape;202;g3cdd6918926_0_12"/>
+          <p:cNvSpPr txBox="1"/>
+          <p:nvPr/>
+        </p:nvSpPr>
+        <p:spPr>
+          <a:xfrm>
+            <a:off x="178350" y="178350"/>
+            <a:ext cx="5106900" cy="1378200"/>
+          </a:xfrm>
+          <a:prstGeom prst="rect">
+            <a:avLst/>
+          </a:prstGeom>
+          <a:noFill/>
+          <a:ln>
+            <a:noFill/>
+          </a:ln>
+        </p:spPr>
+        <p:txBody>
+          <a:bodyPr anchorCtr="0" anchor="t" bIns="91425" lIns="91425" spcFirstLastPara="1" rIns="91425" wrap="square" tIns="91425">
+            <a:noAutofit/>
+          </a:bodyPr>
+          <a:lstStyle/>
+          <a:p>
+            <a:pPr indent="0" lvl="0" marL="0" rtl="0" algn="l">
+              <a:spcBef>
+                <a:spcPts val="0"/>
+              </a:spcBef>
+              <a:spcAft>
+                <a:spcPts val="0"/>
+              </a:spcAft>
+              <a:buNone/>
+            </a:pPr>
+            <a:r>
+              <a:rPr lang="en-US" sz="3000">
+                <a:solidFill>
+                  <a:schemeClr val="lt1"/>
+                </a:solidFill>
+                <a:latin typeface="Century Gothic"/>
+                <a:ea typeface="Century Gothic"/>
+                <a:cs typeface="Century Gothic"/>
+                <a:sym typeface="Century Gothic"/>
+              </a:rPr>
+              <a:t>Description to JSON</a:t>
+            </a:r>
+            <a:endParaRPr sz="3000">
+              <a:solidFill>
+                <a:schemeClr val="lt1"/>
+              </a:solidFill>
+              <a:latin typeface="Century Gothic"/>
+              <a:ea typeface="Century Gothic"/>
+              <a:cs typeface="Century Gothic"/>
+              <a:sym typeface="Century Gothic"/>
+            </a:endParaRPr>
+          </a:p>
+        </p:txBody>
+      </p:sp>
+    </p:spTree>
+  </p:cSld>
+  <p:clrMapOvr>
+    <a:masterClrMapping/>
+  </p:clrMapOvr>
+</p:sld>
+</file>
+
+<file path=ppt/slides/slide7.xml><?xml version="1.0" encoding="utf-8"?>
+<p:sld xmlns:a="http://schemas.openxmlformats.org/drawingml/2006/main" xmlns:r="http://schemas.openxmlformats.org/officeDocument/2006/relationships" xmlns:mc="http://schemas.openxmlformats.org/markup-compatibility/2006" xmlns:mv="urn:schemas-microsoft-com:mac:vml" xmlns:p="http://schemas.openxmlformats.org/presentationml/2006/main" xmlns:c="http://schemas.openxmlformats.org/drawingml/2006/chart" xmlns:dgm="http://schemas.openxmlformats.org/drawingml/2006/diagram" xmlns:o="urn:schemas-microsoft-com:office:office" xmlns:v="urn:schemas-microsoft-com:vml" xmlns:pvml="urn:schemas-microsoft-com:office:powerpoint" xmlns:com="http://schemas.openxmlformats.org/drawingml/2006/compatibility" xmlns:p14="http://schemas.microsoft.com/office/powerpoint/2010/main" xmlns:p15="http://schemas.microsoft.com/office/powerpoint/2012/main" xmlns:ahyp="http://schemas.microsoft.com/office/drawing/2018/hyperlinkcolor">
+  <p:cSld>
+    <p:spTree>
+      <p:nvGrpSpPr>
+        <p:cNvPr id="207" name="Shape 207"/>
+        <p:cNvGrpSpPr/>
+        <p:nvPr/>
+      </p:nvGrpSpPr>
+      <p:grpSpPr>
+        <a:xfrm>
+          <a:off x="0" y="0"/>
+          <a:ext cx="0" cy="0"/>
+          <a:chOff x="0" y="0"/>
+          <a:chExt cx="0" cy="0"/>
+        </a:xfrm>
+      </p:grpSpPr>
+      <p:pic>
+        <p:nvPicPr>
+          <p:cNvPr id="208" name="Google Shape;208;g3cdd6918926_0_24" title="Data_Storage.png"/>
+          <p:cNvPicPr preferRelativeResize="0"/>
+          <p:nvPr/>
+        </p:nvPicPr>
+        <p:blipFill>
+          <a:blip r:embed="rId3">
+            <a:alphaModFix/>
+          </a:blip>
+          <a:stretch>
+            <a:fillRect/>
+          </a:stretch>
+        </p:blipFill>
+        <p:spPr>
+          <a:xfrm>
+            <a:off x="10342725" y="5975450"/>
+            <a:ext cx="1647825" cy="609600"/>
+          </a:xfrm>
+          <a:prstGeom prst="rect">
+            <a:avLst/>
+          </a:prstGeom>
+          <a:noFill/>
+          <a:ln>
+            <a:noFill/>
+          </a:ln>
+        </p:spPr>
+      </p:pic>
+      <p:pic>
+        <p:nvPicPr>
+          <p:cNvPr id="209" name="Google Shape;209;g3cdd6918926_0_24" title="skol_architecture_by_subproject_left_grey.png"/>
+          <p:cNvPicPr preferRelativeResize="0"/>
+          <p:nvPr/>
+        </p:nvPicPr>
+        <p:blipFill>
+          <a:blip r:embed="rId4">
+            <a:alphaModFix/>
+          </a:blip>
+          <a:stretch>
+            <a:fillRect/>
+          </a:stretch>
+        </p:blipFill>
+        <p:spPr>
+          <a:xfrm>
+            <a:off x="152400" y="152400"/>
+            <a:ext cx="11887200" cy="2784502"/>
+          </a:xfrm>
+          <a:prstGeom prst="rect">
+            <a:avLst/>
+          </a:prstGeom>
+          <a:noFill/>
+          <a:ln>
+            <a:noFill/>
+          </a:ln>
+        </p:spPr>
+      </p:pic>
+      <p:pic>
+        <p:nvPicPr>
+          <p:cNvPr id="210" name="Google Shape;210;g3cdd6918926_0_24" title="skol_architecture_by_subproject_right_grey.png"/>
+          <p:cNvPicPr preferRelativeResize="0"/>
+          <p:nvPr/>
+        </p:nvPicPr>
+        <p:blipFill>
+          <a:blip r:embed="rId5">
+            <a:alphaModFix/>
+          </a:blip>
+          <a:stretch>
+            <a:fillRect/>
+          </a:stretch>
+        </p:blipFill>
+        <p:spPr>
+          <a:xfrm>
+            <a:off x="152400" y="3089302"/>
+            <a:ext cx="10037926" cy="3548069"/>
+          </a:xfrm>
+          <a:prstGeom prst="rect">
+            <a:avLst/>
+          </a:prstGeom>
+          <a:noFill/>
+          <a:ln>
+            <a:noFill/>
+          </a:ln>
+        </p:spPr>
+      </p:pic>
+    </p:spTree>
+  </p:cSld>
+  <p:clrMapOvr>
+    <a:masterClrMapping/>
+  </p:clrMapOvr>
+</p:sld>
+</file>
+
+<file path=ppt/slides/slide8.xml><?xml version="1.0" encoding="utf-8"?>
+<p:sld xmlns:a="http://schemas.openxmlformats.org/drawingml/2006/main" xmlns:r="http://schemas.openxmlformats.org/officeDocument/2006/relationships" xmlns:mc="http://schemas.openxmlformats.org/markup-compatibility/2006" xmlns:mv="urn:schemas-microsoft-com:mac:vml" xmlns:p="http://schemas.openxmlformats.org/presentationml/2006/main" xmlns:c="http://schemas.openxmlformats.org/drawingml/2006/chart" xmlns:dgm="http://schemas.openxmlformats.org/drawingml/2006/diagram" xmlns:o="urn:schemas-microsoft-com:office:office" xmlns:v="urn:schemas-microsoft-com:vml" xmlns:pvml="urn:schemas-microsoft-com:office:powerpoint" xmlns:com="http://schemas.openxmlformats.org/drawingml/2006/compatibility" xmlns:p14="http://schemas.microsoft.com/office/powerpoint/2010/main" xmlns:p15="http://schemas.microsoft.com/office/powerpoint/2012/main" xmlns:ahyp="http://schemas.microsoft.com/office/drawing/2018/hyperlinkcolor">
+  <p:cSld>
+    <p:spTree>
+      <p:nvGrpSpPr>
+        <p:cNvPr id="215" name="Shape 215"/>
+        <p:cNvGrpSpPr/>
+        <p:nvPr/>
+      </p:nvGrpSpPr>
+      <p:grpSpPr>
+        <a:xfrm>
+          <a:off x="0" y="0"/>
+          <a:ext cx="0" cy="0"/>
+          <a:chOff x="0" y="0"/>
+          <a:chExt cx="0" cy="0"/>
+        </a:xfrm>
+      </p:grpSpPr>
+      <p:pic>
+        <p:nvPicPr>
+          <p:cNvPr id="216" name="Google Shape;216;g3d18e836f13_0_37" title="Data_Storage.png"/>
+          <p:cNvPicPr preferRelativeResize="0"/>
+          <p:nvPr/>
+        </p:nvPicPr>
+        <p:blipFill>
+          <a:blip r:embed="rId3">
+            <a:alphaModFix/>
+          </a:blip>
+          <a:stretch>
+            <a:fillRect/>
+          </a:stretch>
+        </p:blipFill>
+        <p:spPr>
+          <a:xfrm>
+            <a:off x="10342725" y="5975450"/>
+            <a:ext cx="1647825" cy="609600"/>
+          </a:xfrm>
+          <a:prstGeom prst="rect">
+            <a:avLst/>
+          </a:prstGeom>
+          <a:noFill/>
+          <a:ln>
+            <a:noFill/>
+          </a:ln>
+        </p:spPr>
+      </p:pic>
+      <p:pic>
+        <p:nvPicPr>
+          <p:cNvPr id="217" name="Google Shape;217;g3d18e836f13_0_37" title="pseudoclades.png"/>
+          <p:cNvPicPr preferRelativeResize="0"/>
+          <p:nvPr/>
+        </p:nvPicPr>
+        <p:blipFill>
+          <a:blip r:embed="rId4">
+            <a:alphaModFix/>
+          </a:blip>
+          <a:stretch>
+            <a:fillRect/>
+          </a:stretch>
+        </p:blipFill>
+        <p:spPr>
+          <a:xfrm>
+            <a:off x="2670400" y="152400"/>
+            <a:ext cx="7477053" cy="6553200"/>
+          </a:xfrm>
+          <a:prstGeom prst="rect">
+            <a:avLst/>
+          </a:prstGeom>
+          <a:noFill/>
+          <a:ln>
+            <a:noFill/>
+          </a:ln>
+        </p:spPr>
+      </p:pic>
+      <p:sp>
+        <p:nvSpPr>
+          <p:cNvPr id="218" name="Google Shape;218;g3d18e836f13_0_37"/>
+          <p:cNvSpPr txBox="1"/>
+          <p:nvPr/>
+        </p:nvSpPr>
+        <p:spPr>
+          <a:xfrm>
+            <a:off x="143300" y="409425"/>
+            <a:ext cx="2272500" cy="2517900"/>
+          </a:xfrm>
+          <a:prstGeom prst="rect">
+            <a:avLst/>
+          </a:prstGeom>
+          <a:noFill/>
+          <a:ln>
+            <a:noFill/>
+          </a:ln>
+        </p:spPr>
+        <p:txBody>
+          <a:bodyPr anchorCtr="0" anchor="t" bIns="91425" lIns="91425" spcFirstLastPara="1" rIns="91425" wrap="square" tIns="91425">
+            <a:noAutofit/>
+          </a:bodyPr>
+          <a:lstStyle/>
+          <a:p>
+            <a:pPr indent="0" lvl="0" marL="0" rtl="0" algn="l">
+              <a:spcBef>
+                <a:spcPts val="0"/>
+              </a:spcBef>
+              <a:spcAft>
+                <a:spcPts val="0"/>
+              </a:spcAft>
+              <a:buNone/>
+            </a:pPr>
+            <a:r>
+              <a:rPr lang="en-US" sz="2400">
+                <a:solidFill>
+                  <a:schemeClr val="lt1"/>
+                </a:solidFill>
+                <a:latin typeface="Century Gothic"/>
+                <a:ea typeface="Century Gothic"/>
+                <a:cs typeface="Century Gothic"/>
+                <a:sym typeface="Century Gothic"/>
+              </a:rPr>
+              <a:t>Pseudoclades</a:t>
+            </a:r>
+            <a:endParaRPr sz="2400">
+              <a:solidFill>
+                <a:schemeClr val="lt1"/>
+              </a:solidFill>
+              <a:latin typeface="Century Gothic"/>
+              <a:ea typeface="Century Gothic"/>
+              <a:cs typeface="Century Gothic"/>
+              <a:sym typeface="Century Gothic"/>
+            </a:endParaRPr>
+          </a:p>
+        </p:txBody>
+      </p:sp>
+    </p:spTree>
+  </p:cSld>
+  <p:clrMapOvr>
+    <a:masterClrMapping/>
+  </p:clrMapOvr>
+</p:sld>
+</file>
+
+<file path=ppt/slides/slide9.xml><?xml version="1.0" encoding="utf-8"?>
+<p:sld xmlns:a="http://schemas.openxmlformats.org/drawingml/2006/main" xmlns:r="http://schemas.openxmlformats.org/officeDocument/2006/relationships" xmlns:mc="http://schemas.openxmlformats.org/markup-compatibility/2006" xmlns:mv="urn:schemas-microsoft-com:mac:vml" xmlns:p="http://schemas.openxmlformats.org/presentationml/2006/main" xmlns:c="http://schemas.openxmlformats.org/drawingml/2006/chart" xmlns:dgm="http://schemas.openxmlformats.org/drawingml/2006/diagram" xmlns:o="urn:schemas-microsoft-com:office:office" xmlns:v="urn:schemas-microsoft-com:vml" xmlns:pvml="urn:schemas-microsoft-com:office:powerpoint" xmlns:com="http://schemas.openxmlformats.org/drawingml/2006/compatibility" xmlns:p14="http://schemas.microsoft.com/office/powerpoint/2010/main" xmlns:p15="http://schemas.microsoft.com/office/powerpoint/2012/main" xmlns:ahyp="http://schemas.microsoft.com/office/drawing/2018/hyperlinkcolor">
+  <p:cSld>
+    <p:spTree>
+      <p:nvGrpSpPr>
+        <p:cNvPr id="223" name="Shape 223"/>
+        <p:cNvGrpSpPr/>
+        <p:nvPr/>
+      </p:nvGrpSpPr>
+      <p:grpSpPr>
+        <a:xfrm>
+          <a:off x="0" y="0"/>
+          <a:ext cx="0" cy="0"/>
+          <a:chOff x="0" y="0"/>
+          <a:chExt cx="0" cy="0"/>
+        </a:xfrm>
+      </p:grpSpPr>
+      <p:pic>
+        <p:nvPicPr>
+          <p:cNvPr id="224" name="Google Shape;224;g3cd5945c579_0_106" title="skol_ui.png"/>
           <p:cNvPicPr preferRelativeResize="0"/>
           <p:nvPr/>
         </p:nvPicPr>
@@ -26696,7 +34637,7 @@
       </p:pic>
       <p:sp>
         <p:nvSpPr>
-          <p:cNvPr id="184" name="Google Shape;184;g3cd5945c579_0_106"/>
+          <p:cNvPr id="225" name="Google Shape;225;g3cd5945c579_0_106"/>
           <p:cNvSpPr txBox="1"/>
           <p:nvPr/>
         </p:nvSpPr>
@@ -26760,640 +34701,24 @@
           </a:p>
         </p:txBody>
       </p:sp>
-    </p:spTree>
-  </p:cSld>
-  <p:clrMapOvr>
-    <a:masterClrMapping/>
-  </p:clrMapOvr>
-</p:sld>
-</file>
-
-<file path=ppt/slides/slide5.xml><?xml version="1.0" encoding="utf-8"?>
-<p:sld xmlns:a="http://schemas.openxmlformats.org/drawingml/2006/main" xmlns:r="http://schemas.openxmlformats.org/officeDocument/2006/relationships" xmlns:mc="http://schemas.openxmlformats.org/markup-compatibility/2006" xmlns:mv="urn:schemas-microsoft-com:mac:vml" xmlns:p="http://schemas.openxmlformats.org/presentationml/2006/main" xmlns:c="http://schemas.openxmlformats.org/drawingml/2006/chart" xmlns:dgm="http://schemas.openxmlformats.org/drawingml/2006/diagram" xmlns:o="urn:schemas-microsoft-com:office:office" xmlns:v="urn:schemas-microsoft-com:vml" xmlns:pvml="urn:schemas-microsoft-com:office:powerpoint" xmlns:com="http://schemas.openxmlformats.org/drawingml/2006/compatibility" xmlns:p14="http://schemas.microsoft.com/office/powerpoint/2010/main" xmlns:p15="http://schemas.microsoft.com/office/powerpoint/2012/main" xmlns:ahyp="http://schemas.microsoft.com/office/drawing/2018/hyperlinkcolor">
-  <p:cSld>
-    <p:spTree>
-      <p:nvGrpSpPr>
-        <p:cNvPr id="189" name="Shape 189"/>
-        <p:cNvGrpSpPr/>
-        <p:nvPr/>
-      </p:nvGrpSpPr>
-      <p:grpSpPr>
-        <a:xfrm>
-          <a:off x="0" y="0"/>
-          <a:ext cx="0" cy="0"/>
-          <a:chOff x="0" y="0"/>
-          <a:chExt cx="0" cy="0"/>
-        </a:xfrm>
-      </p:grpSpPr>
       <p:pic>
         <p:nvPicPr>
-          <p:cNvPr id="190" name="Google Shape;190;g3cd5945c579_0_126" title="skol_search_results.png"/>
+          <p:cNvPr id="226" name="Google Shape;226;g3cd5945c579_0_106" title="UI_Web_Site.png"/>
           <p:cNvPicPr preferRelativeResize="0"/>
           <p:nvPr/>
         </p:nvPicPr>
-        <p:blipFill rotWithShape="1">
-          <a:blip r:embed="rId3">
+        <p:blipFill>
+          <a:blip r:embed="rId4">
             <a:alphaModFix/>
           </a:blip>
-          <a:srcRect b="0" l="0" r="0" t="0"/>
-          <a:stretch/>
+          <a:stretch>
+            <a:fillRect/>
+          </a:stretch>
         </p:blipFill>
         <p:spPr>
           <a:xfrm>
-            <a:off x="3449327" y="984600"/>
-            <a:ext cx="6849627" cy="5621076"/>
-          </a:xfrm>
-          <a:prstGeom prst="rect">
-            <a:avLst/>
-          </a:prstGeom>
-          <a:noFill/>
-          <a:ln>
-            <a:noFill/>
-          </a:ln>
-        </p:spPr>
-      </p:pic>
-      <p:sp>
-        <p:nvSpPr>
-          <p:cNvPr id="191" name="Google Shape;191;g3cd5945c579_0_126"/>
-          <p:cNvSpPr txBox="1"/>
-          <p:nvPr/>
-        </p:nvSpPr>
-        <p:spPr>
-          <a:xfrm>
-            <a:off x="1104400" y="210100"/>
-            <a:ext cx="5484000" cy="624600"/>
-          </a:xfrm>
-          <a:prstGeom prst="rect">
-            <a:avLst/>
-          </a:prstGeom>
-          <a:noFill/>
-          <a:ln>
-            <a:noFill/>
-          </a:ln>
-        </p:spPr>
-        <p:txBody>
-          <a:bodyPr anchorCtr="0" anchor="t" bIns="91425" lIns="91425" spcFirstLastPara="1" rIns="91425" wrap="square" tIns="91425">
-            <a:noAutofit/>
-          </a:bodyPr>
-          <a:lstStyle/>
-          <a:p>
-            <a:pPr indent="0" lvl="0" marL="0" marR="0" rtl="0" algn="l">
-              <a:lnSpc>
-                <a:spcPct val="100000"/>
-              </a:lnSpc>
-              <a:spcBef>
-                <a:spcPts val="0"/>
-              </a:spcBef>
-              <a:spcAft>
-                <a:spcPts val="0"/>
-              </a:spcAft>
-              <a:buClr>
-                <a:srgbClr val="000000"/>
-              </a:buClr>
-              <a:buSzPts val="3000"/>
-              <a:buFont typeface="Arial"/>
-              <a:buNone/>
-            </a:pPr>
-            <a:r>
-              <a:rPr b="0" i="0" lang="en-US" sz="3000" u="none" cap="none" strike="noStrike">
-                <a:solidFill>
-                  <a:schemeClr val="lt1"/>
-                </a:solidFill>
-                <a:latin typeface="Century Gothic"/>
-                <a:ea typeface="Century Gothic"/>
-                <a:cs typeface="Century Gothic"/>
-                <a:sym typeface="Century Gothic"/>
-              </a:rPr>
-              <a:t>Search Results</a:t>
-            </a:r>
-            <a:endParaRPr b="0" i="0" sz="3000" u="none" cap="none" strike="noStrike">
-              <a:solidFill>
-                <a:schemeClr val="lt1"/>
-              </a:solidFill>
-              <a:latin typeface="Century Gothic"/>
-              <a:ea typeface="Century Gothic"/>
-              <a:cs typeface="Century Gothic"/>
-              <a:sym typeface="Century Gothic"/>
-            </a:endParaRPr>
-          </a:p>
-        </p:txBody>
-      </p:sp>
-    </p:spTree>
-  </p:cSld>
-  <p:clrMapOvr>
-    <a:masterClrMapping/>
-  </p:clrMapOvr>
-</p:sld>
-</file>
-
-<file path=ppt/slides/slide6.xml><?xml version="1.0" encoding="utf-8"?>
-<p:sld xmlns:a="http://schemas.openxmlformats.org/drawingml/2006/main" xmlns:r="http://schemas.openxmlformats.org/officeDocument/2006/relationships" xmlns:mc="http://schemas.openxmlformats.org/markup-compatibility/2006" xmlns:mv="urn:schemas-microsoft-com:mac:vml" xmlns:p="http://schemas.openxmlformats.org/presentationml/2006/main" xmlns:c="http://schemas.openxmlformats.org/drawingml/2006/chart" xmlns:dgm="http://schemas.openxmlformats.org/drawingml/2006/diagram" xmlns:o="urn:schemas-microsoft-com:office:office" xmlns:v="urn:schemas-microsoft-com:vml" xmlns:pvml="urn:schemas-microsoft-com:office:powerpoint" xmlns:com="http://schemas.openxmlformats.org/drawingml/2006/compatibility" xmlns:p14="http://schemas.microsoft.com/office/powerpoint/2010/main" xmlns:p15="http://schemas.microsoft.com/office/powerpoint/2012/main" xmlns:ahyp="http://schemas.microsoft.com/office/drawing/2018/hyperlinkcolor">
-  <p:cSld>
-    <p:spTree>
-      <p:nvGrpSpPr>
-        <p:cNvPr id="196" name="Shape 196"/>
-        <p:cNvGrpSpPr/>
-        <p:nvPr/>
-      </p:nvGrpSpPr>
-      <p:grpSpPr>
-        <a:xfrm>
-          <a:off x="0" y="0"/>
-          <a:ext cx="0" cy="0"/>
-          <a:chOff x="0" y="0"/>
-          <a:chExt cx="0" cy="0"/>
-        </a:xfrm>
-      </p:grpSpPr>
-      <p:pic>
-        <p:nvPicPr>
-          <p:cNvPr id="197" name="Google Shape;197;g3cdd6918556_0_0" title="skol_vocabulary_features_tool.png"/>
-          <p:cNvPicPr preferRelativeResize="0"/>
-          <p:nvPr/>
-        </p:nvPicPr>
-        <p:blipFill rotWithShape="1">
-          <a:blip r:embed="rId3">
-            <a:alphaModFix/>
-          </a:blip>
-          <a:srcRect b="0" l="0" r="0" t="0"/>
-          <a:stretch/>
-        </p:blipFill>
-        <p:spPr>
-          <a:xfrm>
-            <a:off x="3216600" y="1076325"/>
-            <a:ext cx="4657725" cy="4705350"/>
-          </a:xfrm>
-          <a:prstGeom prst="rect">
-            <a:avLst/>
-          </a:prstGeom>
-          <a:noFill/>
-          <a:ln>
-            <a:noFill/>
-          </a:ln>
-        </p:spPr>
-      </p:pic>
-      <p:sp>
-        <p:nvSpPr>
-          <p:cNvPr id="198" name="Google Shape;198;g3cdd6918556_0_0"/>
-          <p:cNvSpPr txBox="1"/>
-          <p:nvPr/>
-        </p:nvSpPr>
-        <p:spPr>
-          <a:xfrm>
-            <a:off x="1215950" y="243200"/>
-            <a:ext cx="7636200" cy="534900"/>
-          </a:xfrm>
-          <a:prstGeom prst="rect">
-            <a:avLst/>
-          </a:prstGeom>
-          <a:noFill/>
-          <a:ln>
-            <a:noFill/>
-          </a:ln>
-        </p:spPr>
-        <p:txBody>
-          <a:bodyPr anchorCtr="0" anchor="t" bIns="91425" lIns="91425" spcFirstLastPara="1" rIns="91425" wrap="square" tIns="91425">
-            <a:noAutofit/>
-          </a:bodyPr>
-          <a:lstStyle/>
-          <a:p>
-            <a:pPr indent="0" lvl="0" marL="0" marR="0" rtl="0" algn="l">
-              <a:lnSpc>
-                <a:spcPct val="100000"/>
-              </a:lnSpc>
-              <a:spcBef>
-                <a:spcPts val="0"/>
-              </a:spcBef>
-              <a:spcAft>
-                <a:spcPts val="0"/>
-              </a:spcAft>
-              <a:buClr>
-                <a:srgbClr val="000000"/>
-              </a:buClr>
-              <a:buSzPts val="3000"/>
-              <a:buFont typeface="Arial"/>
-              <a:buNone/>
-            </a:pPr>
-            <a:r>
-              <a:rPr b="0" i="0" lang="en-US" sz="3000" u="none" cap="none" strike="noStrike">
-                <a:solidFill>
-                  <a:schemeClr val="lt1"/>
-                </a:solidFill>
-                <a:latin typeface="Century Gothic"/>
-                <a:ea typeface="Century Gothic"/>
-                <a:cs typeface="Century Gothic"/>
-                <a:sym typeface="Century Gothic"/>
-              </a:rPr>
-              <a:t>Vocabulary Feature Tool</a:t>
-            </a:r>
-            <a:endParaRPr b="0" i="0" sz="3000" u="none" cap="none" strike="noStrike">
-              <a:solidFill>
-                <a:schemeClr val="lt1"/>
-              </a:solidFill>
-              <a:latin typeface="Century Gothic"/>
-              <a:ea typeface="Century Gothic"/>
-              <a:cs typeface="Century Gothic"/>
-              <a:sym typeface="Century Gothic"/>
-            </a:endParaRPr>
-          </a:p>
-        </p:txBody>
-      </p:sp>
-    </p:spTree>
-  </p:cSld>
-  <p:clrMapOvr>
-    <a:masterClrMapping/>
-  </p:clrMapOvr>
-</p:sld>
-</file>
-
-<file path=ppt/slides/slide7.xml><?xml version="1.0" encoding="utf-8"?>
-<p:sld xmlns:a="http://schemas.openxmlformats.org/drawingml/2006/main" xmlns:r="http://schemas.openxmlformats.org/officeDocument/2006/relationships" xmlns:mc="http://schemas.openxmlformats.org/markup-compatibility/2006" xmlns:mv="urn:schemas-microsoft-com:mac:vml" xmlns:p="http://schemas.openxmlformats.org/presentationml/2006/main" xmlns:c="http://schemas.openxmlformats.org/drawingml/2006/chart" xmlns:dgm="http://schemas.openxmlformats.org/drawingml/2006/diagram" xmlns:o="urn:schemas-microsoft-com:office:office" xmlns:v="urn:schemas-microsoft-com:vml" xmlns:pvml="urn:schemas-microsoft-com:office:powerpoint" xmlns:com="http://schemas.openxmlformats.org/drawingml/2006/compatibility" xmlns:p14="http://schemas.microsoft.com/office/powerpoint/2010/main" xmlns:p15="http://schemas.microsoft.com/office/powerpoint/2012/main" xmlns:ahyp="http://schemas.microsoft.com/office/drawing/2018/hyperlinkcolor">
-  <p:cSld>
-    <p:spTree>
-      <p:nvGrpSpPr>
-        <p:cNvPr id="203" name="Shape 203"/>
-        <p:cNvGrpSpPr/>
-        <p:nvPr/>
-      </p:nvGrpSpPr>
-      <p:grpSpPr>
-        <a:xfrm>
-          <a:off x="0" y="0"/>
-          <a:ext cx="0" cy="0"/>
-          <a:chOff x="0" y="0"/>
-          <a:chExt cx="0" cy="0"/>
-        </a:xfrm>
-      </p:grpSpPr>
-      <p:pic>
-        <p:nvPicPr>
-          <p:cNvPr id="204" name="Google Shape;204;g3cd5945c579_0_130" title="skol_json_features_tool.png"/>
-          <p:cNvPicPr preferRelativeResize="0"/>
-          <p:nvPr/>
-        </p:nvPicPr>
-        <p:blipFill rotWithShape="1">
-          <a:blip r:embed="rId3">
-            <a:alphaModFix/>
-          </a:blip>
-          <a:srcRect b="0" l="0" r="0" t="0"/>
-          <a:stretch/>
-        </p:blipFill>
-        <p:spPr>
-          <a:xfrm>
-            <a:off x="5259425" y="1323975"/>
-            <a:ext cx="5343525" cy="5372100"/>
-          </a:xfrm>
-          <a:prstGeom prst="rect">
-            <a:avLst/>
-          </a:prstGeom>
-          <a:noFill/>
-          <a:ln>
-            <a:noFill/>
-          </a:ln>
-        </p:spPr>
-      </p:pic>
-      <p:pic>
-        <p:nvPicPr>
-          <p:cNvPr id="205" name="Google Shape;205;g3cd5945c579_0_130" title="skol_text_features_tool.png"/>
-          <p:cNvPicPr preferRelativeResize="0"/>
-          <p:nvPr/>
-        </p:nvPicPr>
-        <p:blipFill rotWithShape="1">
-          <a:blip r:embed="rId4">
-            <a:alphaModFix/>
-          </a:blip>
-          <a:srcRect b="0" l="0" r="0" t="0"/>
-          <a:stretch/>
-        </p:blipFill>
-        <p:spPr>
-          <a:xfrm>
-            <a:off x="103750" y="161925"/>
-            <a:ext cx="4572000" cy="6534150"/>
-          </a:xfrm>
-          <a:prstGeom prst="rect">
-            <a:avLst/>
-          </a:prstGeom>
-          <a:noFill/>
-          <a:ln>
-            <a:noFill/>
-          </a:ln>
-        </p:spPr>
-      </p:pic>
-      <p:sp>
-        <p:nvSpPr>
-          <p:cNvPr id="206" name="Google Shape;206;g3cd5945c579_0_130"/>
-          <p:cNvSpPr txBox="1"/>
-          <p:nvPr/>
-        </p:nvSpPr>
-        <p:spPr>
-          <a:xfrm>
-            <a:off x="4967900" y="243200"/>
-            <a:ext cx="5343600" cy="778200"/>
-          </a:xfrm>
-          <a:prstGeom prst="rect">
-            <a:avLst/>
-          </a:prstGeom>
-          <a:noFill/>
-          <a:ln>
-            <a:noFill/>
-          </a:ln>
-        </p:spPr>
-        <p:txBody>
-          <a:bodyPr anchorCtr="0" anchor="t" bIns="91425" lIns="91425" spcFirstLastPara="1" rIns="91425" wrap="square" tIns="91425">
-            <a:noAutofit/>
-          </a:bodyPr>
-          <a:lstStyle/>
-          <a:p>
-            <a:pPr indent="0" lvl="0" marL="0" marR="0" rtl="0" algn="l">
-              <a:lnSpc>
-                <a:spcPct val="100000"/>
-              </a:lnSpc>
-              <a:spcBef>
-                <a:spcPts val="0"/>
-              </a:spcBef>
-              <a:spcAft>
-                <a:spcPts val="0"/>
-              </a:spcAft>
-              <a:buClr>
-                <a:srgbClr val="000000"/>
-              </a:buClr>
-              <a:buSzPts val="3000"/>
-              <a:buFont typeface="Arial"/>
-              <a:buNone/>
-            </a:pPr>
-            <a:r>
-              <a:rPr b="0" i="0" lang="en-US" sz="3000" u="none" cap="none" strike="noStrike">
-                <a:solidFill>
-                  <a:schemeClr val="lt1"/>
-                </a:solidFill>
-                <a:latin typeface="Century Gothic"/>
-                <a:ea typeface="Century Gothic"/>
-                <a:cs typeface="Century Gothic"/>
-                <a:sym typeface="Century Gothic"/>
-              </a:rPr>
-              <a:t>Text and JSON Feature tools</a:t>
-            </a:r>
-            <a:endParaRPr b="0" i="0" sz="3000" u="none" cap="none" strike="noStrike">
-              <a:solidFill>
-                <a:schemeClr val="lt1"/>
-              </a:solidFill>
-              <a:latin typeface="Century Gothic"/>
-              <a:ea typeface="Century Gothic"/>
-              <a:cs typeface="Century Gothic"/>
-              <a:sym typeface="Century Gothic"/>
-            </a:endParaRPr>
-          </a:p>
-        </p:txBody>
-      </p:sp>
-    </p:spTree>
-  </p:cSld>
-  <p:clrMapOvr>
-    <a:masterClrMapping/>
-  </p:clrMapOvr>
-</p:sld>
-</file>
-
-<file path=ppt/slides/slide8.xml><?xml version="1.0" encoding="utf-8"?>
-<p:sld xmlns:a="http://schemas.openxmlformats.org/drawingml/2006/main" xmlns:r="http://schemas.openxmlformats.org/officeDocument/2006/relationships" xmlns:mc="http://schemas.openxmlformats.org/markup-compatibility/2006" xmlns:mv="urn:schemas-microsoft-com:mac:vml" xmlns:p="http://schemas.openxmlformats.org/presentationml/2006/main" xmlns:c="http://schemas.openxmlformats.org/drawingml/2006/chart" xmlns:dgm="http://schemas.openxmlformats.org/drawingml/2006/diagram" xmlns:o="urn:schemas-microsoft-com:office:office" xmlns:v="urn:schemas-microsoft-com:vml" xmlns:pvml="urn:schemas-microsoft-com:office:powerpoint" xmlns:com="http://schemas.openxmlformats.org/drawingml/2006/compatibility" xmlns:p14="http://schemas.microsoft.com/office/powerpoint/2010/main" xmlns:p15="http://schemas.microsoft.com/office/powerpoint/2012/main" xmlns:ahyp="http://schemas.microsoft.com/office/drawing/2018/hyperlinkcolor">
-  <p:cSld>
-    <p:spTree>
-      <p:nvGrpSpPr>
-        <p:cNvPr id="211" name="Shape 211"/>
-        <p:cNvGrpSpPr/>
-        <p:nvPr/>
-      </p:nvGrpSpPr>
-      <p:grpSpPr>
-        <a:xfrm>
-          <a:off x="0" y="0"/>
-          <a:ext cx="0" cy="0"/>
-          <a:chOff x="0" y="0"/>
-          <a:chExt cx="0" cy="0"/>
-        </a:xfrm>
-      </p:grpSpPr>
-      <p:pic>
-        <p:nvPicPr>
-          <p:cNvPr id="212" name="Google Shape;212;g3cd5945c579_0_121" title="skol_metrics.png"/>
-          <p:cNvPicPr preferRelativeResize="0"/>
-          <p:nvPr/>
-        </p:nvPicPr>
-        <p:blipFill rotWithShape="1">
-          <a:blip r:embed="rId3">
-            <a:alphaModFix/>
-          </a:blip>
-          <a:srcRect b="0" l="0" r="0" t="0"/>
-          <a:stretch/>
-        </p:blipFill>
-        <p:spPr>
-          <a:xfrm>
-            <a:off x="3907388" y="1459275"/>
-            <a:ext cx="4377225" cy="4934175"/>
-          </a:xfrm>
-          <a:prstGeom prst="rect">
-            <a:avLst/>
-          </a:prstGeom>
-          <a:noFill/>
-          <a:ln>
-            <a:noFill/>
-          </a:ln>
-        </p:spPr>
-      </p:pic>
-      <p:sp>
-        <p:nvSpPr>
-          <p:cNvPr id="213" name="Google Shape;213;g3cd5945c579_0_121"/>
-          <p:cNvSpPr txBox="1"/>
-          <p:nvPr/>
-        </p:nvSpPr>
-        <p:spPr>
-          <a:xfrm>
-            <a:off x="1616550" y="210100"/>
-            <a:ext cx="7132800" cy="837000"/>
-          </a:xfrm>
-          <a:prstGeom prst="rect">
-            <a:avLst/>
-          </a:prstGeom>
-          <a:noFill/>
-          <a:ln>
-            <a:noFill/>
-          </a:ln>
-        </p:spPr>
-        <p:txBody>
-          <a:bodyPr anchorCtr="0" anchor="t" bIns="91425" lIns="91425" spcFirstLastPara="1" rIns="91425" wrap="square" tIns="91425">
-            <a:noAutofit/>
-          </a:bodyPr>
-          <a:lstStyle/>
-          <a:p>
-            <a:pPr indent="0" lvl="0" marL="0" marR="0" rtl="0" algn="l">
-              <a:lnSpc>
-                <a:spcPct val="100000"/>
-              </a:lnSpc>
-              <a:spcBef>
-                <a:spcPts val="0"/>
-              </a:spcBef>
-              <a:spcAft>
-                <a:spcPts val="0"/>
-              </a:spcAft>
-              <a:buClr>
-                <a:srgbClr val="000000"/>
-              </a:buClr>
-              <a:buSzPts val="3000"/>
-              <a:buFont typeface="Arial"/>
-              <a:buNone/>
-            </a:pPr>
-            <a:r>
-              <a:rPr b="0" i="0" lang="en-US" sz="3000" u="none" cap="none" strike="noStrike">
-                <a:solidFill>
-                  <a:schemeClr val="lt1"/>
-                </a:solidFill>
-                <a:latin typeface="Century Gothic"/>
-                <a:ea typeface="Century Gothic"/>
-                <a:cs typeface="Century Gothic"/>
-                <a:sym typeface="Century Gothic"/>
-              </a:rPr>
-              <a:t>Metrics Description Tool</a:t>
-            </a:r>
-            <a:endParaRPr b="0" i="0" sz="3000" u="none" cap="none" strike="noStrike">
-              <a:solidFill>
-                <a:schemeClr val="lt1"/>
-              </a:solidFill>
-              <a:latin typeface="Century Gothic"/>
-              <a:ea typeface="Century Gothic"/>
-              <a:cs typeface="Century Gothic"/>
-              <a:sym typeface="Century Gothic"/>
-            </a:endParaRPr>
-          </a:p>
-        </p:txBody>
-      </p:sp>
-    </p:spTree>
-  </p:cSld>
-  <p:clrMapOvr>
-    <a:masterClrMapping/>
-  </p:clrMapOvr>
-</p:sld>
-</file>
-
-<file path=ppt/slides/slide9.xml><?xml version="1.0" encoding="utf-8"?>
-<p:sld xmlns:a="http://schemas.openxmlformats.org/drawingml/2006/main" xmlns:r="http://schemas.openxmlformats.org/officeDocument/2006/relationships" xmlns:mc="http://schemas.openxmlformats.org/markup-compatibility/2006" xmlns:mv="urn:schemas-microsoft-com:mac:vml" xmlns:p="http://schemas.openxmlformats.org/presentationml/2006/main" xmlns:c="http://schemas.openxmlformats.org/drawingml/2006/chart" xmlns:dgm="http://schemas.openxmlformats.org/drawingml/2006/diagram" xmlns:o="urn:schemas-microsoft-com:office:office" xmlns:v="urn:schemas-microsoft-com:vml" xmlns:pvml="urn:schemas-microsoft-com:office:powerpoint" xmlns:com="http://schemas.openxmlformats.org/drawingml/2006/compatibility" xmlns:p14="http://schemas.microsoft.com/office/powerpoint/2010/main" xmlns:p15="http://schemas.microsoft.com/office/powerpoint/2012/main" xmlns:ahyp="http://schemas.microsoft.com/office/drawing/2018/hyperlinkcolor">
-  <p:cSld>
-    <p:spTree>
-      <p:nvGrpSpPr>
-        <p:cNvPr id="218" name="Shape 218"/>
-        <p:cNvGrpSpPr/>
-        <p:nvPr/>
-      </p:nvGrpSpPr>
-      <p:grpSpPr>
-        <a:xfrm>
-          <a:off x="0" y="0"/>
-          <a:ext cx="0" cy="0"/>
-          <a:chOff x="0" y="0"/>
-          <a:chExt cx="0" cy="0"/>
-        </a:xfrm>
-      </p:grpSpPr>
-      <p:pic>
-        <p:nvPicPr>
-          <p:cNvPr id="219" name="Google Shape;219;g3cdd6918556_0_6" title="skol_settings.png"/>
-          <p:cNvPicPr preferRelativeResize="0"/>
-          <p:nvPr/>
-        </p:nvPicPr>
-        <p:blipFill rotWithShape="1">
-          <a:blip r:embed="rId3">
-            <a:alphaModFix/>
-          </a:blip>
-          <a:srcRect b="0" l="0" r="0" t="0"/>
-          <a:stretch/>
-        </p:blipFill>
-        <p:spPr>
-          <a:xfrm>
-            <a:off x="7334650" y="152400"/>
-            <a:ext cx="2358932" cy="6553200"/>
-          </a:xfrm>
-          <a:prstGeom prst="rect">
-            <a:avLst/>
-          </a:prstGeom>
-          <a:noFill/>
-          <a:ln>
-            <a:noFill/>
-          </a:ln>
-        </p:spPr>
-      </p:pic>
-      <p:sp>
-        <p:nvSpPr>
-          <p:cNvPr id="220" name="Google Shape;220;g3cdd6918556_0_6"/>
-          <p:cNvSpPr txBox="1"/>
-          <p:nvPr/>
-        </p:nvSpPr>
-        <p:spPr>
-          <a:xfrm>
-            <a:off x="1021400" y="405325"/>
-            <a:ext cx="6079800" cy="859200"/>
-          </a:xfrm>
-          <a:prstGeom prst="rect">
-            <a:avLst/>
-          </a:prstGeom>
-          <a:noFill/>
-          <a:ln>
-            <a:noFill/>
-          </a:ln>
-        </p:spPr>
-        <p:txBody>
-          <a:bodyPr anchorCtr="0" anchor="t" bIns="91425" lIns="91425" spcFirstLastPara="1" rIns="91425" wrap="square" tIns="91425">
-            <a:noAutofit/>
-          </a:bodyPr>
-          <a:lstStyle/>
-          <a:p>
-            <a:pPr indent="0" lvl="0" marL="0" marR="0" rtl="0" algn="l">
-              <a:lnSpc>
-                <a:spcPct val="100000"/>
-              </a:lnSpc>
-              <a:spcBef>
-                <a:spcPts val="0"/>
-              </a:spcBef>
-              <a:spcAft>
-                <a:spcPts val="0"/>
-              </a:spcAft>
-              <a:buClr>
-                <a:srgbClr val="000000"/>
-              </a:buClr>
-              <a:buSzPts val="3000"/>
-              <a:buFont typeface="Arial"/>
-              <a:buNone/>
-            </a:pPr>
-            <a:r>
-              <a:rPr b="0" i="0" lang="en-US" sz="3000" u="none" cap="none" strike="noStrike">
-                <a:solidFill>
-                  <a:schemeClr val="lt1"/>
-                </a:solidFill>
-                <a:latin typeface="Century Gothic"/>
-                <a:ea typeface="Century Gothic"/>
-                <a:cs typeface="Century Gothic"/>
-                <a:sym typeface="Century Gothic"/>
-              </a:rPr>
-              <a:t>Account and Settings</a:t>
-            </a:r>
-            <a:endParaRPr b="0" i="0" sz="3000" u="none" cap="none" strike="noStrike">
-              <a:solidFill>
-                <a:schemeClr val="lt1"/>
-              </a:solidFill>
-              <a:latin typeface="Century Gothic"/>
-              <a:ea typeface="Century Gothic"/>
-              <a:cs typeface="Century Gothic"/>
-              <a:sym typeface="Century Gothic"/>
-            </a:endParaRPr>
-          </a:p>
-        </p:txBody>
-      </p:sp>
-      <p:pic>
-        <p:nvPicPr>
-          <p:cNvPr id="221" name="Google Shape;221;g3cdd6918556_0_6" title="skol_accounts.png"/>
-          <p:cNvPicPr preferRelativeResize="0"/>
-          <p:nvPr/>
-        </p:nvPicPr>
-        <p:blipFill rotWithShape="1">
-          <a:blip r:embed="rId4">
-            <a:alphaModFix/>
-          </a:blip>
-          <a:srcRect b="0" l="0" r="0" t="0"/>
-          <a:stretch/>
-        </p:blipFill>
-        <p:spPr>
-          <a:xfrm>
-            <a:off x="2519475" y="1264525"/>
-            <a:ext cx="3244443" cy="5288674"/>
+            <a:off x="10436875" y="5952450"/>
+            <a:ext cx="1571625" cy="619125"/>
           </a:xfrm>
           <a:prstGeom prst="rect">
             <a:avLst/>
